--- a/Instructions/PPT/Instructions for EasyChair Submission(Author)[UV2026].pptx
+++ b/Instructions/PPT/Instructions for EasyChair Submission(Author)[UV2026].pptx
@@ -11,7 +11,7 @@
     <p:handoutMasterId r:id="rId30"/>
   </p:handoutMasterIdLst>
   <p:sldIdLst>
-    <p:sldId id="256" r:id="rId2"/>
+    <p:sldId id="300" r:id="rId2"/>
     <p:sldId id="257" r:id="rId3"/>
     <p:sldId id="285" r:id="rId4"/>
     <p:sldId id="286" r:id="rId5"/>
@@ -379,7 +379,7 @@
           <a:p>
             <a:fld id="{0F9B84EA-7D68-4D60-9CB1-D50884785D1C}" type="datetimeFigureOut">
               <a:rPr lang="zh-CN" altLang="en-US" smtClean="0"/>
-              <a:t>2026/6/6</a:t>
+              <a:t>2026/6/7</a:t>
             </a:fld>
             <a:endParaRPr lang="zh-CN" altLang="en-US"/>
           </a:p>
@@ -908,7 +908,7 @@
   <p:cSld>
     <p:spTree>
       <p:nvGrpSpPr>
-        <p:cNvPr id="1" name="Shape 50"/>
+        <p:cNvPr id="1" name="Shape 56"/>
         <p:cNvGrpSpPr/>
         <p:nvPr/>
       </p:nvGrpSpPr>
@@ -922,7 +922,7 @@
       </p:grpSpPr>
       <p:sp>
         <p:nvSpPr>
-          <p:cNvPr id="51" name="Google Shape;51;p:notes"/>
+          <p:cNvPr id="57" name="Google Shape;57;g13a1d080442_0_0:notes"/>
           <p:cNvSpPr>
             <a:spLocks noGrp="1" noRot="1" noChangeAspect="1"/>
           </p:cNvSpPr>
@@ -963,7 +963,7 @@
       </p:sp>
       <p:sp>
         <p:nvSpPr>
-          <p:cNvPr id="52" name="Google Shape;52;p:notes"/>
+          <p:cNvPr id="58" name="Google Shape;58;g13a1d080442_0_0:notes"/>
           <p:cNvSpPr txBox="1">
             <a:spLocks noGrp="1"/>
           </p:cNvSpPr>
@@ -1008,110 +1008,6 @@
 </file>
 
 <file path=ppt/notesSlides/notesSlide10.xml><?xml version="1.0" encoding="utf-8"?>
-<p:notes xmlns:a="http://schemas.openxmlformats.org/drawingml/2006/main" xmlns:r="http://schemas.openxmlformats.org/officeDocument/2006/relationships" xmlns:p="http://schemas.openxmlformats.org/presentationml/2006/main" showMasterSp="0" showMasterPhAnim="0">
-  <p:cSld>
-    <p:spTree>
-      <p:nvGrpSpPr>
-        <p:cNvPr id="1" name="Shape 62"/>
-        <p:cNvGrpSpPr/>
-        <p:nvPr/>
-      </p:nvGrpSpPr>
-      <p:grpSpPr>
-        <a:xfrm>
-          <a:off x="0" y="0"/>
-          <a:ext cx="0" cy="0"/>
-          <a:chOff x="0" y="0"/>
-          <a:chExt cx="0" cy="0"/>
-        </a:xfrm>
-      </p:grpSpPr>
-      <p:sp>
-        <p:nvSpPr>
-          <p:cNvPr id="63" name="Google Shape;63;g13a1d080442_0_5:notes"/>
-          <p:cNvSpPr>
-            <a:spLocks noGrp="1" noRot="1" noChangeAspect="1"/>
-          </p:cNvSpPr>
-          <p:nvPr>
-            <p:ph type="sldImg" idx="2"/>
-          </p:nvPr>
-        </p:nvSpPr>
-        <p:spPr>
-          <a:xfrm>
-            <a:off x="381000" y="685800"/>
-            <a:ext cx="6096000" cy="3429000"/>
-          </a:xfrm>
-          <a:custGeom>
-            <a:avLst/>
-            <a:gdLst/>
-            <a:ahLst/>
-            <a:cxnLst/>
-            <a:rect l="l" t="t" r="r" b="b"/>
-            <a:pathLst>
-              <a:path w="120000" h="120000" extrusionOk="0">
-                <a:moveTo>
-                  <a:pt x="0" y="0"/>
-                </a:moveTo>
-                <a:lnTo>
-                  <a:pt x="120000" y="0"/>
-                </a:lnTo>
-                <a:lnTo>
-                  <a:pt x="120000" y="120000"/>
-                </a:lnTo>
-                <a:lnTo>
-                  <a:pt x="0" y="120000"/>
-                </a:lnTo>
-                <a:close/>
-              </a:path>
-            </a:pathLst>
-          </a:custGeom>
-        </p:spPr>
-      </p:sp>
-      <p:sp>
-        <p:nvSpPr>
-          <p:cNvPr id="64" name="Google Shape;64;g13a1d080442_0_5:notes"/>
-          <p:cNvSpPr txBox="1">
-            <a:spLocks noGrp="1"/>
-          </p:cNvSpPr>
-          <p:nvPr>
-            <p:ph type="body" idx="1"/>
-          </p:nvPr>
-        </p:nvSpPr>
-        <p:spPr>
-          <a:xfrm>
-            <a:off x="685800" y="4343400"/>
-            <a:ext cx="5486400" cy="4114800"/>
-          </a:xfrm>
-          <a:prstGeom prst="rect">
-            <a:avLst/>
-          </a:prstGeom>
-        </p:spPr>
-        <p:txBody>
-          <a:bodyPr spcFirstLastPara="1" wrap="square" lIns="91425" tIns="91425" rIns="91425" bIns="91425" anchor="t" anchorCtr="0">
-            <a:noAutofit/>
-          </a:bodyPr>
-          <a:lstStyle/>
-          <a:p>
-            <a:pPr marL="0" lvl="0" indent="0" algn="l" rtl="0">
-              <a:spcBef>
-                <a:spcPts val="0"/>
-              </a:spcBef>
-              <a:spcAft>
-                <a:spcPts val="0"/>
-              </a:spcAft>
-              <a:buNone/>
-            </a:pPr>
-            <a:endParaRPr dirty="0"/>
-          </a:p>
-        </p:txBody>
-      </p:sp>
-    </p:spTree>
-  </p:cSld>
-  <p:clrMapOvr>
-    <a:masterClrMapping/>
-  </p:clrMapOvr>
-</p:notes>
-</file>
-
-<file path=ppt/notesSlides/notesSlide11.xml><?xml version="1.0" encoding="utf-8"?>
 <p:notes xmlns:a="http://schemas.openxmlformats.org/drawingml/2006/main" xmlns:r="http://schemas.openxmlformats.org/officeDocument/2006/relationships" xmlns:p="http://schemas.openxmlformats.org/presentationml/2006/main" showMasterSp="0" showMasterPhAnim="0">
   <p:cSld>
     <p:spTree>
@@ -1215,7 +1111,7 @@
 </p:notes>
 </file>
 
-<file path=ppt/notesSlides/notesSlide12.xml><?xml version="1.0" encoding="utf-8"?>
+<file path=ppt/notesSlides/notesSlide11.xml><?xml version="1.0" encoding="utf-8"?>
 <p:notes xmlns:a="http://schemas.openxmlformats.org/drawingml/2006/main" xmlns:r="http://schemas.openxmlformats.org/officeDocument/2006/relationships" xmlns:p="http://schemas.openxmlformats.org/presentationml/2006/main" showMasterSp="0" showMasterPhAnim="0">
   <p:cSld>
     <p:spTree>
@@ -1276,6 +1172,110 @@
       <p:sp>
         <p:nvSpPr>
           <p:cNvPr id="121" name="Google Shape;121;g14491ee7368_0_10:notes"/>
+          <p:cNvSpPr txBox="1">
+            <a:spLocks noGrp="1"/>
+          </p:cNvSpPr>
+          <p:nvPr>
+            <p:ph type="body" idx="1"/>
+          </p:nvPr>
+        </p:nvSpPr>
+        <p:spPr>
+          <a:xfrm>
+            <a:off x="685800" y="4343400"/>
+            <a:ext cx="5486400" cy="4114800"/>
+          </a:xfrm>
+          <a:prstGeom prst="rect">
+            <a:avLst/>
+          </a:prstGeom>
+        </p:spPr>
+        <p:txBody>
+          <a:bodyPr spcFirstLastPara="1" wrap="square" lIns="91425" tIns="91425" rIns="91425" bIns="91425" anchor="t" anchorCtr="0">
+            <a:noAutofit/>
+          </a:bodyPr>
+          <a:lstStyle/>
+          <a:p>
+            <a:pPr marL="0" lvl="0" indent="0" algn="l" rtl="0">
+              <a:spcBef>
+                <a:spcPts val="0"/>
+              </a:spcBef>
+              <a:spcAft>
+                <a:spcPts val="0"/>
+              </a:spcAft>
+              <a:buNone/>
+            </a:pPr>
+            <a:endParaRPr/>
+          </a:p>
+        </p:txBody>
+      </p:sp>
+    </p:spTree>
+  </p:cSld>
+  <p:clrMapOvr>
+    <a:masterClrMapping/>
+  </p:clrMapOvr>
+</p:notes>
+</file>
+
+<file path=ppt/notesSlides/notesSlide12.xml><?xml version="1.0" encoding="utf-8"?>
+<p:notes xmlns:a="http://schemas.openxmlformats.org/drawingml/2006/main" xmlns:r="http://schemas.openxmlformats.org/officeDocument/2006/relationships" xmlns:p="http://schemas.openxmlformats.org/presentationml/2006/main" showMasterSp="0" showMasterPhAnim="0">
+  <p:cSld>
+    <p:spTree>
+      <p:nvGrpSpPr>
+        <p:cNvPr id="1" name="Shape 126"/>
+        <p:cNvGrpSpPr/>
+        <p:nvPr/>
+      </p:nvGrpSpPr>
+      <p:grpSpPr>
+        <a:xfrm>
+          <a:off x="0" y="0"/>
+          <a:ext cx="0" cy="0"/>
+          <a:chOff x="0" y="0"/>
+          <a:chExt cx="0" cy="0"/>
+        </a:xfrm>
+      </p:grpSpPr>
+      <p:sp>
+        <p:nvSpPr>
+          <p:cNvPr id="127" name="Google Shape;127;g14491ee7368_0_21:notes"/>
+          <p:cNvSpPr>
+            <a:spLocks noGrp="1" noRot="1" noChangeAspect="1"/>
+          </p:cNvSpPr>
+          <p:nvPr>
+            <p:ph type="sldImg" idx="2"/>
+          </p:nvPr>
+        </p:nvSpPr>
+        <p:spPr>
+          <a:xfrm>
+            <a:off x="381000" y="685800"/>
+            <a:ext cx="6096000" cy="3429000"/>
+          </a:xfrm>
+          <a:custGeom>
+            <a:avLst/>
+            <a:gdLst/>
+            <a:ahLst/>
+            <a:cxnLst/>
+            <a:rect l="l" t="t" r="r" b="b"/>
+            <a:pathLst>
+              <a:path w="120000" h="120000" extrusionOk="0">
+                <a:moveTo>
+                  <a:pt x="0" y="0"/>
+                </a:moveTo>
+                <a:lnTo>
+                  <a:pt x="120000" y="0"/>
+                </a:lnTo>
+                <a:lnTo>
+                  <a:pt x="120000" y="120000"/>
+                </a:lnTo>
+                <a:lnTo>
+                  <a:pt x="0" y="120000"/>
+                </a:lnTo>
+                <a:close/>
+              </a:path>
+            </a:pathLst>
+          </a:custGeom>
+        </p:spPr>
+      </p:sp>
+      <p:sp>
+        <p:nvSpPr>
+          <p:cNvPr id="128" name="Google Shape;128;g14491ee7368_0_21:notes"/>
           <p:cNvSpPr txBox="1">
             <a:spLocks noGrp="1"/>
           </p:cNvSpPr>
@@ -1428,110 +1428,6 @@
   <p:cSld>
     <p:spTree>
       <p:nvGrpSpPr>
-        <p:cNvPr id="1" name="Shape 126"/>
-        <p:cNvGrpSpPr/>
-        <p:nvPr/>
-      </p:nvGrpSpPr>
-      <p:grpSpPr>
-        <a:xfrm>
-          <a:off x="0" y="0"/>
-          <a:ext cx="0" cy="0"/>
-          <a:chOff x="0" y="0"/>
-          <a:chExt cx="0" cy="0"/>
-        </a:xfrm>
-      </p:grpSpPr>
-      <p:sp>
-        <p:nvSpPr>
-          <p:cNvPr id="127" name="Google Shape;127;g14491ee7368_0_21:notes"/>
-          <p:cNvSpPr>
-            <a:spLocks noGrp="1" noRot="1" noChangeAspect="1"/>
-          </p:cNvSpPr>
-          <p:nvPr>
-            <p:ph type="sldImg" idx="2"/>
-          </p:nvPr>
-        </p:nvSpPr>
-        <p:spPr>
-          <a:xfrm>
-            <a:off x="381000" y="685800"/>
-            <a:ext cx="6096000" cy="3429000"/>
-          </a:xfrm>
-          <a:custGeom>
-            <a:avLst/>
-            <a:gdLst/>
-            <a:ahLst/>
-            <a:cxnLst/>
-            <a:rect l="l" t="t" r="r" b="b"/>
-            <a:pathLst>
-              <a:path w="120000" h="120000" extrusionOk="0">
-                <a:moveTo>
-                  <a:pt x="0" y="0"/>
-                </a:moveTo>
-                <a:lnTo>
-                  <a:pt x="120000" y="0"/>
-                </a:lnTo>
-                <a:lnTo>
-                  <a:pt x="120000" y="120000"/>
-                </a:lnTo>
-                <a:lnTo>
-                  <a:pt x="0" y="120000"/>
-                </a:lnTo>
-                <a:close/>
-              </a:path>
-            </a:pathLst>
-          </a:custGeom>
-        </p:spPr>
-      </p:sp>
-      <p:sp>
-        <p:nvSpPr>
-          <p:cNvPr id="128" name="Google Shape;128;g14491ee7368_0_21:notes"/>
-          <p:cNvSpPr txBox="1">
-            <a:spLocks noGrp="1"/>
-          </p:cNvSpPr>
-          <p:nvPr>
-            <p:ph type="body" idx="1"/>
-          </p:nvPr>
-        </p:nvSpPr>
-        <p:spPr>
-          <a:xfrm>
-            <a:off x="685800" y="4343400"/>
-            <a:ext cx="5486400" cy="4114800"/>
-          </a:xfrm>
-          <a:prstGeom prst="rect">
-            <a:avLst/>
-          </a:prstGeom>
-        </p:spPr>
-        <p:txBody>
-          <a:bodyPr spcFirstLastPara="1" wrap="square" lIns="91425" tIns="91425" rIns="91425" bIns="91425" anchor="t" anchorCtr="0">
-            <a:noAutofit/>
-          </a:bodyPr>
-          <a:lstStyle/>
-          <a:p>
-            <a:pPr marL="0" lvl="0" indent="0" algn="l" rtl="0">
-              <a:spcBef>
-                <a:spcPts val="0"/>
-              </a:spcBef>
-              <a:spcAft>
-                <a:spcPts val="0"/>
-              </a:spcAft>
-              <a:buNone/>
-            </a:pPr>
-            <a:endParaRPr/>
-          </a:p>
-        </p:txBody>
-      </p:sp>
-    </p:spTree>
-  </p:cSld>
-  <p:clrMapOvr>
-    <a:masterClrMapping/>
-  </p:clrMapOvr>
-</p:notes>
-</file>
-
-<file path=ppt/notesSlides/notesSlide15.xml><?xml version="1.0" encoding="utf-8"?>
-<p:notes xmlns:a="http://schemas.openxmlformats.org/drawingml/2006/main" xmlns:r="http://schemas.openxmlformats.org/officeDocument/2006/relationships" xmlns:p="http://schemas.openxmlformats.org/presentationml/2006/main" showMasterSp="0" showMasterPhAnim="0">
-  <p:cSld>
-    <p:spTree>
-      <p:nvGrpSpPr>
         <p:cNvPr id="1" name="Shape 133"/>
         <p:cNvGrpSpPr/>
         <p:nvPr/>
@@ -1588,6 +1484,110 @@
       <p:sp>
         <p:nvSpPr>
           <p:cNvPr id="135" name="Google Shape;135;g27a015b2318_6_0:notes"/>
+          <p:cNvSpPr txBox="1">
+            <a:spLocks noGrp="1"/>
+          </p:cNvSpPr>
+          <p:nvPr>
+            <p:ph type="body" idx="1"/>
+          </p:nvPr>
+        </p:nvSpPr>
+        <p:spPr>
+          <a:xfrm>
+            <a:off x="685800" y="4343400"/>
+            <a:ext cx="5486400" cy="4114800"/>
+          </a:xfrm>
+          <a:prstGeom prst="rect">
+            <a:avLst/>
+          </a:prstGeom>
+        </p:spPr>
+        <p:txBody>
+          <a:bodyPr spcFirstLastPara="1" wrap="square" lIns="91425" tIns="91425" rIns="91425" bIns="91425" anchor="t" anchorCtr="0">
+            <a:noAutofit/>
+          </a:bodyPr>
+          <a:lstStyle/>
+          <a:p>
+            <a:pPr marL="0" lvl="0" indent="0" algn="l" rtl="0">
+              <a:spcBef>
+                <a:spcPts val="0"/>
+              </a:spcBef>
+              <a:spcAft>
+                <a:spcPts val="0"/>
+              </a:spcAft>
+              <a:buNone/>
+            </a:pPr>
+            <a:endParaRPr/>
+          </a:p>
+        </p:txBody>
+      </p:sp>
+    </p:spTree>
+  </p:cSld>
+  <p:clrMapOvr>
+    <a:masterClrMapping/>
+  </p:clrMapOvr>
+</p:notes>
+</file>
+
+<file path=ppt/notesSlides/notesSlide15.xml><?xml version="1.0" encoding="utf-8"?>
+<p:notes xmlns:a="http://schemas.openxmlformats.org/drawingml/2006/main" xmlns:r="http://schemas.openxmlformats.org/officeDocument/2006/relationships" xmlns:p="http://schemas.openxmlformats.org/presentationml/2006/main" showMasterSp="0" showMasterPhAnim="0">
+  <p:cSld>
+    <p:spTree>
+      <p:nvGrpSpPr>
+        <p:cNvPr id="1" name="Shape 140"/>
+        <p:cNvGrpSpPr/>
+        <p:nvPr/>
+      </p:nvGrpSpPr>
+      <p:grpSpPr>
+        <a:xfrm>
+          <a:off x="0" y="0"/>
+          <a:ext cx="0" cy="0"/>
+          <a:chOff x="0" y="0"/>
+          <a:chExt cx="0" cy="0"/>
+        </a:xfrm>
+      </p:grpSpPr>
+      <p:sp>
+        <p:nvSpPr>
+          <p:cNvPr id="141" name="Google Shape;141;g27a015b2318_6_57:notes"/>
+          <p:cNvSpPr>
+            <a:spLocks noGrp="1" noRot="1" noChangeAspect="1"/>
+          </p:cNvSpPr>
+          <p:nvPr>
+            <p:ph type="sldImg" idx="2"/>
+          </p:nvPr>
+        </p:nvSpPr>
+        <p:spPr>
+          <a:xfrm>
+            <a:off x="381000" y="685800"/>
+            <a:ext cx="6096000" cy="3429000"/>
+          </a:xfrm>
+          <a:custGeom>
+            <a:avLst/>
+            <a:gdLst/>
+            <a:ahLst/>
+            <a:cxnLst/>
+            <a:rect l="l" t="t" r="r" b="b"/>
+            <a:pathLst>
+              <a:path w="120000" h="120000" extrusionOk="0">
+                <a:moveTo>
+                  <a:pt x="0" y="0"/>
+                </a:moveTo>
+                <a:lnTo>
+                  <a:pt x="120000" y="0"/>
+                </a:lnTo>
+                <a:lnTo>
+                  <a:pt x="120000" y="120000"/>
+                </a:lnTo>
+                <a:lnTo>
+                  <a:pt x="0" y="120000"/>
+                </a:lnTo>
+                <a:close/>
+              </a:path>
+            </a:pathLst>
+          </a:custGeom>
+        </p:spPr>
+      </p:sp>
+      <p:sp>
+        <p:nvSpPr>
+          <p:cNvPr id="142" name="Google Shape;142;g27a015b2318_6_57:notes"/>
           <p:cNvSpPr txBox="1">
             <a:spLocks noGrp="1"/>
           </p:cNvSpPr>
@@ -1740,110 +1740,6 @@
   <p:cSld>
     <p:spTree>
       <p:nvGrpSpPr>
-        <p:cNvPr id="1" name="Shape 140"/>
-        <p:cNvGrpSpPr/>
-        <p:nvPr/>
-      </p:nvGrpSpPr>
-      <p:grpSpPr>
-        <a:xfrm>
-          <a:off x="0" y="0"/>
-          <a:ext cx="0" cy="0"/>
-          <a:chOff x="0" y="0"/>
-          <a:chExt cx="0" cy="0"/>
-        </a:xfrm>
-      </p:grpSpPr>
-      <p:sp>
-        <p:nvSpPr>
-          <p:cNvPr id="141" name="Google Shape;141;g27a015b2318_6_57:notes"/>
-          <p:cNvSpPr>
-            <a:spLocks noGrp="1" noRot="1" noChangeAspect="1"/>
-          </p:cNvSpPr>
-          <p:nvPr>
-            <p:ph type="sldImg" idx="2"/>
-          </p:nvPr>
-        </p:nvSpPr>
-        <p:spPr>
-          <a:xfrm>
-            <a:off x="381000" y="685800"/>
-            <a:ext cx="6096000" cy="3429000"/>
-          </a:xfrm>
-          <a:custGeom>
-            <a:avLst/>
-            <a:gdLst/>
-            <a:ahLst/>
-            <a:cxnLst/>
-            <a:rect l="l" t="t" r="r" b="b"/>
-            <a:pathLst>
-              <a:path w="120000" h="120000" extrusionOk="0">
-                <a:moveTo>
-                  <a:pt x="0" y="0"/>
-                </a:moveTo>
-                <a:lnTo>
-                  <a:pt x="120000" y="0"/>
-                </a:lnTo>
-                <a:lnTo>
-                  <a:pt x="120000" y="120000"/>
-                </a:lnTo>
-                <a:lnTo>
-                  <a:pt x="0" y="120000"/>
-                </a:lnTo>
-                <a:close/>
-              </a:path>
-            </a:pathLst>
-          </a:custGeom>
-        </p:spPr>
-      </p:sp>
-      <p:sp>
-        <p:nvSpPr>
-          <p:cNvPr id="142" name="Google Shape;142;g27a015b2318_6_57:notes"/>
-          <p:cNvSpPr txBox="1">
-            <a:spLocks noGrp="1"/>
-          </p:cNvSpPr>
-          <p:nvPr>
-            <p:ph type="body" idx="1"/>
-          </p:nvPr>
-        </p:nvSpPr>
-        <p:spPr>
-          <a:xfrm>
-            <a:off x="685800" y="4343400"/>
-            <a:ext cx="5486400" cy="4114800"/>
-          </a:xfrm>
-          <a:prstGeom prst="rect">
-            <a:avLst/>
-          </a:prstGeom>
-        </p:spPr>
-        <p:txBody>
-          <a:bodyPr spcFirstLastPara="1" wrap="square" lIns="91425" tIns="91425" rIns="91425" bIns="91425" anchor="t" anchorCtr="0">
-            <a:noAutofit/>
-          </a:bodyPr>
-          <a:lstStyle/>
-          <a:p>
-            <a:pPr marL="0" lvl="0" indent="0" algn="l" rtl="0">
-              <a:spcBef>
-                <a:spcPts val="0"/>
-              </a:spcBef>
-              <a:spcAft>
-                <a:spcPts val="0"/>
-              </a:spcAft>
-              <a:buNone/>
-            </a:pPr>
-            <a:endParaRPr/>
-          </a:p>
-        </p:txBody>
-      </p:sp>
-    </p:spTree>
-  </p:cSld>
-  <p:clrMapOvr>
-    <a:masterClrMapping/>
-  </p:clrMapOvr>
-</p:notes>
-</file>
-
-<file path=ppt/notesSlides/notesSlide18.xml><?xml version="1.0" encoding="utf-8"?>
-<p:notes xmlns:a="http://schemas.openxmlformats.org/drawingml/2006/main" xmlns:r="http://schemas.openxmlformats.org/officeDocument/2006/relationships" xmlns:p="http://schemas.openxmlformats.org/presentationml/2006/main" showMasterSp="0" showMasterPhAnim="0">
-  <p:cSld>
-    <p:spTree>
-      <p:nvGrpSpPr>
         <p:cNvPr id="1" name="Shape 148"/>
         <p:cNvGrpSpPr/>
         <p:nvPr/>
@@ -1943,7 +1839,7 @@
 </p:notes>
 </file>
 
-<file path=ppt/notesSlides/notesSlide19.xml><?xml version="1.0" encoding="utf-8"?>
+<file path=ppt/notesSlides/notesSlide18.xml><?xml version="1.0" encoding="utf-8"?>
 <p:notes xmlns:a="http://schemas.openxmlformats.org/drawingml/2006/main" xmlns:r="http://schemas.openxmlformats.org/officeDocument/2006/relationships" xmlns:p="http://schemas.openxmlformats.org/presentationml/2006/main" showMasterSp="0" showMasterPhAnim="0">
   <p:cSld>
     <p:spTree>
@@ -2047,7 +1943,423 @@
 </p:notes>
 </file>
 
+<file path=ppt/notesSlides/notesSlide19.xml><?xml version="1.0" encoding="utf-8"?>
+<p:notes xmlns:a="http://schemas.openxmlformats.org/drawingml/2006/main" xmlns:r="http://schemas.openxmlformats.org/officeDocument/2006/relationships" xmlns:p="http://schemas.openxmlformats.org/presentationml/2006/main" showMasterSp="0" showMasterPhAnim="0">
+  <p:cSld>
+    <p:spTree>
+      <p:nvGrpSpPr>
+        <p:cNvPr id="1" name="Shape 163"/>
+        <p:cNvGrpSpPr/>
+        <p:nvPr/>
+      </p:nvGrpSpPr>
+      <p:grpSpPr>
+        <a:xfrm>
+          <a:off x="0" y="0"/>
+          <a:ext cx="0" cy="0"/>
+          <a:chOff x="0" y="0"/>
+          <a:chExt cx="0" cy="0"/>
+        </a:xfrm>
+      </p:grpSpPr>
+      <p:sp>
+        <p:nvSpPr>
+          <p:cNvPr id="164" name="Google Shape;164;g2f75e0b7ab9_1_8:notes"/>
+          <p:cNvSpPr>
+            <a:spLocks noGrp="1" noRot="1" noChangeAspect="1"/>
+          </p:cNvSpPr>
+          <p:nvPr>
+            <p:ph type="sldImg" idx="2"/>
+          </p:nvPr>
+        </p:nvSpPr>
+        <p:spPr>
+          <a:xfrm>
+            <a:off x="381000" y="685800"/>
+            <a:ext cx="6096000" cy="3429000"/>
+          </a:xfrm>
+          <a:custGeom>
+            <a:avLst/>
+            <a:gdLst/>
+            <a:ahLst/>
+            <a:cxnLst/>
+            <a:rect l="l" t="t" r="r" b="b"/>
+            <a:pathLst>
+              <a:path w="120000" h="120000" extrusionOk="0">
+                <a:moveTo>
+                  <a:pt x="0" y="0"/>
+                </a:moveTo>
+                <a:lnTo>
+                  <a:pt x="120000" y="0"/>
+                </a:lnTo>
+                <a:lnTo>
+                  <a:pt x="120000" y="120000"/>
+                </a:lnTo>
+                <a:lnTo>
+                  <a:pt x="0" y="120000"/>
+                </a:lnTo>
+                <a:close/>
+              </a:path>
+            </a:pathLst>
+          </a:custGeom>
+        </p:spPr>
+      </p:sp>
+      <p:sp>
+        <p:nvSpPr>
+          <p:cNvPr id="165" name="Google Shape;165;g2f75e0b7ab9_1_8:notes"/>
+          <p:cNvSpPr txBox="1">
+            <a:spLocks noGrp="1"/>
+          </p:cNvSpPr>
+          <p:nvPr>
+            <p:ph type="body" idx="1"/>
+          </p:nvPr>
+        </p:nvSpPr>
+        <p:spPr>
+          <a:xfrm>
+            <a:off x="685800" y="4343400"/>
+            <a:ext cx="5486400" cy="4114800"/>
+          </a:xfrm>
+          <a:prstGeom prst="rect">
+            <a:avLst/>
+          </a:prstGeom>
+        </p:spPr>
+        <p:txBody>
+          <a:bodyPr spcFirstLastPara="1" wrap="square" lIns="91425" tIns="91425" rIns="91425" bIns="91425" anchor="t" anchorCtr="0">
+            <a:noAutofit/>
+          </a:bodyPr>
+          <a:lstStyle/>
+          <a:p>
+            <a:pPr marL="0" lvl="0" indent="0" algn="l" rtl="0">
+              <a:spcBef>
+                <a:spcPts val="0"/>
+              </a:spcBef>
+              <a:spcAft>
+                <a:spcPts val="0"/>
+              </a:spcAft>
+              <a:buNone/>
+            </a:pPr>
+            <a:endParaRPr/>
+          </a:p>
+        </p:txBody>
+      </p:sp>
+    </p:spTree>
+  </p:cSld>
+  <p:clrMapOvr>
+    <a:masterClrMapping/>
+  </p:clrMapOvr>
+</p:notes>
+</file>
+
 <file path=ppt/notesSlides/notesSlide2.xml><?xml version="1.0" encoding="utf-8"?>
+<p:notes xmlns:a="http://schemas.openxmlformats.org/drawingml/2006/main" xmlns:r="http://schemas.openxmlformats.org/officeDocument/2006/relationships" xmlns:p="http://schemas.openxmlformats.org/presentationml/2006/main" showMasterSp="0" showMasterPhAnim="0">
+  <p:cSld>
+    <p:spTree>
+      <p:nvGrpSpPr>
+        <p:cNvPr id="1" name="Shape 62"/>
+        <p:cNvGrpSpPr/>
+        <p:nvPr/>
+      </p:nvGrpSpPr>
+      <p:grpSpPr>
+        <a:xfrm>
+          <a:off x="0" y="0"/>
+          <a:ext cx="0" cy="0"/>
+          <a:chOff x="0" y="0"/>
+          <a:chExt cx="0" cy="0"/>
+        </a:xfrm>
+      </p:grpSpPr>
+      <p:sp>
+        <p:nvSpPr>
+          <p:cNvPr id="63" name="Google Shape;63;g13a1d080442_0_5:notes"/>
+          <p:cNvSpPr>
+            <a:spLocks noGrp="1" noRot="1" noChangeAspect="1"/>
+          </p:cNvSpPr>
+          <p:nvPr>
+            <p:ph type="sldImg" idx="2"/>
+          </p:nvPr>
+        </p:nvSpPr>
+        <p:spPr>
+          <a:xfrm>
+            <a:off x="381000" y="685800"/>
+            <a:ext cx="6096000" cy="3429000"/>
+          </a:xfrm>
+          <a:custGeom>
+            <a:avLst/>
+            <a:gdLst/>
+            <a:ahLst/>
+            <a:cxnLst/>
+            <a:rect l="l" t="t" r="r" b="b"/>
+            <a:pathLst>
+              <a:path w="120000" h="120000" extrusionOk="0">
+                <a:moveTo>
+                  <a:pt x="0" y="0"/>
+                </a:moveTo>
+                <a:lnTo>
+                  <a:pt x="120000" y="0"/>
+                </a:lnTo>
+                <a:lnTo>
+                  <a:pt x="120000" y="120000"/>
+                </a:lnTo>
+                <a:lnTo>
+                  <a:pt x="0" y="120000"/>
+                </a:lnTo>
+                <a:close/>
+              </a:path>
+            </a:pathLst>
+          </a:custGeom>
+        </p:spPr>
+      </p:sp>
+      <p:sp>
+        <p:nvSpPr>
+          <p:cNvPr id="64" name="Google Shape;64;g13a1d080442_0_5:notes"/>
+          <p:cNvSpPr txBox="1">
+            <a:spLocks noGrp="1"/>
+          </p:cNvSpPr>
+          <p:nvPr>
+            <p:ph type="body" idx="1"/>
+          </p:nvPr>
+        </p:nvSpPr>
+        <p:spPr>
+          <a:xfrm>
+            <a:off x="685800" y="4343400"/>
+            <a:ext cx="5486400" cy="4114800"/>
+          </a:xfrm>
+          <a:prstGeom prst="rect">
+            <a:avLst/>
+          </a:prstGeom>
+        </p:spPr>
+        <p:txBody>
+          <a:bodyPr spcFirstLastPara="1" wrap="square" lIns="91425" tIns="91425" rIns="91425" bIns="91425" anchor="t" anchorCtr="0">
+            <a:noAutofit/>
+          </a:bodyPr>
+          <a:lstStyle/>
+          <a:p>
+            <a:pPr marL="0" lvl="0" indent="0" algn="l" rtl="0">
+              <a:spcBef>
+                <a:spcPts val="0"/>
+              </a:spcBef>
+              <a:spcAft>
+                <a:spcPts val="0"/>
+              </a:spcAft>
+              <a:buNone/>
+            </a:pPr>
+            <a:endParaRPr/>
+          </a:p>
+        </p:txBody>
+      </p:sp>
+    </p:spTree>
+  </p:cSld>
+  <p:clrMapOvr>
+    <a:masterClrMapping/>
+  </p:clrMapOvr>
+</p:notes>
+</file>
+
+<file path=ppt/notesSlides/notesSlide20.xml><?xml version="1.0" encoding="utf-8"?>
+<p:notes xmlns:a="http://schemas.openxmlformats.org/drawingml/2006/main" xmlns:r="http://schemas.openxmlformats.org/officeDocument/2006/relationships" xmlns:p="http://schemas.openxmlformats.org/presentationml/2006/main" showMasterSp="0" showMasterPhAnim="0">
+  <p:cSld>
+    <p:spTree>
+      <p:nvGrpSpPr>
+        <p:cNvPr id="1" name="Shape 170"/>
+        <p:cNvGrpSpPr/>
+        <p:nvPr/>
+      </p:nvGrpSpPr>
+      <p:grpSpPr>
+        <a:xfrm>
+          <a:off x="0" y="0"/>
+          <a:ext cx="0" cy="0"/>
+          <a:chOff x="0" y="0"/>
+          <a:chExt cx="0" cy="0"/>
+        </a:xfrm>
+      </p:grpSpPr>
+      <p:sp>
+        <p:nvSpPr>
+          <p:cNvPr id="171" name="Google Shape;171;g2f75e0b7ab9_1_14:notes"/>
+          <p:cNvSpPr>
+            <a:spLocks noGrp="1" noRot="1" noChangeAspect="1"/>
+          </p:cNvSpPr>
+          <p:nvPr>
+            <p:ph type="sldImg" idx="2"/>
+          </p:nvPr>
+        </p:nvSpPr>
+        <p:spPr>
+          <a:xfrm>
+            <a:off x="381000" y="685800"/>
+            <a:ext cx="6096000" cy="3429000"/>
+          </a:xfrm>
+          <a:custGeom>
+            <a:avLst/>
+            <a:gdLst/>
+            <a:ahLst/>
+            <a:cxnLst/>
+            <a:rect l="l" t="t" r="r" b="b"/>
+            <a:pathLst>
+              <a:path w="120000" h="120000" extrusionOk="0">
+                <a:moveTo>
+                  <a:pt x="0" y="0"/>
+                </a:moveTo>
+                <a:lnTo>
+                  <a:pt x="120000" y="0"/>
+                </a:lnTo>
+                <a:lnTo>
+                  <a:pt x="120000" y="120000"/>
+                </a:lnTo>
+                <a:lnTo>
+                  <a:pt x="0" y="120000"/>
+                </a:lnTo>
+                <a:close/>
+              </a:path>
+            </a:pathLst>
+          </a:custGeom>
+        </p:spPr>
+      </p:sp>
+      <p:sp>
+        <p:nvSpPr>
+          <p:cNvPr id="172" name="Google Shape;172;g2f75e0b7ab9_1_14:notes"/>
+          <p:cNvSpPr txBox="1">
+            <a:spLocks noGrp="1"/>
+          </p:cNvSpPr>
+          <p:nvPr>
+            <p:ph type="body" idx="1"/>
+          </p:nvPr>
+        </p:nvSpPr>
+        <p:spPr>
+          <a:xfrm>
+            <a:off x="685800" y="4343400"/>
+            <a:ext cx="5486400" cy="4114800"/>
+          </a:xfrm>
+          <a:prstGeom prst="rect">
+            <a:avLst/>
+          </a:prstGeom>
+        </p:spPr>
+        <p:txBody>
+          <a:bodyPr spcFirstLastPara="1" wrap="square" lIns="91425" tIns="91425" rIns="91425" bIns="91425" anchor="t" anchorCtr="0">
+            <a:noAutofit/>
+          </a:bodyPr>
+          <a:lstStyle/>
+          <a:p>
+            <a:pPr marL="0" lvl="0" indent="0" algn="l" rtl="0">
+              <a:spcBef>
+                <a:spcPts val="0"/>
+              </a:spcBef>
+              <a:spcAft>
+                <a:spcPts val="0"/>
+              </a:spcAft>
+              <a:buNone/>
+            </a:pPr>
+            <a:endParaRPr/>
+          </a:p>
+        </p:txBody>
+      </p:sp>
+    </p:spTree>
+  </p:cSld>
+  <p:clrMapOvr>
+    <a:masterClrMapping/>
+  </p:clrMapOvr>
+</p:notes>
+</file>
+
+<file path=ppt/notesSlides/notesSlide21.xml><?xml version="1.0" encoding="utf-8"?>
+<p:notes xmlns:a="http://schemas.openxmlformats.org/drawingml/2006/main" xmlns:r="http://schemas.openxmlformats.org/officeDocument/2006/relationships" xmlns:p="http://schemas.openxmlformats.org/presentationml/2006/main" showMasterSp="0" showMasterPhAnim="0">
+  <p:cSld>
+    <p:spTree>
+      <p:nvGrpSpPr>
+        <p:cNvPr id="1" name="Shape 178"/>
+        <p:cNvGrpSpPr/>
+        <p:nvPr/>
+      </p:nvGrpSpPr>
+      <p:grpSpPr>
+        <a:xfrm>
+          <a:off x="0" y="0"/>
+          <a:ext cx="0" cy="0"/>
+          <a:chOff x="0" y="0"/>
+          <a:chExt cx="0" cy="0"/>
+        </a:xfrm>
+      </p:grpSpPr>
+      <p:sp>
+        <p:nvSpPr>
+          <p:cNvPr id="179" name="Google Shape;179;g2f75e0b7ab9_1_21:notes"/>
+          <p:cNvSpPr>
+            <a:spLocks noGrp="1" noRot="1" noChangeAspect="1"/>
+          </p:cNvSpPr>
+          <p:nvPr>
+            <p:ph type="sldImg" idx="2"/>
+          </p:nvPr>
+        </p:nvSpPr>
+        <p:spPr>
+          <a:xfrm>
+            <a:off x="381000" y="685800"/>
+            <a:ext cx="6096000" cy="3429000"/>
+          </a:xfrm>
+          <a:custGeom>
+            <a:avLst/>
+            <a:gdLst/>
+            <a:ahLst/>
+            <a:cxnLst/>
+            <a:rect l="l" t="t" r="r" b="b"/>
+            <a:pathLst>
+              <a:path w="120000" h="120000" extrusionOk="0">
+                <a:moveTo>
+                  <a:pt x="0" y="0"/>
+                </a:moveTo>
+                <a:lnTo>
+                  <a:pt x="120000" y="0"/>
+                </a:lnTo>
+                <a:lnTo>
+                  <a:pt x="120000" y="120000"/>
+                </a:lnTo>
+                <a:lnTo>
+                  <a:pt x="0" y="120000"/>
+                </a:lnTo>
+                <a:close/>
+              </a:path>
+            </a:pathLst>
+          </a:custGeom>
+        </p:spPr>
+      </p:sp>
+      <p:sp>
+        <p:nvSpPr>
+          <p:cNvPr id="180" name="Google Shape;180;g2f75e0b7ab9_1_21:notes"/>
+          <p:cNvSpPr txBox="1">
+            <a:spLocks noGrp="1"/>
+          </p:cNvSpPr>
+          <p:nvPr>
+            <p:ph type="body" idx="1"/>
+          </p:nvPr>
+        </p:nvSpPr>
+        <p:spPr>
+          <a:xfrm>
+            <a:off x="685800" y="4343400"/>
+            <a:ext cx="5486400" cy="4114800"/>
+          </a:xfrm>
+          <a:prstGeom prst="rect">
+            <a:avLst/>
+          </a:prstGeom>
+        </p:spPr>
+        <p:txBody>
+          <a:bodyPr spcFirstLastPara="1" wrap="square" lIns="91425" tIns="91425" rIns="91425" bIns="91425" anchor="t" anchorCtr="0">
+            <a:noAutofit/>
+          </a:bodyPr>
+          <a:lstStyle/>
+          <a:p>
+            <a:pPr marL="0" lvl="0" indent="0" algn="l" rtl="0">
+              <a:spcBef>
+                <a:spcPts val="0"/>
+              </a:spcBef>
+              <a:spcAft>
+                <a:spcPts val="0"/>
+              </a:spcAft>
+              <a:buNone/>
+            </a:pPr>
+            <a:endParaRPr/>
+          </a:p>
+        </p:txBody>
+      </p:sp>
+    </p:spTree>
+  </p:cSld>
+  <p:clrMapOvr>
+    <a:masterClrMapping/>
+  </p:clrMapOvr>
+</p:notes>
+</file>
+
+<file path=ppt/notesSlides/notesSlide22.xml><?xml version="1.0" encoding="utf-8"?>
 <p:notes xmlns:a="http://schemas.openxmlformats.org/drawingml/2006/main" xmlns:r="http://schemas.openxmlformats.org/officeDocument/2006/relationships" xmlns:p="http://schemas.openxmlformats.org/presentationml/2006/main" showMasterSp="0" showMasterPhAnim="0">
   <p:cSld>
     <p:spTree>
@@ -2151,12 +2463,12 @@
 </p:notes>
 </file>
 
-<file path=ppt/notesSlides/notesSlide20.xml><?xml version="1.0" encoding="utf-8"?>
+<file path=ppt/notesSlides/notesSlide23.xml><?xml version="1.0" encoding="utf-8"?>
 <p:notes xmlns:a="http://schemas.openxmlformats.org/drawingml/2006/main" xmlns:r="http://schemas.openxmlformats.org/officeDocument/2006/relationships" xmlns:p="http://schemas.openxmlformats.org/presentationml/2006/main" showMasterSp="0" showMasterPhAnim="0">
   <p:cSld>
     <p:spTree>
       <p:nvGrpSpPr>
-        <p:cNvPr id="1" name="Shape 163"/>
+        <p:cNvPr id="1" name="Shape 185"/>
         <p:cNvGrpSpPr/>
         <p:nvPr/>
       </p:nvGrpSpPr>
@@ -2170,7 +2482,7 @@
       </p:grpSpPr>
       <p:sp>
         <p:nvSpPr>
-          <p:cNvPr id="164" name="Google Shape;164;g2f75e0b7ab9_1_8:notes"/>
+          <p:cNvPr id="186" name="Google Shape;186;g2f7f790df7b_2_0:notes"/>
           <p:cNvSpPr>
             <a:spLocks noGrp="1" noRot="1" noChangeAspect="1"/>
           </p:cNvSpPr>
@@ -2211,7 +2523,7 @@
       </p:sp>
       <p:sp>
         <p:nvSpPr>
-          <p:cNvPr id="165" name="Google Shape;165;g2f75e0b7ab9_1_8:notes"/>
+          <p:cNvPr id="187" name="Google Shape;187;g2f7f790df7b_2_0:notes"/>
           <p:cNvSpPr txBox="1">
             <a:spLocks noGrp="1"/>
           </p:cNvSpPr>
@@ -2255,12 +2567,12 @@
 </p:notes>
 </file>
 
-<file path=ppt/notesSlides/notesSlide21.xml><?xml version="1.0" encoding="utf-8"?>
+<file path=ppt/notesSlides/notesSlide24.xml><?xml version="1.0" encoding="utf-8"?>
 <p:notes xmlns:a="http://schemas.openxmlformats.org/drawingml/2006/main" xmlns:r="http://schemas.openxmlformats.org/officeDocument/2006/relationships" xmlns:p="http://schemas.openxmlformats.org/presentationml/2006/main" showMasterSp="0" showMasterPhAnim="0">
   <p:cSld>
     <p:spTree>
       <p:nvGrpSpPr>
-        <p:cNvPr id="1" name="Shape 170"/>
+        <p:cNvPr id="1" name="Shape 191"/>
         <p:cNvGrpSpPr/>
         <p:nvPr/>
       </p:nvGrpSpPr>
@@ -2274,7 +2586,7 @@
       </p:grpSpPr>
       <p:sp>
         <p:nvSpPr>
-          <p:cNvPr id="171" name="Google Shape;171;g2f75e0b7ab9_1_14:notes"/>
+          <p:cNvPr id="192" name="Google Shape;192;g311f30adde6_1_5:notes"/>
           <p:cNvSpPr>
             <a:spLocks noGrp="1" noRot="1" noChangeAspect="1"/>
           </p:cNvSpPr>
@@ -2315,7 +2627,7 @@
       </p:sp>
       <p:sp>
         <p:nvSpPr>
-          <p:cNvPr id="172" name="Google Shape;172;g2f75e0b7ab9_1_14:notes"/>
+          <p:cNvPr id="193" name="Google Shape;193;g311f30adde6_1_5:notes"/>
           <p:cNvSpPr txBox="1">
             <a:spLocks noGrp="1"/>
           </p:cNvSpPr>
@@ -2359,111 +2671,7 @@
 </p:notes>
 </file>
 
-<file path=ppt/notesSlides/notesSlide22.xml><?xml version="1.0" encoding="utf-8"?>
-<p:notes xmlns:a="http://schemas.openxmlformats.org/drawingml/2006/main" xmlns:r="http://schemas.openxmlformats.org/officeDocument/2006/relationships" xmlns:p="http://schemas.openxmlformats.org/presentationml/2006/main" showMasterSp="0" showMasterPhAnim="0">
-  <p:cSld>
-    <p:spTree>
-      <p:nvGrpSpPr>
-        <p:cNvPr id="1" name="Shape 178"/>
-        <p:cNvGrpSpPr/>
-        <p:nvPr/>
-      </p:nvGrpSpPr>
-      <p:grpSpPr>
-        <a:xfrm>
-          <a:off x="0" y="0"/>
-          <a:ext cx="0" cy="0"/>
-          <a:chOff x="0" y="0"/>
-          <a:chExt cx="0" cy="0"/>
-        </a:xfrm>
-      </p:grpSpPr>
-      <p:sp>
-        <p:nvSpPr>
-          <p:cNvPr id="179" name="Google Shape;179;g2f75e0b7ab9_1_21:notes"/>
-          <p:cNvSpPr>
-            <a:spLocks noGrp="1" noRot="1" noChangeAspect="1"/>
-          </p:cNvSpPr>
-          <p:nvPr>
-            <p:ph type="sldImg" idx="2"/>
-          </p:nvPr>
-        </p:nvSpPr>
-        <p:spPr>
-          <a:xfrm>
-            <a:off x="381000" y="685800"/>
-            <a:ext cx="6096000" cy="3429000"/>
-          </a:xfrm>
-          <a:custGeom>
-            <a:avLst/>
-            <a:gdLst/>
-            <a:ahLst/>
-            <a:cxnLst/>
-            <a:rect l="l" t="t" r="r" b="b"/>
-            <a:pathLst>
-              <a:path w="120000" h="120000" extrusionOk="0">
-                <a:moveTo>
-                  <a:pt x="0" y="0"/>
-                </a:moveTo>
-                <a:lnTo>
-                  <a:pt x="120000" y="0"/>
-                </a:lnTo>
-                <a:lnTo>
-                  <a:pt x="120000" y="120000"/>
-                </a:lnTo>
-                <a:lnTo>
-                  <a:pt x="0" y="120000"/>
-                </a:lnTo>
-                <a:close/>
-              </a:path>
-            </a:pathLst>
-          </a:custGeom>
-        </p:spPr>
-      </p:sp>
-      <p:sp>
-        <p:nvSpPr>
-          <p:cNvPr id="180" name="Google Shape;180;g2f75e0b7ab9_1_21:notes"/>
-          <p:cNvSpPr txBox="1">
-            <a:spLocks noGrp="1"/>
-          </p:cNvSpPr>
-          <p:nvPr>
-            <p:ph type="body" idx="1"/>
-          </p:nvPr>
-        </p:nvSpPr>
-        <p:spPr>
-          <a:xfrm>
-            <a:off x="685800" y="4343400"/>
-            <a:ext cx="5486400" cy="4114800"/>
-          </a:xfrm>
-          <a:prstGeom prst="rect">
-            <a:avLst/>
-          </a:prstGeom>
-        </p:spPr>
-        <p:txBody>
-          <a:bodyPr spcFirstLastPara="1" wrap="square" lIns="91425" tIns="91425" rIns="91425" bIns="91425" anchor="t" anchorCtr="0">
-            <a:noAutofit/>
-          </a:bodyPr>
-          <a:lstStyle/>
-          <a:p>
-            <a:pPr marL="0" lvl="0" indent="0" algn="l" rtl="0">
-              <a:spcBef>
-                <a:spcPts val="0"/>
-              </a:spcBef>
-              <a:spcAft>
-                <a:spcPts val="0"/>
-              </a:spcAft>
-              <a:buNone/>
-            </a:pPr>
-            <a:endParaRPr/>
-          </a:p>
-        </p:txBody>
-      </p:sp>
-    </p:spTree>
-  </p:cSld>
-  <p:clrMapOvr>
-    <a:masterClrMapping/>
-  </p:clrMapOvr>
-</p:notes>
-</file>
-
-<file path=ppt/notesSlides/notesSlide23.xml><?xml version="1.0" encoding="utf-8"?>
+<file path=ppt/notesSlides/notesSlide25.xml><?xml version="1.0" encoding="utf-8"?>
 <p:notes xmlns:a="http://schemas.openxmlformats.org/drawingml/2006/main" xmlns:r="http://schemas.openxmlformats.org/officeDocument/2006/relationships" xmlns:p="http://schemas.openxmlformats.org/presentationml/2006/main" showMasterSp="0" showMasterPhAnim="0">
   <p:cSld>
     <p:spTree>
@@ -2567,12 +2775,12 @@
 </p:notes>
 </file>
 
-<file path=ppt/notesSlides/notesSlide24.xml><?xml version="1.0" encoding="utf-8"?>
+<file path=ppt/notesSlides/notesSlide3.xml><?xml version="1.0" encoding="utf-8"?>
 <p:notes xmlns:a="http://schemas.openxmlformats.org/drawingml/2006/main" xmlns:r="http://schemas.openxmlformats.org/officeDocument/2006/relationships" xmlns:p="http://schemas.openxmlformats.org/presentationml/2006/main" showMasterSp="0" showMasterPhAnim="0">
   <p:cSld>
     <p:spTree>
       <p:nvGrpSpPr>
-        <p:cNvPr id="1" name="Shape 185"/>
+        <p:cNvPr id="1" name="Shape 69"/>
         <p:cNvGrpSpPr/>
         <p:nvPr/>
       </p:nvGrpSpPr>
@@ -2586,7 +2794,7 @@
       </p:grpSpPr>
       <p:sp>
         <p:nvSpPr>
-          <p:cNvPr id="186" name="Google Shape;186;g2f7f790df7b_2_0:notes"/>
+          <p:cNvPr id="70" name="Google Shape;70;g13a1d080442_0_10:notes"/>
           <p:cNvSpPr>
             <a:spLocks noGrp="1" noRot="1" noChangeAspect="1"/>
           </p:cNvSpPr>
@@ -2627,7 +2835,7 @@
       </p:sp>
       <p:sp>
         <p:nvSpPr>
-          <p:cNvPr id="187" name="Google Shape;187;g2f7f790df7b_2_0:notes"/>
+          <p:cNvPr id="71" name="Google Shape;71;g13a1d080442_0_10:notes"/>
           <p:cNvSpPr txBox="1">
             <a:spLocks noGrp="1"/>
           </p:cNvSpPr>
@@ -2671,12 +2879,12 @@
 </p:notes>
 </file>
 
-<file path=ppt/notesSlides/notesSlide25.xml><?xml version="1.0" encoding="utf-8"?>
+<file path=ppt/notesSlides/notesSlide4.xml><?xml version="1.0" encoding="utf-8"?>
 <p:notes xmlns:a="http://schemas.openxmlformats.org/drawingml/2006/main" xmlns:r="http://schemas.openxmlformats.org/officeDocument/2006/relationships" xmlns:p="http://schemas.openxmlformats.org/presentationml/2006/main" showMasterSp="0" showMasterPhAnim="0">
   <p:cSld>
     <p:spTree>
       <p:nvGrpSpPr>
-        <p:cNvPr id="1" name="Shape 191"/>
+        <p:cNvPr id="1" name="Shape 76"/>
         <p:cNvGrpSpPr/>
         <p:nvPr/>
       </p:nvGrpSpPr>
@@ -2690,7 +2898,7 @@
       </p:grpSpPr>
       <p:sp>
         <p:nvSpPr>
-          <p:cNvPr id="192" name="Google Shape;192;g311f30adde6_1_5:notes"/>
+          <p:cNvPr id="77" name="Google Shape;77;g13a1d080442_0_15:notes"/>
           <p:cNvSpPr>
             <a:spLocks noGrp="1" noRot="1" noChangeAspect="1"/>
           </p:cNvSpPr>
@@ -2731,7 +2939,7 @@
       </p:sp>
       <p:sp>
         <p:nvSpPr>
-          <p:cNvPr id="193" name="Google Shape;193;g311f30adde6_1_5:notes"/>
+          <p:cNvPr id="78" name="Google Shape;78;g13a1d080442_0_15:notes"/>
           <p:cNvSpPr txBox="1">
             <a:spLocks noGrp="1"/>
           </p:cNvSpPr>
@@ -2775,12 +2983,12 @@
 </p:notes>
 </file>
 
-<file path=ppt/notesSlides/notesSlide26.xml><?xml version="1.0" encoding="utf-8"?>
+<file path=ppt/notesSlides/notesSlide5.xml><?xml version="1.0" encoding="utf-8"?>
 <p:notes xmlns:a="http://schemas.openxmlformats.org/drawingml/2006/main" xmlns:r="http://schemas.openxmlformats.org/officeDocument/2006/relationships" xmlns:p="http://schemas.openxmlformats.org/presentationml/2006/main" showMasterSp="0" showMasterPhAnim="0">
   <p:cSld>
     <p:spTree>
       <p:nvGrpSpPr>
-        <p:cNvPr id="1" name="Shape 56"/>
+        <p:cNvPr id="1" name="Shape 83"/>
         <p:cNvGrpSpPr/>
         <p:nvPr/>
       </p:nvGrpSpPr>
@@ -2794,7 +3002,7 @@
       </p:grpSpPr>
       <p:sp>
         <p:nvSpPr>
-          <p:cNvPr id="57" name="Google Shape;57;g13a1d080442_0_0:notes"/>
+          <p:cNvPr id="84" name="Google Shape;84;g13a1d080442_0_20:notes"/>
           <p:cNvSpPr>
             <a:spLocks noGrp="1" noRot="1" noChangeAspect="1"/>
           </p:cNvSpPr>
@@ -2835,7 +3043,7 @@
       </p:sp>
       <p:sp>
         <p:nvSpPr>
-          <p:cNvPr id="58" name="Google Shape;58;g13a1d080442_0_0:notes"/>
+          <p:cNvPr id="85" name="Google Shape;85;g13a1d080442_0_20:notes"/>
           <p:cNvSpPr txBox="1">
             <a:spLocks noGrp="1"/>
           </p:cNvSpPr>
@@ -2879,7 +3087,215 @@
 </p:notes>
 </file>
 
-<file path=ppt/notesSlides/notesSlide3.xml><?xml version="1.0" encoding="utf-8"?>
+<file path=ppt/notesSlides/notesSlide6.xml><?xml version="1.0" encoding="utf-8"?>
+<p:notes xmlns:a="http://schemas.openxmlformats.org/drawingml/2006/main" xmlns:r="http://schemas.openxmlformats.org/officeDocument/2006/relationships" xmlns:p="http://schemas.openxmlformats.org/presentationml/2006/main" showMasterSp="0" showMasterPhAnim="0">
+  <p:cSld>
+    <p:spTree>
+      <p:nvGrpSpPr>
+        <p:cNvPr id="1" name="Shape 97"/>
+        <p:cNvGrpSpPr/>
+        <p:nvPr/>
+      </p:nvGrpSpPr>
+      <p:grpSpPr>
+        <a:xfrm>
+          <a:off x="0" y="0"/>
+          <a:ext cx="0" cy="0"/>
+          <a:chOff x="0" y="0"/>
+          <a:chExt cx="0" cy="0"/>
+        </a:xfrm>
+      </p:grpSpPr>
+      <p:sp>
+        <p:nvSpPr>
+          <p:cNvPr id="98" name="Google Shape;98;g13a1d080442_0_30:notes"/>
+          <p:cNvSpPr>
+            <a:spLocks noGrp="1" noRot="1" noChangeAspect="1"/>
+          </p:cNvSpPr>
+          <p:nvPr>
+            <p:ph type="sldImg" idx="2"/>
+          </p:nvPr>
+        </p:nvSpPr>
+        <p:spPr>
+          <a:xfrm>
+            <a:off x="381000" y="685800"/>
+            <a:ext cx="6096000" cy="3429000"/>
+          </a:xfrm>
+          <a:custGeom>
+            <a:avLst/>
+            <a:gdLst/>
+            <a:ahLst/>
+            <a:cxnLst/>
+            <a:rect l="l" t="t" r="r" b="b"/>
+            <a:pathLst>
+              <a:path w="120000" h="120000" extrusionOk="0">
+                <a:moveTo>
+                  <a:pt x="0" y="0"/>
+                </a:moveTo>
+                <a:lnTo>
+                  <a:pt x="120000" y="0"/>
+                </a:lnTo>
+                <a:lnTo>
+                  <a:pt x="120000" y="120000"/>
+                </a:lnTo>
+                <a:lnTo>
+                  <a:pt x="0" y="120000"/>
+                </a:lnTo>
+                <a:close/>
+              </a:path>
+            </a:pathLst>
+          </a:custGeom>
+        </p:spPr>
+      </p:sp>
+      <p:sp>
+        <p:nvSpPr>
+          <p:cNvPr id="99" name="Google Shape;99;g13a1d080442_0_30:notes"/>
+          <p:cNvSpPr txBox="1">
+            <a:spLocks noGrp="1"/>
+          </p:cNvSpPr>
+          <p:nvPr>
+            <p:ph type="body" idx="1"/>
+          </p:nvPr>
+        </p:nvSpPr>
+        <p:spPr>
+          <a:xfrm>
+            <a:off x="685800" y="4343400"/>
+            <a:ext cx="5486400" cy="4114800"/>
+          </a:xfrm>
+          <a:prstGeom prst="rect">
+            <a:avLst/>
+          </a:prstGeom>
+        </p:spPr>
+        <p:txBody>
+          <a:bodyPr spcFirstLastPara="1" wrap="square" lIns="91425" tIns="91425" rIns="91425" bIns="91425" anchor="t" anchorCtr="0">
+            <a:noAutofit/>
+          </a:bodyPr>
+          <a:lstStyle/>
+          <a:p>
+            <a:pPr marL="0" lvl="0" indent="0" algn="l" rtl="0">
+              <a:spcBef>
+                <a:spcPts val="0"/>
+              </a:spcBef>
+              <a:spcAft>
+                <a:spcPts val="0"/>
+              </a:spcAft>
+              <a:buNone/>
+            </a:pPr>
+            <a:endParaRPr/>
+          </a:p>
+        </p:txBody>
+      </p:sp>
+    </p:spTree>
+  </p:cSld>
+  <p:clrMapOvr>
+    <a:masterClrMapping/>
+  </p:clrMapOvr>
+</p:notes>
+</file>
+
+<file path=ppt/notesSlides/notesSlide7.xml><?xml version="1.0" encoding="utf-8"?>
+<p:notes xmlns:a="http://schemas.openxmlformats.org/drawingml/2006/main" xmlns:r="http://schemas.openxmlformats.org/officeDocument/2006/relationships" xmlns:p="http://schemas.openxmlformats.org/presentationml/2006/main" showMasterSp="0" showMasterPhAnim="0">
+  <p:cSld>
+    <p:spTree>
+      <p:nvGrpSpPr>
+        <p:cNvPr id="1" name="Shape 104"/>
+        <p:cNvGrpSpPr/>
+        <p:nvPr/>
+      </p:nvGrpSpPr>
+      <p:grpSpPr>
+        <a:xfrm>
+          <a:off x="0" y="0"/>
+          <a:ext cx="0" cy="0"/>
+          <a:chOff x="0" y="0"/>
+          <a:chExt cx="0" cy="0"/>
+        </a:xfrm>
+      </p:grpSpPr>
+      <p:sp>
+        <p:nvSpPr>
+          <p:cNvPr id="105" name="Google Shape;105;g13a1d080442_0_35:notes"/>
+          <p:cNvSpPr>
+            <a:spLocks noGrp="1" noRot="1" noChangeAspect="1"/>
+          </p:cNvSpPr>
+          <p:nvPr>
+            <p:ph type="sldImg" idx="2"/>
+          </p:nvPr>
+        </p:nvSpPr>
+        <p:spPr>
+          <a:xfrm>
+            <a:off x="381000" y="685800"/>
+            <a:ext cx="6096000" cy="3429000"/>
+          </a:xfrm>
+          <a:custGeom>
+            <a:avLst/>
+            <a:gdLst/>
+            <a:ahLst/>
+            <a:cxnLst/>
+            <a:rect l="l" t="t" r="r" b="b"/>
+            <a:pathLst>
+              <a:path w="120000" h="120000" extrusionOk="0">
+                <a:moveTo>
+                  <a:pt x="0" y="0"/>
+                </a:moveTo>
+                <a:lnTo>
+                  <a:pt x="120000" y="0"/>
+                </a:lnTo>
+                <a:lnTo>
+                  <a:pt x="120000" y="120000"/>
+                </a:lnTo>
+                <a:lnTo>
+                  <a:pt x="0" y="120000"/>
+                </a:lnTo>
+                <a:close/>
+              </a:path>
+            </a:pathLst>
+          </a:custGeom>
+        </p:spPr>
+      </p:sp>
+      <p:sp>
+        <p:nvSpPr>
+          <p:cNvPr id="106" name="Google Shape;106;g13a1d080442_0_35:notes"/>
+          <p:cNvSpPr txBox="1">
+            <a:spLocks noGrp="1"/>
+          </p:cNvSpPr>
+          <p:nvPr>
+            <p:ph type="body" idx="1"/>
+          </p:nvPr>
+        </p:nvSpPr>
+        <p:spPr>
+          <a:xfrm>
+            <a:off x="685800" y="4343400"/>
+            <a:ext cx="5486400" cy="4114800"/>
+          </a:xfrm>
+          <a:prstGeom prst="rect">
+            <a:avLst/>
+          </a:prstGeom>
+        </p:spPr>
+        <p:txBody>
+          <a:bodyPr spcFirstLastPara="1" wrap="square" lIns="91425" tIns="91425" rIns="91425" bIns="91425" anchor="t" anchorCtr="0">
+            <a:noAutofit/>
+          </a:bodyPr>
+          <a:lstStyle/>
+          <a:p>
+            <a:pPr marL="0" lvl="0" indent="0" algn="l" rtl="0">
+              <a:spcBef>
+                <a:spcPts val="0"/>
+              </a:spcBef>
+              <a:spcAft>
+                <a:spcPts val="0"/>
+              </a:spcAft>
+              <a:buNone/>
+            </a:pPr>
+            <a:endParaRPr/>
+          </a:p>
+        </p:txBody>
+      </p:sp>
+    </p:spTree>
+  </p:cSld>
+  <p:clrMapOvr>
+    <a:masterClrMapping/>
+  </p:clrMapOvr>
+</p:notes>
+</file>
+
+<file path=ppt/notesSlides/notesSlide8.xml><?xml version="1.0" encoding="utf-8"?>
 <p:notes xmlns:a="http://schemas.openxmlformats.org/drawingml/2006/main" xmlns:r="http://schemas.openxmlformats.org/officeDocument/2006/relationships" xmlns:p="http://schemas.openxmlformats.org/presentationml/2006/main" showMasterSp="0" showMasterPhAnim="0">
   <p:cSld>
     <p:spTree>
@@ -2971,527 +3387,7 @@
               </a:spcAft>
               <a:buNone/>
             </a:pPr>
-            <a:endParaRPr/>
-          </a:p>
-        </p:txBody>
-      </p:sp>
-    </p:spTree>
-  </p:cSld>
-  <p:clrMapOvr>
-    <a:masterClrMapping/>
-  </p:clrMapOvr>
-</p:notes>
-</file>
-
-<file path=ppt/notesSlides/notesSlide4.xml><?xml version="1.0" encoding="utf-8"?>
-<p:notes xmlns:a="http://schemas.openxmlformats.org/drawingml/2006/main" xmlns:r="http://schemas.openxmlformats.org/officeDocument/2006/relationships" xmlns:p="http://schemas.openxmlformats.org/presentationml/2006/main" showMasterSp="0" showMasterPhAnim="0">
-  <p:cSld>
-    <p:spTree>
-      <p:nvGrpSpPr>
-        <p:cNvPr id="1" name="Shape 69"/>
-        <p:cNvGrpSpPr/>
-        <p:nvPr/>
-      </p:nvGrpSpPr>
-      <p:grpSpPr>
-        <a:xfrm>
-          <a:off x="0" y="0"/>
-          <a:ext cx="0" cy="0"/>
-          <a:chOff x="0" y="0"/>
-          <a:chExt cx="0" cy="0"/>
-        </a:xfrm>
-      </p:grpSpPr>
-      <p:sp>
-        <p:nvSpPr>
-          <p:cNvPr id="70" name="Google Shape;70;g13a1d080442_0_10:notes"/>
-          <p:cNvSpPr>
-            <a:spLocks noGrp="1" noRot="1" noChangeAspect="1"/>
-          </p:cNvSpPr>
-          <p:nvPr>
-            <p:ph type="sldImg" idx="2"/>
-          </p:nvPr>
-        </p:nvSpPr>
-        <p:spPr>
-          <a:xfrm>
-            <a:off x="381000" y="685800"/>
-            <a:ext cx="6096000" cy="3429000"/>
-          </a:xfrm>
-          <a:custGeom>
-            <a:avLst/>
-            <a:gdLst/>
-            <a:ahLst/>
-            <a:cxnLst/>
-            <a:rect l="l" t="t" r="r" b="b"/>
-            <a:pathLst>
-              <a:path w="120000" h="120000" extrusionOk="0">
-                <a:moveTo>
-                  <a:pt x="0" y="0"/>
-                </a:moveTo>
-                <a:lnTo>
-                  <a:pt x="120000" y="0"/>
-                </a:lnTo>
-                <a:lnTo>
-                  <a:pt x="120000" y="120000"/>
-                </a:lnTo>
-                <a:lnTo>
-                  <a:pt x="0" y="120000"/>
-                </a:lnTo>
-                <a:close/>
-              </a:path>
-            </a:pathLst>
-          </a:custGeom>
-        </p:spPr>
-      </p:sp>
-      <p:sp>
-        <p:nvSpPr>
-          <p:cNvPr id="71" name="Google Shape;71;g13a1d080442_0_10:notes"/>
-          <p:cNvSpPr txBox="1">
-            <a:spLocks noGrp="1"/>
-          </p:cNvSpPr>
-          <p:nvPr>
-            <p:ph type="body" idx="1"/>
-          </p:nvPr>
-        </p:nvSpPr>
-        <p:spPr>
-          <a:xfrm>
-            <a:off x="685800" y="4343400"/>
-            <a:ext cx="5486400" cy="4114800"/>
-          </a:xfrm>
-          <a:prstGeom prst="rect">
-            <a:avLst/>
-          </a:prstGeom>
-        </p:spPr>
-        <p:txBody>
-          <a:bodyPr spcFirstLastPara="1" wrap="square" lIns="91425" tIns="91425" rIns="91425" bIns="91425" anchor="t" anchorCtr="0">
-            <a:noAutofit/>
-          </a:bodyPr>
-          <a:lstStyle/>
-          <a:p>
-            <a:pPr marL="0" lvl="0" indent="0" algn="l" rtl="0">
-              <a:spcBef>
-                <a:spcPts val="0"/>
-              </a:spcBef>
-              <a:spcAft>
-                <a:spcPts val="0"/>
-              </a:spcAft>
-              <a:buNone/>
-            </a:pPr>
-            <a:endParaRPr/>
-          </a:p>
-        </p:txBody>
-      </p:sp>
-    </p:spTree>
-  </p:cSld>
-  <p:clrMapOvr>
-    <a:masterClrMapping/>
-  </p:clrMapOvr>
-</p:notes>
-</file>
-
-<file path=ppt/notesSlides/notesSlide5.xml><?xml version="1.0" encoding="utf-8"?>
-<p:notes xmlns:a="http://schemas.openxmlformats.org/drawingml/2006/main" xmlns:r="http://schemas.openxmlformats.org/officeDocument/2006/relationships" xmlns:p="http://schemas.openxmlformats.org/presentationml/2006/main" showMasterSp="0" showMasterPhAnim="0">
-  <p:cSld>
-    <p:spTree>
-      <p:nvGrpSpPr>
-        <p:cNvPr id="1" name="Shape 76"/>
-        <p:cNvGrpSpPr/>
-        <p:nvPr/>
-      </p:nvGrpSpPr>
-      <p:grpSpPr>
-        <a:xfrm>
-          <a:off x="0" y="0"/>
-          <a:ext cx="0" cy="0"/>
-          <a:chOff x="0" y="0"/>
-          <a:chExt cx="0" cy="0"/>
-        </a:xfrm>
-      </p:grpSpPr>
-      <p:sp>
-        <p:nvSpPr>
-          <p:cNvPr id="77" name="Google Shape;77;g13a1d080442_0_15:notes"/>
-          <p:cNvSpPr>
-            <a:spLocks noGrp="1" noRot="1" noChangeAspect="1"/>
-          </p:cNvSpPr>
-          <p:nvPr>
-            <p:ph type="sldImg" idx="2"/>
-          </p:nvPr>
-        </p:nvSpPr>
-        <p:spPr>
-          <a:xfrm>
-            <a:off x="381000" y="685800"/>
-            <a:ext cx="6096000" cy="3429000"/>
-          </a:xfrm>
-          <a:custGeom>
-            <a:avLst/>
-            <a:gdLst/>
-            <a:ahLst/>
-            <a:cxnLst/>
-            <a:rect l="l" t="t" r="r" b="b"/>
-            <a:pathLst>
-              <a:path w="120000" h="120000" extrusionOk="0">
-                <a:moveTo>
-                  <a:pt x="0" y="0"/>
-                </a:moveTo>
-                <a:lnTo>
-                  <a:pt x="120000" y="0"/>
-                </a:lnTo>
-                <a:lnTo>
-                  <a:pt x="120000" y="120000"/>
-                </a:lnTo>
-                <a:lnTo>
-                  <a:pt x="0" y="120000"/>
-                </a:lnTo>
-                <a:close/>
-              </a:path>
-            </a:pathLst>
-          </a:custGeom>
-        </p:spPr>
-      </p:sp>
-      <p:sp>
-        <p:nvSpPr>
-          <p:cNvPr id="78" name="Google Shape;78;g13a1d080442_0_15:notes"/>
-          <p:cNvSpPr txBox="1">
-            <a:spLocks noGrp="1"/>
-          </p:cNvSpPr>
-          <p:nvPr>
-            <p:ph type="body" idx="1"/>
-          </p:nvPr>
-        </p:nvSpPr>
-        <p:spPr>
-          <a:xfrm>
-            <a:off x="685800" y="4343400"/>
-            <a:ext cx="5486400" cy="4114800"/>
-          </a:xfrm>
-          <a:prstGeom prst="rect">
-            <a:avLst/>
-          </a:prstGeom>
-        </p:spPr>
-        <p:txBody>
-          <a:bodyPr spcFirstLastPara="1" wrap="square" lIns="91425" tIns="91425" rIns="91425" bIns="91425" anchor="t" anchorCtr="0">
-            <a:noAutofit/>
-          </a:bodyPr>
-          <a:lstStyle/>
-          <a:p>
-            <a:pPr marL="0" lvl="0" indent="0" algn="l" rtl="0">
-              <a:spcBef>
-                <a:spcPts val="0"/>
-              </a:spcBef>
-              <a:spcAft>
-                <a:spcPts val="0"/>
-              </a:spcAft>
-              <a:buNone/>
-            </a:pPr>
-            <a:endParaRPr/>
-          </a:p>
-        </p:txBody>
-      </p:sp>
-    </p:spTree>
-  </p:cSld>
-  <p:clrMapOvr>
-    <a:masterClrMapping/>
-  </p:clrMapOvr>
-</p:notes>
-</file>
-
-<file path=ppt/notesSlides/notesSlide6.xml><?xml version="1.0" encoding="utf-8"?>
-<p:notes xmlns:a="http://schemas.openxmlformats.org/drawingml/2006/main" xmlns:r="http://schemas.openxmlformats.org/officeDocument/2006/relationships" xmlns:p="http://schemas.openxmlformats.org/presentationml/2006/main" showMasterSp="0" showMasterPhAnim="0">
-  <p:cSld>
-    <p:spTree>
-      <p:nvGrpSpPr>
-        <p:cNvPr id="1" name="Shape 83"/>
-        <p:cNvGrpSpPr/>
-        <p:nvPr/>
-      </p:nvGrpSpPr>
-      <p:grpSpPr>
-        <a:xfrm>
-          <a:off x="0" y="0"/>
-          <a:ext cx="0" cy="0"/>
-          <a:chOff x="0" y="0"/>
-          <a:chExt cx="0" cy="0"/>
-        </a:xfrm>
-      </p:grpSpPr>
-      <p:sp>
-        <p:nvSpPr>
-          <p:cNvPr id="84" name="Google Shape;84;g13a1d080442_0_20:notes"/>
-          <p:cNvSpPr>
-            <a:spLocks noGrp="1" noRot="1" noChangeAspect="1"/>
-          </p:cNvSpPr>
-          <p:nvPr>
-            <p:ph type="sldImg" idx="2"/>
-          </p:nvPr>
-        </p:nvSpPr>
-        <p:spPr>
-          <a:xfrm>
-            <a:off x="381000" y="685800"/>
-            <a:ext cx="6096000" cy="3429000"/>
-          </a:xfrm>
-          <a:custGeom>
-            <a:avLst/>
-            <a:gdLst/>
-            <a:ahLst/>
-            <a:cxnLst/>
-            <a:rect l="l" t="t" r="r" b="b"/>
-            <a:pathLst>
-              <a:path w="120000" h="120000" extrusionOk="0">
-                <a:moveTo>
-                  <a:pt x="0" y="0"/>
-                </a:moveTo>
-                <a:lnTo>
-                  <a:pt x="120000" y="0"/>
-                </a:lnTo>
-                <a:lnTo>
-                  <a:pt x="120000" y="120000"/>
-                </a:lnTo>
-                <a:lnTo>
-                  <a:pt x="0" y="120000"/>
-                </a:lnTo>
-                <a:close/>
-              </a:path>
-            </a:pathLst>
-          </a:custGeom>
-        </p:spPr>
-      </p:sp>
-      <p:sp>
-        <p:nvSpPr>
-          <p:cNvPr id="85" name="Google Shape;85;g13a1d080442_0_20:notes"/>
-          <p:cNvSpPr txBox="1">
-            <a:spLocks noGrp="1"/>
-          </p:cNvSpPr>
-          <p:nvPr>
-            <p:ph type="body" idx="1"/>
-          </p:nvPr>
-        </p:nvSpPr>
-        <p:spPr>
-          <a:xfrm>
-            <a:off x="685800" y="4343400"/>
-            <a:ext cx="5486400" cy="4114800"/>
-          </a:xfrm>
-          <a:prstGeom prst="rect">
-            <a:avLst/>
-          </a:prstGeom>
-        </p:spPr>
-        <p:txBody>
-          <a:bodyPr spcFirstLastPara="1" wrap="square" lIns="91425" tIns="91425" rIns="91425" bIns="91425" anchor="t" anchorCtr="0">
-            <a:noAutofit/>
-          </a:bodyPr>
-          <a:lstStyle/>
-          <a:p>
-            <a:pPr marL="0" lvl="0" indent="0" algn="l" rtl="0">
-              <a:spcBef>
-                <a:spcPts val="0"/>
-              </a:spcBef>
-              <a:spcAft>
-                <a:spcPts val="0"/>
-              </a:spcAft>
-              <a:buNone/>
-            </a:pPr>
-            <a:endParaRPr/>
-          </a:p>
-        </p:txBody>
-      </p:sp>
-    </p:spTree>
-  </p:cSld>
-  <p:clrMapOvr>
-    <a:masterClrMapping/>
-  </p:clrMapOvr>
-</p:notes>
-</file>
-
-<file path=ppt/notesSlides/notesSlide7.xml><?xml version="1.0" encoding="utf-8"?>
-<p:notes xmlns:a="http://schemas.openxmlformats.org/drawingml/2006/main" xmlns:r="http://schemas.openxmlformats.org/officeDocument/2006/relationships" xmlns:p="http://schemas.openxmlformats.org/presentationml/2006/main" showMasterSp="0" showMasterPhAnim="0">
-  <p:cSld>
-    <p:spTree>
-      <p:nvGrpSpPr>
-        <p:cNvPr id="1" name="Shape 97"/>
-        <p:cNvGrpSpPr/>
-        <p:nvPr/>
-      </p:nvGrpSpPr>
-      <p:grpSpPr>
-        <a:xfrm>
-          <a:off x="0" y="0"/>
-          <a:ext cx="0" cy="0"/>
-          <a:chOff x="0" y="0"/>
-          <a:chExt cx="0" cy="0"/>
-        </a:xfrm>
-      </p:grpSpPr>
-      <p:sp>
-        <p:nvSpPr>
-          <p:cNvPr id="98" name="Google Shape;98;g13a1d080442_0_30:notes"/>
-          <p:cNvSpPr>
-            <a:spLocks noGrp="1" noRot="1" noChangeAspect="1"/>
-          </p:cNvSpPr>
-          <p:nvPr>
-            <p:ph type="sldImg" idx="2"/>
-          </p:nvPr>
-        </p:nvSpPr>
-        <p:spPr>
-          <a:xfrm>
-            <a:off x="381000" y="685800"/>
-            <a:ext cx="6096000" cy="3429000"/>
-          </a:xfrm>
-          <a:custGeom>
-            <a:avLst/>
-            <a:gdLst/>
-            <a:ahLst/>
-            <a:cxnLst/>
-            <a:rect l="l" t="t" r="r" b="b"/>
-            <a:pathLst>
-              <a:path w="120000" h="120000" extrusionOk="0">
-                <a:moveTo>
-                  <a:pt x="0" y="0"/>
-                </a:moveTo>
-                <a:lnTo>
-                  <a:pt x="120000" y="0"/>
-                </a:lnTo>
-                <a:lnTo>
-                  <a:pt x="120000" y="120000"/>
-                </a:lnTo>
-                <a:lnTo>
-                  <a:pt x="0" y="120000"/>
-                </a:lnTo>
-                <a:close/>
-              </a:path>
-            </a:pathLst>
-          </a:custGeom>
-        </p:spPr>
-      </p:sp>
-      <p:sp>
-        <p:nvSpPr>
-          <p:cNvPr id="99" name="Google Shape;99;g13a1d080442_0_30:notes"/>
-          <p:cNvSpPr txBox="1">
-            <a:spLocks noGrp="1"/>
-          </p:cNvSpPr>
-          <p:nvPr>
-            <p:ph type="body" idx="1"/>
-          </p:nvPr>
-        </p:nvSpPr>
-        <p:spPr>
-          <a:xfrm>
-            <a:off x="685800" y="4343400"/>
-            <a:ext cx="5486400" cy="4114800"/>
-          </a:xfrm>
-          <a:prstGeom prst="rect">
-            <a:avLst/>
-          </a:prstGeom>
-        </p:spPr>
-        <p:txBody>
-          <a:bodyPr spcFirstLastPara="1" wrap="square" lIns="91425" tIns="91425" rIns="91425" bIns="91425" anchor="t" anchorCtr="0">
-            <a:noAutofit/>
-          </a:bodyPr>
-          <a:lstStyle/>
-          <a:p>
-            <a:pPr marL="0" lvl="0" indent="0" algn="l" rtl="0">
-              <a:spcBef>
-                <a:spcPts val="0"/>
-              </a:spcBef>
-              <a:spcAft>
-                <a:spcPts val="0"/>
-              </a:spcAft>
-              <a:buNone/>
-            </a:pPr>
-            <a:endParaRPr/>
-          </a:p>
-        </p:txBody>
-      </p:sp>
-    </p:spTree>
-  </p:cSld>
-  <p:clrMapOvr>
-    <a:masterClrMapping/>
-  </p:clrMapOvr>
-</p:notes>
-</file>
-
-<file path=ppt/notesSlides/notesSlide8.xml><?xml version="1.0" encoding="utf-8"?>
-<p:notes xmlns:a="http://schemas.openxmlformats.org/drawingml/2006/main" xmlns:r="http://schemas.openxmlformats.org/officeDocument/2006/relationships" xmlns:p="http://schemas.openxmlformats.org/presentationml/2006/main" showMasterSp="0" showMasterPhAnim="0">
-  <p:cSld>
-    <p:spTree>
-      <p:nvGrpSpPr>
-        <p:cNvPr id="1" name="Shape 104"/>
-        <p:cNvGrpSpPr/>
-        <p:nvPr/>
-      </p:nvGrpSpPr>
-      <p:grpSpPr>
-        <a:xfrm>
-          <a:off x="0" y="0"/>
-          <a:ext cx="0" cy="0"/>
-          <a:chOff x="0" y="0"/>
-          <a:chExt cx="0" cy="0"/>
-        </a:xfrm>
-      </p:grpSpPr>
-      <p:sp>
-        <p:nvSpPr>
-          <p:cNvPr id="105" name="Google Shape;105;g13a1d080442_0_35:notes"/>
-          <p:cNvSpPr>
-            <a:spLocks noGrp="1" noRot="1" noChangeAspect="1"/>
-          </p:cNvSpPr>
-          <p:nvPr>
-            <p:ph type="sldImg" idx="2"/>
-          </p:nvPr>
-        </p:nvSpPr>
-        <p:spPr>
-          <a:xfrm>
-            <a:off x="381000" y="685800"/>
-            <a:ext cx="6096000" cy="3429000"/>
-          </a:xfrm>
-          <a:custGeom>
-            <a:avLst/>
-            <a:gdLst/>
-            <a:ahLst/>
-            <a:cxnLst/>
-            <a:rect l="l" t="t" r="r" b="b"/>
-            <a:pathLst>
-              <a:path w="120000" h="120000" extrusionOk="0">
-                <a:moveTo>
-                  <a:pt x="0" y="0"/>
-                </a:moveTo>
-                <a:lnTo>
-                  <a:pt x="120000" y="0"/>
-                </a:lnTo>
-                <a:lnTo>
-                  <a:pt x="120000" y="120000"/>
-                </a:lnTo>
-                <a:lnTo>
-                  <a:pt x="0" y="120000"/>
-                </a:lnTo>
-                <a:close/>
-              </a:path>
-            </a:pathLst>
-          </a:custGeom>
-        </p:spPr>
-      </p:sp>
-      <p:sp>
-        <p:nvSpPr>
-          <p:cNvPr id="106" name="Google Shape;106;g13a1d080442_0_35:notes"/>
-          <p:cNvSpPr txBox="1">
-            <a:spLocks noGrp="1"/>
-          </p:cNvSpPr>
-          <p:nvPr>
-            <p:ph type="body" idx="1"/>
-          </p:nvPr>
-        </p:nvSpPr>
-        <p:spPr>
-          <a:xfrm>
-            <a:off x="685800" y="4343400"/>
-            <a:ext cx="5486400" cy="4114800"/>
-          </a:xfrm>
-          <a:prstGeom prst="rect">
-            <a:avLst/>
-          </a:prstGeom>
-        </p:spPr>
-        <p:txBody>
-          <a:bodyPr spcFirstLastPara="1" wrap="square" lIns="91425" tIns="91425" rIns="91425" bIns="91425" anchor="t" anchorCtr="0">
-            <a:noAutofit/>
-          </a:bodyPr>
-          <a:lstStyle/>
-          <a:p>
-            <a:pPr marL="0" lvl="0" indent="0" algn="l" rtl="0">
-              <a:spcBef>
-                <a:spcPts val="0"/>
-              </a:spcBef>
-              <a:spcAft>
-                <a:spcPts val="0"/>
-              </a:spcAft>
-              <a:buNone/>
-            </a:pPr>
-            <a:endParaRPr/>
+            <a:endParaRPr dirty="0"/>
           </a:p>
         </p:txBody>
       </p:sp>
@@ -3608,11 +3504,11 @@
 </file>
 
 <file path=ppt/slideLayouts/slideLayout1.xml><?xml version="1.0" encoding="utf-8"?>
-<p:sldLayout xmlns:a="http://schemas.openxmlformats.org/drawingml/2006/main" xmlns:r="http://schemas.openxmlformats.org/officeDocument/2006/relationships" xmlns:p="http://schemas.openxmlformats.org/presentationml/2006/main" matchingName="Title slide" type="title">
-  <p:cSld name="TITLE">
+<p:sldLayout xmlns:a="http://schemas.openxmlformats.org/drawingml/2006/main" xmlns:r="http://schemas.openxmlformats.org/officeDocument/2006/relationships" xmlns:p="http://schemas.openxmlformats.org/presentationml/2006/main" matchingName="Section header" type="secHead">
+  <p:cSld name="SECTION_HEADER">
     <p:spTree>
       <p:nvGrpSpPr>
-        <p:cNvPr id="1" name="Shape 9"/>
+        <p:cNvPr id="1" name="Shape 13"/>
         <p:cNvGrpSpPr/>
         <p:nvPr/>
       </p:nvGrpSpPr>
@@ -3626,25 +3522,25 @@
       </p:grpSpPr>
       <p:sp>
         <p:nvSpPr>
-          <p:cNvPr id="10" name="Google Shape;10;p2"/>
+          <p:cNvPr id="14" name="Google Shape;14;p3"/>
           <p:cNvSpPr txBox="1">
             <a:spLocks noGrp="1"/>
           </p:cNvSpPr>
           <p:nvPr>
-            <p:ph type="ctrTitle"/>
+            <p:ph type="title"/>
           </p:nvPr>
         </p:nvSpPr>
         <p:spPr>
           <a:xfrm>
-            <a:off x="311708" y="744575"/>
-            <a:ext cx="8520600" cy="2052600"/>
+            <a:off x="311700" y="2150850"/>
+            <a:ext cx="8520600" cy="841800"/>
           </a:xfrm>
           <a:prstGeom prst="rect">
             <a:avLst/>
           </a:prstGeom>
         </p:spPr>
         <p:txBody>
-          <a:bodyPr spcFirstLastPara="1" wrap="square" lIns="91425" tIns="91425" rIns="91425" bIns="91425" anchor="b" anchorCtr="0">
+          <a:bodyPr spcFirstLastPara="1" wrap="square" lIns="91425" tIns="91425" rIns="91425" bIns="91425" anchor="ctr" anchorCtr="0">
             <a:normAutofit/>
           </a:bodyPr>
           <a:lstStyle>
@@ -3655,9 +3551,9 @@
               <a:spcAft>
                 <a:spcPts val="0"/>
               </a:spcAft>
-              <a:buSzPts val="5200"/>
-              <a:buNone/>
-              <a:defRPr sz="5200"/>
+              <a:buSzPts val="3600"/>
+              <a:buNone/>
+              <a:defRPr sz="3600"/>
             </a:lvl1pPr>
             <a:lvl2pPr lvl="1" algn="ctr">
               <a:spcBef>
@@ -3666,9 +3562,9 @@
               <a:spcAft>
                 <a:spcPts val="0"/>
               </a:spcAft>
-              <a:buSzPts val="5200"/>
-              <a:buNone/>
-              <a:defRPr sz="5200"/>
+              <a:buSzPts val="3600"/>
+              <a:buNone/>
+              <a:defRPr sz="3600"/>
             </a:lvl2pPr>
             <a:lvl3pPr lvl="2" algn="ctr">
               <a:spcBef>
@@ -3677,9 +3573,9 @@
               <a:spcAft>
                 <a:spcPts val="0"/>
               </a:spcAft>
-              <a:buSzPts val="5200"/>
-              <a:buNone/>
-              <a:defRPr sz="5200"/>
+              <a:buSzPts val="3600"/>
+              <a:buNone/>
+              <a:defRPr sz="3600"/>
             </a:lvl3pPr>
             <a:lvl4pPr lvl="3" algn="ctr">
               <a:spcBef>
@@ -3688,9 +3584,9 @@
               <a:spcAft>
                 <a:spcPts val="0"/>
               </a:spcAft>
-              <a:buSzPts val="5200"/>
-              <a:buNone/>
-              <a:defRPr sz="5200"/>
+              <a:buSzPts val="3600"/>
+              <a:buNone/>
+              <a:defRPr sz="3600"/>
             </a:lvl4pPr>
             <a:lvl5pPr lvl="4" algn="ctr">
               <a:spcBef>
@@ -3699,9 +3595,9 @@
               <a:spcAft>
                 <a:spcPts val="0"/>
               </a:spcAft>
-              <a:buSzPts val="5200"/>
-              <a:buNone/>
-              <a:defRPr sz="5200"/>
+              <a:buSzPts val="3600"/>
+              <a:buNone/>
+              <a:defRPr sz="3600"/>
             </a:lvl5pPr>
             <a:lvl6pPr lvl="5" algn="ctr">
               <a:spcBef>
@@ -3710,9 +3606,9 @@
               <a:spcAft>
                 <a:spcPts val="0"/>
               </a:spcAft>
-              <a:buSzPts val="5200"/>
-              <a:buNone/>
-              <a:defRPr sz="5200"/>
+              <a:buSzPts val="3600"/>
+              <a:buNone/>
+              <a:defRPr sz="3600"/>
             </a:lvl6pPr>
             <a:lvl7pPr lvl="6" algn="ctr">
               <a:spcBef>
@@ -3721,9 +3617,9 @@
               <a:spcAft>
                 <a:spcPts val="0"/>
               </a:spcAft>
-              <a:buSzPts val="5200"/>
-              <a:buNone/>
-              <a:defRPr sz="5200"/>
+              <a:buSzPts val="3600"/>
+              <a:buNone/>
+              <a:defRPr sz="3600"/>
             </a:lvl7pPr>
             <a:lvl8pPr lvl="7" algn="ctr">
               <a:spcBef>
@@ -3732,9 +3628,9 @@
               <a:spcAft>
                 <a:spcPts val="0"/>
               </a:spcAft>
-              <a:buSzPts val="5200"/>
-              <a:buNone/>
-              <a:defRPr sz="5200"/>
+              <a:buSzPts val="3600"/>
+              <a:buNone/>
+              <a:defRPr sz="3600"/>
             </a:lvl8pPr>
             <a:lvl9pPr lvl="8" algn="ctr">
               <a:spcBef>
@@ -3743,9 +3639,9 @@
               <a:spcAft>
                 <a:spcPts val="0"/>
               </a:spcAft>
-              <a:buSzPts val="5200"/>
-              <a:buNone/>
-              <a:defRPr sz="5200"/>
+              <a:buSzPts val="3600"/>
+              <a:buNone/>
+              <a:defRPr sz="3600"/>
             </a:lvl9pPr>
           </a:lstStyle>
           <a:p>
@@ -3755,163 +3651,7 @@
       </p:sp>
       <p:sp>
         <p:nvSpPr>
-          <p:cNvPr id="11" name="Google Shape;11;p2"/>
-          <p:cNvSpPr txBox="1">
-            <a:spLocks noGrp="1"/>
-          </p:cNvSpPr>
-          <p:nvPr>
-            <p:ph type="subTitle" idx="1"/>
-          </p:nvPr>
-        </p:nvSpPr>
-        <p:spPr>
-          <a:xfrm>
-            <a:off x="311700" y="2834125"/>
-            <a:ext cx="8520600" cy="792600"/>
-          </a:xfrm>
-          <a:prstGeom prst="rect">
-            <a:avLst/>
-          </a:prstGeom>
-        </p:spPr>
-        <p:txBody>
-          <a:bodyPr spcFirstLastPara="1" wrap="square" lIns="91425" tIns="91425" rIns="91425" bIns="91425" anchor="t" anchorCtr="0">
-            <a:normAutofit/>
-          </a:bodyPr>
-          <a:lstStyle>
-            <a:lvl1pPr lvl="0" algn="ctr">
-              <a:lnSpc>
-                <a:spcPct val="100000"/>
-              </a:lnSpc>
-              <a:spcBef>
-                <a:spcPts val="0"/>
-              </a:spcBef>
-              <a:spcAft>
-                <a:spcPts val="0"/>
-              </a:spcAft>
-              <a:buSzPts val="2800"/>
-              <a:buNone/>
-              <a:defRPr sz="2800"/>
-            </a:lvl1pPr>
-            <a:lvl2pPr lvl="1" algn="ctr">
-              <a:lnSpc>
-                <a:spcPct val="100000"/>
-              </a:lnSpc>
-              <a:spcBef>
-                <a:spcPts val="0"/>
-              </a:spcBef>
-              <a:spcAft>
-                <a:spcPts val="0"/>
-              </a:spcAft>
-              <a:buSzPts val="2800"/>
-              <a:buNone/>
-              <a:defRPr sz="2800"/>
-            </a:lvl2pPr>
-            <a:lvl3pPr lvl="2" algn="ctr">
-              <a:lnSpc>
-                <a:spcPct val="100000"/>
-              </a:lnSpc>
-              <a:spcBef>
-                <a:spcPts val="0"/>
-              </a:spcBef>
-              <a:spcAft>
-                <a:spcPts val="0"/>
-              </a:spcAft>
-              <a:buSzPts val="2800"/>
-              <a:buNone/>
-              <a:defRPr sz="2800"/>
-            </a:lvl3pPr>
-            <a:lvl4pPr lvl="3" algn="ctr">
-              <a:lnSpc>
-                <a:spcPct val="100000"/>
-              </a:lnSpc>
-              <a:spcBef>
-                <a:spcPts val="0"/>
-              </a:spcBef>
-              <a:spcAft>
-                <a:spcPts val="0"/>
-              </a:spcAft>
-              <a:buSzPts val="2800"/>
-              <a:buNone/>
-              <a:defRPr sz="2800"/>
-            </a:lvl4pPr>
-            <a:lvl5pPr lvl="4" algn="ctr">
-              <a:lnSpc>
-                <a:spcPct val="100000"/>
-              </a:lnSpc>
-              <a:spcBef>
-                <a:spcPts val="0"/>
-              </a:spcBef>
-              <a:spcAft>
-                <a:spcPts val="0"/>
-              </a:spcAft>
-              <a:buSzPts val="2800"/>
-              <a:buNone/>
-              <a:defRPr sz="2800"/>
-            </a:lvl5pPr>
-            <a:lvl6pPr lvl="5" algn="ctr">
-              <a:lnSpc>
-                <a:spcPct val="100000"/>
-              </a:lnSpc>
-              <a:spcBef>
-                <a:spcPts val="0"/>
-              </a:spcBef>
-              <a:spcAft>
-                <a:spcPts val="0"/>
-              </a:spcAft>
-              <a:buSzPts val="2800"/>
-              <a:buNone/>
-              <a:defRPr sz="2800"/>
-            </a:lvl6pPr>
-            <a:lvl7pPr lvl="6" algn="ctr">
-              <a:lnSpc>
-                <a:spcPct val="100000"/>
-              </a:lnSpc>
-              <a:spcBef>
-                <a:spcPts val="0"/>
-              </a:spcBef>
-              <a:spcAft>
-                <a:spcPts val="0"/>
-              </a:spcAft>
-              <a:buSzPts val="2800"/>
-              <a:buNone/>
-              <a:defRPr sz="2800"/>
-            </a:lvl7pPr>
-            <a:lvl8pPr lvl="7" algn="ctr">
-              <a:lnSpc>
-                <a:spcPct val="100000"/>
-              </a:lnSpc>
-              <a:spcBef>
-                <a:spcPts val="0"/>
-              </a:spcBef>
-              <a:spcAft>
-                <a:spcPts val="0"/>
-              </a:spcAft>
-              <a:buSzPts val="2800"/>
-              <a:buNone/>
-              <a:defRPr sz="2800"/>
-            </a:lvl8pPr>
-            <a:lvl9pPr lvl="8" algn="ctr">
-              <a:lnSpc>
-                <a:spcPct val="100000"/>
-              </a:lnSpc>
-              <a:spcBef>
-                <a:spcPts val="0"/>
-              </a:spcBef>
-              <a:spcAft>
-                <a:spcPts val="0"/>
-              </a:spcAft>
-              <a:buSzPts val="2800"/>
-              <a:buNone/>
-              <a:defRPr sz="2800"/>
-            </a:lvl9pPr>
-          </a:lstStyle>
-          <a:p>
-            <a:endParaRPr/>
-          </a:p>
-        </p:txBody>
-      </p:sp>
-      <p:sp>
-        <p:nvSpPr>
-          <p:cNvPr id="12" name="Google Shape;12;p2"/>
+          <p:cNvPr id="15" name="Google Shape;15;p3"/>
           <p:cNvSpPr txBox="1">
             <a:spLocks noGrp="1"/>
           </p:cNvSpPr>
@@ -4465,8 +4205,8 @@
 </file>
 
 <file path=ppt/slideLayouts/slideLayout2.xml><?xml version="1.0" encoding="utf-8"?>
-<p:sldLayout xmlns:a="http://schemas.openxmlformats.org/drawingml/2006/main" xmlns:r="http://schemas.openxmlformats.org/officeDocument/2006/relationships" xmlns:p="http://schemas.openxmlformats.org/presentationml/2006/main" matchingName="Section header" type="secHead">
-  <p:cSld name="SECTION_HEADER">
+<p:sldLayout xmlns:a="http://schemas.openxmlformats.org/drawingml/2006/main" xmlns:r="http://schemas.openxmlformats.org/officeDocument/2006/relationships" xmlns:p="http://schemas.openxmlformats.org/presentationml/2006/main" matchingName="Section header" preserve="1" userDrawn="1">
+  <p:cSld name="1_Section header">
     <p:spTree>
       <p:nvGrpSpPr>
         <p:cNvPr id="1" name="Shape 13"/>
@@ -4483,213 +4223,733 @@
       </p:grpSpPr>
       <p:sp>
         <p:nvSpPr>
-          <p:cNvPr id="14" name="Google Shape;14;p3"/>
-          <p:cNvSpPr txBox="1">
-            <a:spLocks noGrp="1"/>
-          </p:cNvSpPr>
-          <p:nvPr>
-            <p:ph type="title"/>
-          </p:nvPr>
+          <p:cNvPr id="4" name="矩形 7">
+            <a:extLst>
+              <a:ext uri="{FF2B5EF4-FFF2-40B4-BE49-F238E27FC236}">
+                <a16:creationId xmlns:a16="http://schemas.microsoft.com/office/drawing/2014/main" id="{FA24D7BF-92E9-7888-128B-67CFFB444802}"/>
+              </a:ext>
+            </a:extLst>
+          </p:cNvPr>
+          <p:cNvSpPr/>
+          <p:nvPr userDrawn="1"/>
         </p:nvSpPr>
         <p:spPr>
+          <a:xfrm flipH="1">
+            <a:off x="0" y="4778374"/>
+            <a:ext cx="9144000" cy="388032"/>
+          </a:xfrm>
+          <a:custGeom>
+            <a:avLst/>
+            <a:gdLst>
+              <a:gd name="connsiteX0" fmla="*/ 0 w 12192000"/>
+              <a:gd name="connsiteY0" fmla="*/ 0 h 609599"/>
+              <a:gd name="connsiteX1" fmla="*/ 12192000 w 12192000"/>
+              <a:gd name="connsiteY1" fmla="*/ 0 h 609599"/>
+              <a:gd name="connsiteX2" fmla="*/ 12192000 w 12192000"/>
+              <a:gd name="connsiteY2" fmla="*/ 609599 h 609599"/>
+              <a:gd name="connsiteX3" fmla="*/ 0 w 12192000"/>
+              <a:gd name="connsiteY3" fmla="*/ 609599 h 609599"/>
+              <a:gd name="connsiteX4" fmla="*/ 0 w 12192000"/>
+              <a:gd name="connsiteY4" fmla="*/ 0 h 609599"/>
+              <a:gd name="connsiteX0" fmla="*/ 0 w 12192000"/>
+              <a:gd name="connsiteY0" fmla="*/ 548640 h 1158239"/>
+              <a:gd name="connsiteX1" fmla="*/ 12192000 w 12192000"/>
+              <a:gd name="connsiteY1" fmla="*/ 548640 h 1158239"/>
+              <a:gd name="connsiteX2" fmla="*/ 12192000 w 12192000"/>
+              <a:gd name="connsiteY2" fmla="*/ 1158239 h 1158239"/>
+              <a:gd name="connsiteX3" fmla="*/ 0 w 12192000"/>
+              <a:gd name="connsiteY3" fmla="*/ 1158239 h 1158239"/>
+              <a:gd name="connsiteX4" fmla="*/ 0 w 12192000"/>
+              <a:gd name="connsiteY4" fmla="*/ 548640 h 1158239"/>
+              <a:gd name="connsiteX0" fmla="*/ 0 w 12192000"/>
+              <a:gd name="connsiteY0" fmla="*/ 376700 h 986299"/>
+              <a:gd name="connsiteX1" fmla="*/ 12192000 w 12192000"/>
+              <a:gd name="connsiteY1" fmla="*/ 376700 h 986299"/>
+              <a:gd name="connsiteX2" fmla="*/ 12192000 w 12192000"/>
+              <a:gd name="connsiteY2" fmla="*/ 986299 h 986299"/>
+              <a:gd name="connsiteX3" fmla="*/ 0 w 12192000"/>
+              <a:gd name="connsiteY3" fmla="*/ 986299 h 986299"/>
+              <a:gd name="connsiteX4" fmla="*/ 0 w 12192000"/>
+              <a:gd name="connsiteY4" fmla="*/ 376700 h 986299"/>
+              <a:gd name="connsiteX0" fmla="*/ 0 w 12192000"/>
+              <a:gd name="connsiteY0" fmla="*/ 438928 h 1048527"/>
+              <a:gd name="connsiteX1" fmla="*/ 12192000 w 12192000"/>
+              <a:gd name="connsiteY1" fmla="*/ 438928 h 1048527"/>
+              <a:gd name="connsiteX2" fmla="*/ 12192000 w 12192000"/>
+              <a:gd name="connsiteY2" fmla="*/ 1048527 h 1048527"/>
+              <a:gd name="connsiteX3" fmla="*/ 0 w 12192000"/>
+              <a:gd name="connsiteY3" fmla="*/ 1048527 h 1048527"/>
+              <a:gd name="connsiteX4" fmla="*/ 0 w 12192000"/>
+              <a:gd name="connsiteY4" fmla="*/ 438928 h 1048527"/>
+              <a:gd name="connsiteX0" fmla="*/ 0 w 12192000"/>
+              <a:gd name="connsiteY0" fmla="*/ 181799 h 791398"/>
+              <a:gd name="connsiteX1" fmla="*/ 12192000 w 12192000"/>
+              <a:gd name="connsiteY1" fmla="*/ 181799 h 791398"/>
+              <a:gd name="connsiteX2" fmla="*/ 12192000 w 12192000"/>
+              <a:gd name="connsiteY2" fmla="*/ 791398 h 791398"/>
+              <a:gd name="connsiteX3" fmla="*/ 0 w 12192000"/>
+              <a:gd name="connsiteY3" fmla="*/ 791398 h 791398"/>
+              <a:gd name="connsiteX4" fmla="*/ 0 w 12192000"/>
+              <a:gd name="connsiteY4" fmla="*/ 181799 h 791398"/>
+              <a:gd name="connsiteX0" fmla="*/ 0 w 12192000"/>
+              <a:gd name="connsiteY0" fmla="*/ 187345 h 796944"/>
+              <a:gd name="connsiteX1" fmla="*/ 12192000 w 12192000"/>
+              <a:gd name="connsiteY1" fmla="*/ 187345 h 796944"/>
+              <a:gd name="connsiteX2" fmla="*/ 12192000 w 12192000"/>
+              <a:gd name="connsiteY2" fmla="*/ 796944 h 796944"/>
+              <a:gd name="connsiteX3" fmla="*/ 0 w 12192000"/>
+              <a:gd name="connsiteY3" fmla="*/ 796944 h 796944"/>
+              <a:gd name="connsiteX4" fmla="*/ 0 w 12192000"/>
+              <a:gd name="connsiteY4" fmla="*/ 187345 h 796944"/>
+              <a:gd name="connsiteX0" fmla="*/ 0 w 12192000"/>
+              <a:gd name="connsiteY0" fmla="*/ 154569 h 764168"/>
+              <a:gd name="connsiteX1" fmla="*/ 12192000 w 12192000"/>
+              <a:gd name="connsiteY1" fmla="*/ 154569 h 764168"/>
+              <a:gd name="connsiteX2" fmla="*/ 12192000 w 12192000"/>
+              <a:gd name="connsiteY2" fmla="*/ 764168 h 764168"/>
+              <a:gd name="connsiteX3" fmla="*/ 0 w 12192000"/>
+              <a:gd name="connsiteY3" fmla="*/ 764168 h 764168"/>
+              <a:gd name="connsiteX4" fmla="*/ 0 w 12192000"/>
+              <a:gd name="connsiteY4" fmla="*/ 154569 h 764168"/>
+              <a:gd name="connsiteX0" fmla="*/ 0 w 12192000"/>
+              <a:gd name="connsiteY0" fmla="*/ 165354 h 774953"/>
+              <a:gd name="connsiteX1" fmla="*/ 12192000 w 12192000"/>
+              <a:gd name="connsiteY1" fmla="*/ 165354 h 774953"/>
+              <a:gd name="connsiteX2" fmla="*/ 12192000 w 12192000"/>
+              <a:gd name="connsiteY2" fmla="*/ 774953 h 774953"/>
+              <a:gd name="connsiteX3" fmla="*/ 0 w 12192000"/>
+              <a:gd name="connsiteY3" fmla="*/ 774953 h 774953"/>
+              <a:gd name="connsiteX4" fmla="*/ 0 w 12192000"/>
+              <a:gd name="connsiteY4" fmla="*/ 165354 h 774953"/>
+              <a:gd name="connsiteX0" fmla="*/ 0 w 12192000"/>
+              <a:gd name="connsiteY0" fmla="*/ 181798 h 791397"/>
+              <a:gd name="connsiteX1" fmla="*/ 12192000 w 12192000"/>
+              <a:gd name="connsiteY1" fmla="*/ 181798 h 791397"/>
+              <a:gd name="connsiteX2" fmla="*/ 12192000 w 12192000"/>
+              <a:gd name="connsiteY2" fmla="*/ 791397 h 791397"/>
+              <a:gd name="connsiteX3" fmla="*/ 0 w 12192000"/>
+              <a:gd name="connsiteY3" fmla="*/ 791397 h 791397"/>
+              <a:gd name="connsiteX4" fmla="*/ 0 w 12192000"/>
+              <a:gd name="connsiteY4" fmla="*/ 181798 h 791397"/>
+              <a:gd name="connsiteX0" fmla="*/ 0 w 12192000"/>
+              <a:gd name="connsiteY0" fmla="*/ 88858 h 698457"/>
+              <a:gd name="connsiteX1" fmla="*/ 12192000 w 12192000"/>
+              <a:gd name="connsiteY1" fmla="*/ 88858 h 698457"/>
+              <a:gd name="connsiteX2" fmla="*/ 12192000 w 12192000"/>
+              <a:gd name="connsiteY2" fmla="*/ 698457 h 698457"/>
+              <a:gd name="connsiteX3" fmla="*/ 0 w 12192000"/>
+              <a:gd name="connsiteY3" fmla="*/ 698457 h 698457"/>
+              <a:gd name="connsiteX4" fmla="*/ 0 w 12192000"/>
+              <a:gd name="connsiteY4" fmla="*/ 88858 h 698457"/>
+              <a:gd name="connsiteX0" fmla="*/ 10160 w 12192000"/>
+              <a:gd name="connsiteY0" fmla="*/ 93903 h 612062"/>
+              <a:gd name="connsiteX1" fmla="*/ 12192000 w 12192000"/>
+              <a:gd name="connsiteY1" fmla="*/ 2463 h 612062"/>
+              <a:gd name="connsiteX2" fmla="*/ 12192000 w 12192000"/>
+              <a:gd name="connsiteY2" fmla="*/ 612062 h 612062"/>
+              <a:gd name="connsiteX3" fmla="*/ 0 w 12192000"/>
+              <a:gd name="connsiteY3" fmla="*/ 612062 h 612062"/>
+              <a:gd name="connsiteX4" fmla="*/ 10160 w 12192000"/>
+              <a:gd name="connsiteY4" fmla="*/ 93903 h 612062"/>
+              <a:gd name="connsiteX0" fmla="*/ 0 w 12181840"/>
+              <a:gd name="connsiteY0" fmla="*/ 93903 h 612062"/>
+              <a:gd name="connsiteX1" fmla="*/ 12181840 w 12181840"/>
+              <a:gd name="connsiteY1" fmla="*/ 2463 h 612062"/>
+              <a:gd name="connsiteX2" fmla="*/ 12181840 w 12181840"/>
+              <a:gd name="connsiteY2" fmla="*/ 612062 h 612062"/>
+              <a:gd name="connsiteX3" fmla="*/ 12700 w 12181840"/>
+              <a:gd name="connsiteY3" fmla="*/ 612062 h 612062"/>
+              <a:gd name="connsiteX4" fmla="*/ 0 w 12181840"/>
+              <a:gd name="connsiteY4" fmla="*/ 93903 h 612062"/>
+              <a:gd name="connsiteX0" fmla="*/ 0 w 12181840"/>
+              <a:gd name="connsiteY0" fmla="*/ 93459 h 619238"/>
+              <a:gd name="connsiteX1" fmla="*/ 12181840 w 12181840"/>
+              <a:gd name="connsiteY1" fmla="*/ 9639 h 619238"/>
+              <a:gd name="connsiteX2" fmla="*/ 12181840 w 12181840"/>
+              <a:gd name="connsiteY2" fmla="*/ 619238 h 619238"/>
+              <a:gd name="connsiteX3" fmla="*/ 12700 w 12181840"/>
+              <a:gd name="connsiteY3" fmla="*/ 619238 h 619238"/>
+              <a:gd name="connsiteX4" fmla="*/ 0 w 12181840"/>
+              <a:gd name="connsiteY4" fmla="*/ 93459 h 619238"/>
+              <a:gd name="connsiteX0" fmla="*/ 0 w 12181840"/>
+              <a:gd name="connsiteY0" fmla="*/ 93459 h 619238"/>
+              <a:gd name="connsiteX1" fmla="*/ 12181840 w 12181840"/>
+              <a:gd name="connsiteY1" fmla="*/ 9639 h 619238"/>
+              <a:gd name="connsiteX2" fmla="*/ 12181840 w 12181840"/>
+              <a:gd name="connsiteY2" fmla="*/ 619238 h 619238"/>
+              <a:gd name="connsiteX3" fmla="*/ 12700 w 12181840"/>
+              <a:gd name="connsiteY3" fmla="*/ 619238 h 619238"/>
+              <a:gd name="connsiteX4" fmla="*/ 0 w 12181840"/>
+              <a:gd name="connsiteY4" fmla="*/ 93459 h 619238"/>
+              <a:gd name="connsiteX0" fmla="*/ 0 w 12197080"/>
+              <a:gd name="connsiteY0" fmla="*/ 93459 h 619238"/>
+              <a:gd name="connsiteX1" fmla="*/ 12197080 w 12197080"/>
+              <a:gd name="connsiteY1" fmla="*/ 9639 h 619238"/>
+              <a:gd name="connsiteX2" fmla="*/ 12197080 w 12197080"/>
+              <a:gd name="connsiteY2" fmla="*/ 619238 h 619238"/>
+              <a:gd name="connsiteX3" fmla="*/ 27940 w 12197080"/>
+              <a:gd name="connsiteY3" fmla="*/ 619238 h 619238"/>
+              <a:gd name="connsiteX4" fmla="*/ 0 w 12197080"/>
+              <a:gd name="connsiteY4" fmla="*/ 93459 h 619238"/>
+              <a:gd name="connsiteX0" fmla="*/ 2540 w 12199620"/>
+              <a:gd name="connsiteY0" fmla="*/ 93459 h 619238"/>
+              <a:gd name="connsiteX1" fmla="*/ 12199620 w 12199620"/>
+              <a:gd name="connsiteY1" fmla="*/ 9639 h 619238"/>
+              <a:gd name="connsiteX2" fmla="*/ 12199620 w 12199620"/>
+              <a:gd name="connsiteY2" fmla="*/ 619238 h 619238"/>
+              <a:gd name="connsiteX3" fmla="*/ 0 w 12199620"/>
+              <a:gd name="connsiteY3" fmla="*/ 611618 h 619238"/>
+              <a:gd name="connsiteX4" fmla="*/ 2540 w 12199620"/>
+              <a:gd name="connsiteY4" fmla="*/ 93459 h 619238"/>
+              <a:gd name="connsiteX0" fmla="*/ 153 w 12201043"/>
+              <a:gd name="connsiteY0" fmla="*/ 152400 h 609599"/>
+              <a:gd name="connsiteX1" fmla="*/ 12201043 w 12201043"/>
+              <a:gd name="connsiteY1" fmla="*/ 0 h 609599"/>
+              <a:gd name="connsiteX2" fmla="*/ 12201043 w 12201043"/>
+              <a:gd name="connsiteY2" fmla="*/ 609599 h 609599"/>
+              <a:gd name="connsiteX3" fmla="*/ 1423 w 12201043"/>
+              <a:gd name="connsiteY3" fmla="*/ 601979 h 609599"/>
+              <a:gd name="connsiteX4" fmla="*/ 153 w 12201043"/>
+              <a:gd name="connsiteY4" fmla="*/ 152400 h 609599"/>
+              <a:gd name="connsiteX0" fmla="*/ 153 w 12201043"/>
+              <a:gd name="connsiteY0" fmla="*/ 184785 h 609599"/>
+              <a:gd name="connsiteX1" fmla="*/ 12201043 w 12201043"/>
+              <a:gd name="connsiteY1" fmla="*/ 0 h 609599"/>
+              <a:gd name="connsiteX2" fmla="*/ 12201043 w 12201043"/>
+              <a:gd name="connsiteY2" fmla="*/ 609599 h 609599"/>
+              <a:gd name="connsiteX3" fmla="*/ 1423 w 12201043"/>
+              <a:gd name="connsiteY3" fmla="*/ 601979 h 609599"/>
+              <a:gd name="connsiteX4" fmla="*/ 153 w 12201043"/>
+              <a:gd name="connsiteY4" fmla="*/ 184785 h 609599"/>
+            </a:gdLst>
+            <a:ahLst/>
+            <a:cxnLst>
+              <a:cxn ang="0">
+                <a:pos x="connsiteX0" y="connsiteY0"/>
+              </a:cxn>
+              <a:cxn ang="0">
+                <a:pos x="connsiteX1" y="connsiteY1"/>
+              </a:cxn>
+              <a:cxn ang="0">
+                <a:pos x="connsiteX2" y="connsiteY2"/>
+              </a:cxn>
+              <a:cxn ang="0">
+                <a:pos x="connsiteX3" y="connsiteY3"/>
+              </a:cxn>
+              <a:cxn ang="0">
+                <a:pos x="connsiteX4" y="connsiteY4"/>
+              </a:cxn>
+            </a:cxnLst>
+            <a:rect l="l" t="t" r="r" b="b"/>
+            <a:pathLst>
+              <a:path w="12201043" h="609599">
+                <a:moveTo>
+                  <a:pt x="153" y="184785"/>
+                </a:moveTo>
+                <a:cubicBezTo>
+                  <a:pt x="6075833" y="-272415"/>
+                  <a:pt x="8457083" y="1051560"/>
+                  <a:pt x="12201043" y="0"/>
+                </a:cubicBezTo>
+                <a:lnTo>
+                  <a:pt x="12201043" y="609599"/>
+                </a:lnTo>
+                <a:lnTo>
+                  <a:pt x="1423" y="601979"/>
+                </a:lnTo>
+                <a:cubicBezTo>
+                  <a:pt x="2270" y="429259"/>
+                  <a:pt x="-694" y="357505"/>
+                  <a:pt x="153" y="184785"/>
+                </a:cubicBezTo>
+                <a:close/>
+              </a:path>
+            </a:pathLst>
+          </a:custGeom>
+          <a:gradFill flip="none" rotWithShape="1">
+            <a:gsLst>
+              <a:gs pos="60000">
+                <a:srgbClr val="008A41">
+                  <a:alpha val="49804"/>
+                </a:srgbClr>
+              </a:gs>
+              <a:gs pos="0">
+                <a:srgbClr val="008A41">
+                  <a:alpha val="70000"/>
+                </a:srgbClr>
+              </a:gs>
+              <a:gs pos="100000">
+                <a:srgbClr val="A0D2B4"/>
+              </a:gs>
+            </a:gsLst>
+            <a:lin ang="0" scaled="1"/>
+            <a:tileRect/>
+          </a:gradFill>
+          <a:ln>
+            <a:noFill/>
+          </a:ln>
+        </p:spPr>
+        <p:style>
+          <a:lnRef idx="2">
+            <a:schemeClr val="accent1">
+              <a:shade val="50000"/>
+            </a:schemeClr>
+          </a:lnRef>
+          <a:fillRef idx="1">
+            <a:schemeClr val="accent1"/>
+          </a:fillRef>
+          <a:effectRef idx="0">
+            <a:schemeClr val="accent1"/>
+          </a:effectRef>
+          <a:fontRef idx="minor">
+            <a:schemeClr val="lt1"/>
+          </a:fontRef>
+        </p:style>
+        <p:txBody>
+          <a:bodyPr rtlCol="0" anchor="ctr"/>
+          <a:lstStyle/>
+          <a:p>
+            <a:pPr algn="ctr"/>
+            <a:endParaRPr lang="zh-CN" altLang="en-US"/>
+          </a:p>
+        </p:txBody>
+      </p:sp>
+      <p:sp>
+        <p:nvSpPr>
+          <p:cNvPr id="5" name="任意多边形: 形状 4">
+            <a:extLst>
+              <a:ext uri="{FF2B5EF4-FFF2-40B4-BE49-F238E27FC236}">
+                <a16:creationId xmlns:a16="http://schemas.microsoft.com/office/drawing/2014/main" id="{E15CABD4-A156-5F7D-F379-35677D1030F0}"/>
+              </a:ext>
+            </a:extLst>
+          </p:cNvPr>
+          <p:cNvSpPr/>
+          <p:nvPr userDrawn="1"/>
+        </p:nvSpPr>
+        <p:spPr>
+          <a:xfrm flipH="1" flipV="1">
+            <a:off x="-6103" y="-10167"/>
+            <a:ext cx="9143999" cy="388031"/>
+          </a:xfrm>
+          <a:custGeom>
+            <a:avLst/>
+            <a:gdLst>
+              <a:gd name="connsiteX0" fmla="*/ 12192000 w 12192000"/>
+              <a:gd name="connsiteY0" fmla="*/ 0 h 2039768"/>
+              <a:gd name="connsiteX1" fmla="*/ 12192000 w 12192000"/>
+              <a:gd name="connsiteY1" fmla="*/ 2039768 h 2039768"/>
+              <a:gd name="connsiteX2" fmla="*/ 0 w 12192000"/>
+              <a:gd name="connsiteY2" fmla="*/ 2039768 h 2039768"/>
+              <a:gd name="connsiteX3" fmla="*/ 0 w 12192000"/>
+              <a:gd name="connsiteY3" fmla="*/ 819391 h 2039768"/>
+              <a:gd name="connsiteX4" fmla="*/ 37309 w 12192000"/>
+              <a:gd name="connsiteY4" fmla="*/ 834936 h 2039768"/>
+              <a:gd name="connsiteX5" fmla="*/ 5319640 w 12192000"/>
+              <a:gd name="connsiteY5" fmla="*/ 1747868 h 2039768"/>
+              <a:gd name="connsiteX6" fmla="*/ 11971651 w 12192000"/>
+              <a:gd name="connsiteY6" fmla="*/ 149892 h 2039768"/>
+              <a:gd name="connsiteX0" fmla="*/ 12192000 w 12192000"/>
+              <a:gd name="connsiteY0" fmla="*/ 373966 h 1893600"/>
+              <a:gd name="connsiteX1" fmla="*/ 12192000 w 12192000"/>
+              <a:gd name="connsiteY1" fmla="*/ 1893600 h 1893600"/>
+              <a:gd name="connsiteX2" fmla="*/ 0 w 12192000"/>
+              <a:gd name="connsiteY2" fmla="*/ 1893600 h 1893600"/>
+              <a:gd name="connsiteX3" fmla="*/ 0 w 12192000"/>
+              <a:gd name="connsiteY3" fmla="*/ 673223 h 1893600"/>
+              <a:gd name="connsiteX4" fmla="*/ 37309 w 12192000"/>
+              <a:gd name="connsiteY4" fmla="*/ 688768 h 1893600"/>
+              <a:gd name="connsiteX5" fmla="*/ 5319640 w 12192000"/>
+              <a:gd name="connsiteY5" fmla="*/ 1601700 h 1893600"/>
+              <a:gd name="connsiteX6" fmla="*/ 11971651 w 12192000"/>
+              <a:gd name="connsiteY6" fmla="*/ 3724 h 1893600"/>
+              <a:gd name="connsiteX7" fmla="*/ 12192000 w 12192000"/>
+              <a:gd name="connsiteY7" fmla="*/ 373966 h 1893600"/>
+              <a:gd name="connsiteX0" fmla="*/ 12192000 w 12192000"/>
+              <a:gd name="connsiteY0" fmla="*/ 1413 h 1521047"/>
+              <a:gd name="connsiteX1" fmla="*/ 12192000 w 12192000"/>
+              <a:gd name="connsiteY1" fmla="*/ 1521047 h 1521047"/>
+              <a:gd name="connsiteX2" fmla="*/ 0 w 12192000"/>
+              <a:gd name="connsiteY2" fmla="*/ 1521047 h 1521047"/>
+              <a:gd name="connsiteX3" fmla="*/ 0 w 12192000"/>
+              <a:gd name="connsiteY3" fmla="*/ 300670 h 1521047"/>
+              <a:gd name="connsiteX4" fmla="*/ 37309 w 12192000"/>
+              <a:gd name="connsiteY4" fmla="*/ 316215 h 1521047"/>
+              <a:gd name="connsiteX5" fmla="*/ 5319640 w 12192000"/>
+              <a:gd name="connsiteY5" fmla="*/ 1229147 h 1521047"/>
+              <a:gd name="connsiteX6" fmla="*/ 12192000 w 12192000"/>
+              <a:gd name="connsiteY6" fmla="*/ 1413 h 1521047"/>
+              <a:gd name="connsiteX0" fmla="*/ 12192000 w 12192000"/>
+              <a:gd name="connsiteY0" fmla="*/ 0 h 1519634"/>
+              <a:gd name="connsiteX1" fmla="*/ 12192000 w 12192000"/>
+              <a:gd name="connsiteY1" fmla="*/ 1519634 h 1519634"/>
+              <a:gd name="connsiteX2" fmla="*/ 0 w 12192000"/>
+              <a:gd name="connsiteY2" fmla="*/ 1519634 h 1519634"/>
+              <a:gd name="connsiteX3" fmla="*/ 0 w 12192000"/>
+              <a:gd name="connsiteY3" fmla="*/ 299257 h 1519634"/>
+              <a:gd name="connsiteX4" fmla="*/ 37309 w 12192000"/>
+              <a:gd name="connsiteY4" fmla="*/ 314802 h 1519634"/>
+              <a:gd name="connsiteX5" fmla="*/ 5319640 w 12192000"/>
+              <a:gd name="connsiteY5" fmla="*/ 1227734 h 1519634"/>
+              <a:gd name="connsiteX6" fmla="*/ 12192000 w 12192000"/>
+              <a:gd name="connsiteY6" fmla="*/ 0 h 1519634"/>
+              <a:gd name="connsiteX0" fmla="*/ 12192000 w 12192000"/>
+              <a:gd name="connsiteY0" fmla="*/ 0 h 1519634"/>
+              <a:gd name="connsiteX1" fmla="*/ 12192000 w 12192000"/>
+              <a:gd name="connsiteY1" fmla="*/ 1519634 h 1519634"/>
+              <a:gd name="connsiteX2" fmla="*/ 0 w 12192000"/>
+              <a:gd name="connsiteY2" fmla="*/ 1519634 h 1519634"/>
+              <a:gd name="connsiteX3" fmla="*/ 0 w 12192000"/>
+              <a:gd name="connsiteY3" fmla="*/ 299257 h 1519634"/>
+              <a:gd name="connsiteX4" fmla="*/ 140179 w 12192000"/>
+              <a:gd name="connsiteY4" fmla="*/ 401490 h 1519634"/>
+              <a:gd name="connsiteX5" fmla="*/ 5319640 w 12192000"/>
+              <a:gd name="connsiteY5" fmla="*/ 1227734 h 1519634"/>
+              <a:gd name="connsiteX6" fmla="*/ 12192000 w 12192000"/>
+              <a:gd name="connsiteY6" fmla="*/ 0 h 1519634"/>
+              <a:gd name="connsiteX0" fmla="*/ 12192000 w 12192000"/>
+              <a:gd name="connsiteY0" fmla="*/ 0 h 1519634"/>
+              <a:gd name="connsiteX1" fmla="*/ 12192000 w 12192000"/>
+              <a:gd name="connsiteY1" fmla="*/ 1519634 h 1519634"/>
+              <a:gd name="connsiteX2" fmla="*/ 0 w 12192000"/>
+              <a:gd name="connsiteY2" fmla="*/ 1519634 h 1519634"/>
+              <a:gd name="connsiteX3" fmla="*/ 0 w 12192000"/>
+              <a:gd name="connsiteY3" fmla="*/ 299257 h 1519634"/>
+              <a:gd name="connsiteX4" fmla="*/ 5319640 w 12192000"/>
+              <a:gd name="connsiteY4" fmla="*/ 1227734 h 1519634"/>
+              <a:gd name="connsiteX5" fmla="*/ 12192000 w 12192000"/>
+              <a:gd name="connsiteY5" fmla="*/ 0 h 1519634"/>
+              <a:gd name="connsiteX0" fmla="*/ 12192000 w 12192000"/>
+              <a:gd name="connsiteY0" fmla="*/ 0 h 1519634"/>
+              <a:gd name="connsiteX1" fmla="*/ 12192000 w 12192000"/>
+              <a:gd name="connsiteY1" fmla="*/ 1519634 h 1519634"/>
+              <a:gd name="connsiteX2" fmla="*/ 0 w 12192000"/>
+              <a:gd name="connsiteY2" fmla="*/ 1519634 h 1519634"/>
+              <a:gd name="connsiteX3" fmla="*/ 3810 w 12192000"/>
+              <a:gd name="connsiteY3" fmla="*/ 628674 h 1519634"/>
+              <a:gd name="connsiteX4" fmla="*/ 5319640 w 12192000"/>
+              <a:gd name="connsiteY4" fmla="*/ 1227734 h 1519634"/>
+              <a:gd name="connsiteX5" fmla="*/ 12192000 w 12192000"/>
+              <a:gd name="connsiteY5" fmla="*/ 0 h 1519634"/>
+              <a:gd name="connsiteX0" fmla="*/ 12192000 w 12192000"/>
+              <a:gd name="connsiteY0" fmla="*/ 0 h 1519634"/>
+              <a:gd name="connsiteX1" fmla="*/ 12192000 w 12192000"/>
+              <a:gd name="connsiteY1" fmla="*/ 1519634 h 1519634"/>
+              <a:gd name="connsiteX2" fmla="*/ 0 w 12192000"/>
+              <a:gd name="connsiteY2" fmla="*/ 1519634 h 1519634"/>
+              <a:gd name="connsiteX3" fmla="*/ 3810 w 12192000"/>
+              <a:gd name="connsiteY3" fmla="*/ 628674 h 1519634"/>
+              <a:gd name="connsiteX4" fmla="*/ 5319640 w 12192000"/>
+              <a:gd name="connsiteY4" fmla="*/ 1227734 h 1519634"/>
+              <a:gd name="connsiteX5" fmla="*/ 12192000 w 12192000"/>
+              <a:gd name="connsiteY5" fmla="*/ 0 h 1519634"/>
+              <a:gd name="connsiteX0" fmla="*/ 12192000 w 12192000"/>
+              <a:gd name="connsiteY0" fmla="*/ 0 h 1519634"/>
+              <a:gd name="connsiteX1" fmla="*/ 12192000 w 12192000"/>
+              <a:gd name="connsiteY1" fmla="*/ 1519634 h 1519634"/>
+              <a:gd name="connsiteX2" fmla="*/ 0 w 12192000"/>
+              <a:gd name="connsiteY2" fmla="*/ 1519634 h 1519634"/>
+              <a:gd name="connsiteX3" fmla="*/ 3810 w 12192000"/>
+              <a:gd name="connsiteY3" fmla="*/ 628674 h 1519634"/>
+              <a:gd name="connsiteX4" fmla="*/ 5319640 w 12192000"/>
+              <a:gd name="connsiteY4" fmla="*/ 1227734 h 1519634"/>
+              <a:gd name="connsiteX5" fmla="*/ 12192000 w 12192000"/>
+              <a:gd name="connsiteY5" fmla="*/ 0 h 1519634"/>
+              <a:gd name="connsiteX0" fmla="*/ 12192000 w 12192000"/>
+              <a:gd name="connsiteY0" fmla="*/ 0 h 1519634"/>
+              <a:gd name="connsiteX1" fmla="*/ 12192000 w 12192000"/>
+              <a:gd name="connsiteY1" fmla="*/ 1519634 h 1519634"/>
+              <a:gd name="connsiteX2" fmla="*/ 0 w 12192000"/>
+              <a:gd name="connsiteY2" fmla="*/ 1519634 h 1519634"/>
+              <a:gd name="connsiteX3" fmla="*/ 3810 w 12192000"/>
+              <a:gd name="connsiteY3" fmla="*/ 628674 h 1519634"/>
+              <a:gd name="connsiteX4" fmla="*/ 5319640 w 12192000"/>
+              <a:gd name="connsiteY4" fmla="*/ 1227734 h 1519634"/>
+              <a:gd name="connsiteX5" fmla="*/ 12192000 w 12192000"/>
+              <a:gd name="connsiteY5" fmla="*/ 0 h 1519634"/>
+              <a:gd name="connsiteX0" fmla="*/ 12198096 w 12198096"/>
+              <a:gd name="connsiteY0" fmla="*/ 0 h 1325451"/>
+              <a:gd name="connsiteX1" fmla="*/ 12192000 w 12198096"/>
+              <a:gd name="connsiteY1" fmla="*/ 1325451 h 1325451"/>
+              <a:gd name="connsiteX2" fmla="*/ 0 w 12198096"/>
+              <a:gd name="connsiteY2" fmla="*/ 1325451 h 1325451"/>
+              <a:gd name="connsiteX3" fmla="*/ 3810 w 12198096"/>
+              <a:gd name="connsiteY3" fmla="*/ 434491 h 1325451"/>
+              <a:gd name="connsiteX4" fmla="*/ 5319640 w 12198096"/>
+              <a:gd name="connsiteY4" fmla="*/ 1033551 h 1325451"/>
+              <a:gd name="connsiteX5" fmla="*/ 12198096 w 12198096"/>
+              <a:gd name="connsiteY5" fmla="*/ 0 h 1325451"/>
+              <a:gd name="connsiteX0" fmla="*/ 12198096 w 12198096"/>
+              <a:gd name="connsiteY0" fmla="*/ 0 h 1325451"/>
+              <a:gd name="connsiteX1" fmla="*/ 12192000 w 12198096"/>
+              <a:gd name="connsiteY1" fmla="*/ 1325451 h 1325451"/>
+              <a:gd name="connsiteX2" fmla="*/ 0 w 12198096"/>
+              <a:gd name="connsiteY2" fmla="*/ 1325451 h 1325451"/>
+              <a:gd name="connsiteX3" fmla="*/ 3810 w 12198096"/>
+              <a:gd name="connsiteY3" fmla="*/ 434491 h 1325451"/>
+              <a:gd name="connsiteX4" fmla="*/ 5325736 w 12198096"/>
+              <a:gd name="connsiteY4" fmla="*/ 978070 h 1325451"/>
+              <a:gd name="connsiteX5" fmla="*/ 12198096 w 12198096"/>
+              <a:gd name="connsiteY5" fmla="*/ 0 h 1325451"/>
+            </a:gdLst>
+            <a:ahLst/>
+            <a:cxnLst>
+              <a:cxn ang="0">
+                <a:pos x="connsiteX0" y="connsiteY0"/>
+              </a:cxn>
+              <a:cxn ang="0">
+                <a:pos x="connsiteX1" y="connsiteY1"/>
+              </a:cxn>
+              <a:cxn ang="0">
+                <a:pos x="connsiteX2" y="connsiteY2"/>
+              </a:cxn>
+              <a:cxn ang="0">
+                <a:pos x="connsiteX3" y="connsiteY3"/>
+              </a:cxn>
+              <a:cxn ang="0">
+                <a:pos x="connsiteX4" y="connsiteY4"/>
+              </a:cxn>
+              <a:cxn ang="0">
+                <a:pos x="connsiteX5" y="connsiteY5"/>
+              </a:cxn>
+            </a:cxnLst>
+            <a:rect l="l" t="t" r="r" b="b"/>
+            <a:pathLst>
+              <a:path w="12198096" h="1325451">
+                <a:moveTo>
+                  <a:pt x="12198096" y="0"/>
+                </a:moveTo>
+                <a:lnTo>
+                  <a:pt x="12192000" y="1325451"/>
+                </a:lnTo>
+                <a:lnTo>
+                  <a:pt x="0" y="1325451"/>
+                </a:lnTo>
+                <a:lnTo>
+                  <a:pt x="3810" y="434491"/>
+                </a:lnTo>
+                <a:cubicBezTo>
+                  <a:pt x="1718603" y="876908"/>
+                  <a:pt x="3533473" y="963319"/>
+                  <a:pt x="5325736" y="978070"/>
+                </a:cubicBezTo>
+                <a:cubicBezTo>
+                  <a:pt x="7351518" y="925603"/>
+                  <a:pt x="10633603" y="731550"/>
+                  <a:pt x="12198096" y="0"/>
+                </a:cubicBezTo>
+                <a:close/>
+              </a:path>
+            </a:pathLst>
+          </a:custGeom>
+          <a:gradFill flip="none" rotWithShape="1">
+            <a:gsLst>
+              <a:gs pos="60000">
+                <a:srgbClr val="A0D2B4">
+                  <a:alpha val="50000"/>
+                </a:srgbClr>
+              </a:gs>
+              <a:gs pos="0">
+                <a:srgbClr val="008A41">
+                  <a:alpha val="70000"/>
+                </a:srgbClr>
+              </a:gs>
+              <a:gs pos="100000">
+                <a:srgbClr val="A0D2B4">
+                  <a:alpha val="50000"/>
+                </a:srgbClr>
+              </a:gs>
+            </a:gsLst>
+            <a:lin ang="10800000" scaled="0"/>
+            <a:tileRect/>
+          </a:gradFill>
+          <a:ln>
+            <a:noFill/>
+          </a:ln>
+        </p:spPr>
+        <p:style>
+          <a:lnRef idx="2">
+            <a:schemeClr val="accent1">
+              <a:shade val="50000"/>
+            </a:schemeClr>
+          </a:lnRef>
+          <a:fillRef idx="1">
+            <a:schemeClr val="accent1"/>
+          </a:fillRef>
+          <a:effectRef idx="0">
+            <a:schemeClr val="accent1"/>
+          </a:effectRef>
+          <a:fontRef idx="minor">
+            <a:schemeClr val="lt1"/>
+          </a:fontRef>
+        </p:style>
+        <p:txBody>
+          <a:bodyPr rtlCol="0" anchor="ctr"/>
+          <a:lstStyle/>
+          <a:p>
+            <a:pPr lvl="0" algn="ctr"/>
+            <a:endParaRPr lang="zh-CN" altLang="en-US"/>
+          </a:p>
+        </p:txBody>
+      </p:sp>
+      <p:pic>
+        <p:nvPicPr>
+          <p:cNvPr id="6" name="图片 5">
+            <a:extLst>
+              <a:ext uri="{FF2B5EF4-FFF2-40B4-BE49-F238E27FC236}">
+                <a16:creationId xmlns:a16="http://schemas.microsoft.com/office/drawing/2014/main" id="{09EB08C6-1FC1-77E5-9547-1F786ECAFDC9}"/>
+              </a:ext>
+            </a:extLst>
+          </p:cNvPr>
+          <p:cNvPicPr>
+            <a:picLocks noChangeAspect="1"/>
+          </p:cNvPicPr>
+          <p:nvPr userDrawn="1"/>
+        </p:nvPicPr>
+        <p:blipFill>
+          <a:blip r:embed="rId2" cstate="print">
+            <a:extLst>
+              <a:ext uri="{BEBA8EAE-BF5A-486C-A8C5-ECC9F3942E4B}">
+                <a14:imgProps xmlns:a14="http://schemas.microsoft.com/office/drawing/2010/main">
+                  <a14:imgLayer r:embed="rId3">
+                    <a14:imgEffect>
+                      <a14:backgroundRemoval t="3090" b="89888" l="2563" r="97313">
+                        <a14:foregroundMark x1="7187" y1="50562" x2="61563" y2="38764"/>
+                        <a14:foregroundMark x1="61563" y1="38764" x2="63438" y2="41292"/>
+                        <a14:foregroundMark x1="29875" y1="86798" x2="41313" y2="84551"/>
+                        <a14:foregroundMark x1="41313" y1="84551" x2="57375" y2="89607"/>
+                        <a14:foregroundMark x1="57375" y1="89607" x2="63438" y2="85112"/>
+                        <a14:foregroundMark x1="63438" y1="85112" x2="64063" y2="85112"/>
+                        <a14:foregroundMark x1="22250" y1="25843" x2="23375" y2="34831"/>
+                        <a14:foregroundMark x1="22375" y1="26124" x2="26438" y2="23876"/>
+                        <a14:foregroundMark x1="26438" y1="23876" x2="28688" y2="24438"/>
+                        <a14:foregroundMark x1="22313" y1="23315" x2="28750" y2="25562"/>
+                        <a14:foregroundMark x1="68313" y1="24157" x2="68313" y2="24157"/>
+                        <a14:foregroundMark x1="68375" y1="70506" x2="68375" y2="70506"/>
+                        <a14:foregroundMark x1="68063" y1="61236" x2="68063" y2="61236"/>
+                        <a14:foregroundMark x1="83438" y1="31180" x2="87688" y2="19382"/>
+                        <a14:foregroundMark x1="87688" y1="19382" x2="91813" y2="23315"/>
+                        <a14:foregroundMark x1="91813" y1="23315" x2="95063" y2="37079"/>
+                        <a14:foregroundMark x1="95063" y1="37079" x2="95188" y2="56461"/>
+                        <a14:foregroundMark x1="95188" y1="56461" x2="91188" y2="72753"/>
+                        <a14:foregroundMark x1="91188" y1="72753" x2="86438" y2="75562"/>
+                        <a14:foregroundMark x1="86438" y1="75562" x2="82438" y2="60393"/>
+                        <a14:foregroundMark x1="82438" y1="60393" x2="82125" y2="40449"/>
+                        <a14:foregroundMark x1="82125" y1="40449" x2="83813" y2="29213"/>
+                        <a14:foregroundMark x1="85688" y1="46910" x2="91313" y2="42416"/>
+                        <a14:foregroundMark x1="84500" y1="41854" x2="89125" y2="45506"/>
+                        <a14:foregroundMark x1="89125" y1="45506" x2="89313" y2="66573"/>
+                        <a14:foregroundMark x1="89313" y1="66573" x2="85375" y2="56742"/>
+                        <a14:foregroundMark x1="85375" y1="56742" x2="86188" y2="33427"/>
+                        <a14:foregroundMark x1="86188" y1="33427" x2="89625" y2="23315"/>
+                        <a14:foregroundMark x1="89625" y1="23315" x2="93063" y2="58146"/>
+                        <a14:foregroundMark x1="93063" y1="58146" x2="92625" y2="60955"/>
+                        <a14:foregroundMark x1="83250" y1="28933" x2="87125" y2="18539"/>
+                        <a14:foregroundMark x1="87125" y1="18539" x2="92063" y2="21629"/>
+                        <a14:foregroundMark x1="92063" y1="21629" x2="95063" y2="33989"/>
+                        <a14:foregroundMark x1="95063" y1="33989" x2="95875" y2="52247"/>
+                        <a14:foregroundMark x1="95875" y1="52247" x2="92688" y2="71910"/>
+                        <a14:foregroundMark x1="92688" y1="71910" x2="89188" y2="80337"/>
+                        <a14:foregroundMark x1="89188" y1="80337" x2="84125" y2="70787"/>
+                        <a14:foregroundMark x1="84125" y1="70787" x2="81313" y2="53371"/>
+                        <a14:foregroundMark x1="81313" y1="53371" x2="81875" y2="39607"/>
+                        <a14:foregroundMark x1="60250" y1="39888" x2="58125" y2="37079"/>
+                        <a14:foregroundMark x1="67625" y1="32022" x2="69313" y2="53090"/>
+                        <a14:foregroundMark x1="69313" y1="53090" x2="75000" y2="35674"/>
+                        <a14:foregroundMark x1="75000" y1="35674" x2="68813" y2="40449"/>
+                        <a14:foregroundMark x1="68813" y1="40449" x2="69000" y2="21629"/>
+                        <a14:foregroundMark x1="69000" y1="21629" x2="74250" y2="16292"/>
+                        <a14:foregroundMark x1="74250" y1="16292" x2="78563" y2="24719"/>
+                        <a14:foregroundMark x1="78563" y1="24719" x2="80063" y2="46348"/>
+                        <a14:foregroundMark x1="80063" y1="46348" x2="75813" y2="71067"/>
+                        <a14:foregroundMark x1="75813" y1="71067" x2="70438" y2="74719"/>
+                        <a14:foregroundMark x1="70438" y1="74719" x2="77063" y2="69944"/>
+                        <a14:foregroundMark x1="77063" y1="69944" x2="72313" y2="77528"/>
+                        <a14:foregroundMark x1="72313" y1="77528" x2="67500" y2="53090"/>
+                        <a14:foregroundMark x1="67500" y1="53090" x2="68063" y2="72753"/>
+                        <a14:foregroundMark x1="68063" y1="72753" x2="69000" y2="77528"/>
+                        <a14:foregroundMark x1="70688" y1="76685" x2="72438" y2="80056"/>
+                        <a14:foregroundMark x1="73750" y1="78371" x2="75688" y2="78652"/>
+                        <a14:foregroundMark x1="70813" y1="78090" x2="72063" y2="73876"/>
+                        <a14:foregroundMark x1="5407" y1="21913" x2="10063" y2="20506"/>
+                        <a14:foregroundMark x1="10063" y1="20506" x2="33938" y2="20506"/>
+                        <a14:foregroundMark x1="33938" y1="20506" x2="53813" y2="11798"/>
+                        <a14:foregroundMark x1="53813" y1="11798" x2="64813" y2="15449"/>
+                        <a14:foregroundMark x1="64813" y1="15449" x2="67750" y2="43539"/>
+                        <a14:foregroundMark x1="67750" y1="43539" x2="67750" y2="73876"/>
+                        <a14:foregroundMark x1="67750" y1="73876" x2="59750" y2="97753"/>
+                        <a14:foregroundMark x1="59750" y1="97753" x2="40250" y2="95506"/>
+                        <a14:foregroundMark x1="40250" y1="95506" x2="9375" y2="72753"/>
+                        <a14:foregroundMark x1="9375" y1="72753" x2="5309" y2="63916"/>
+                        <a14:foregroundMark x1="10125" y1="10955" x2="11750" y2="27528"/>
+                        <a14:foregroundMark x1="11750" y1="27528" x2="9125" y2="14045"/>
+                        <a14:foregroundMark x1="9125" y1="14045" x2="13188" y2="16011"/>
+                        <a14:foregroundMark x1="86698" y1="5849" x2="92049" y2="12903"/>
+                        <a14:foregroundMark x1="97370" y1="25565" x2="99688" y2="49719"/>
+                        <a14:foregroundMark x1="99688" y1="49719" x2="98188" y2="69101"/>
+                        <a14:foregroundMark x1="98188" y1="69101" x2="93563" y2="85112"/>
+                        <a14:foregroundMark x1="93563" y1="85112" x2="55688" y2="99719"/>
+                        <a14:foregroundMark x1="55688" y1="99719" x2="7164" y2="90806"/>
+                        <a14:foregroundMark x1="5404" y1="20395" x2="5750" y2="17978"/>
+                        <a14:foregroundMark x1="5750" y1="17978" x2="44938" y2="2528"/>
+                        <a14:foregroundMark x1="44938" y1="2528" x2="90875" y2="24438"/>
+                        <a14:foregroundMark x1="90875" y1="24438" x2="80938" y2="14607"/>
+                        <a14:foregroundMark x1="80938" y1="14607" x2="81099" y2="13463"/>
+                        <a14:foregroundMark x1="68750" y1="12360" x2="78063" y2="17135"/>
+                        <a14:foregroundMark x1="78063" y1="17135" x2="87938" y2="14607"/>
+                        <a14:foregroundMark x1="87938" y1="14607" x2="93500" y2="20506"/>
+                        <a14:foregroundMark x1="93500" y1="20506" x2="97500" y2="30618"/>
+                        <a14:foregroundMark x1="97500" y1="30618" x2="97313" y2="59831"/>
+                        <a14:foregroundMark x1="97313" y1="59831" x2="89563" y2="72753"/>
+                        <a14:foregroundMark x1="89563" y1="72753" x2="79813" y2="68258"/>
+                        <a14:foregroundMark x1="79813" y1="68258" x2="69438" y2="31180"/>
+                        <a14:foregroundMark x1="69438" y1="31180" x2="68688" y2="12921"/>
+                        <a14:foregroundMark x1="68688" y1="12921" x2="68688" y2="12640"/>
+                        <a14:foregroundMark x1="5938" y1="33708" x2="6750" y2="79213"/>
+                        <a14:backgroundMark x1="95264" y1="19646" x2="99063" y2="22472"/>
+                        <a14:backgroundMark x1="72250" y1="2528" x2="84419" y2="11579"/>
+                        <a14:backgroundMark x1="99063" y1="22472" x2="99563" y2="1685"/>
+                        <a14:backgroundMark x1="99563" y1="1685" x2="71625" y2="1966"/>
+                        <a14:backgroundMark x1="563" y1="11236" x2="6375" y2="95506"/>
+                        <a14:backgroundMark x1="3125" y1="64607" x2="4500" y2="85112"/>
+                        <a14:backgroundMark x1="2313" y1="66573" x2="3375" y2="64607"/>
+                        <a14:backgroundMark x1="313" y1="17416" x2="625" y2="98315"/>
+                        <a14:backgroundMark x1="1188" y1="19382" x2="4313" y2="98596"/>
+                        <a14:backgroundMark x1="2750" y1="26685" x2="3125" y2="37079"/>
+                        <a14:backgroundMark x1="1750" y1="19382" x2="4500" y2="38483"/>
+                        <a14:backgroundMark x1="1750" y1="15449" x2="1750" y2="15449"/>
+                        <a14:backgroundMark x1="1750" y1="17135" x2="4313" y2="37640"/>
+                        <a14:backgroundMark x1="1875" y1="21910" x2="3938" y2="26966"/>
+                        <a14:backgroundMark x1="4313" y1="3371" x2="4375" y2="39888"/>
+                      </a14:backgroundRemoval>
+                    </a14:imgEffect>
+                  </a14:imgLayer>
+                </a14:imgProps>
+              </a:ext>
+              <a:ext uri="{28A0092B-C50C-407E-A947-70E740481C1C}">
+                <a14:useLocalDpi xmlns:a14="http://schemas.microsoft.com/office/drawing/2010/main" val="0"/>
+              </a:ext>
+            </a:extLst>
+          </a:blip>
+          <a:stretch>
+            <a:fillRect/>
+          </a:stretch>
+        </p:blipFill>
+        <p:spPr>
           <a:xfrm>
-            <a:off x="311700" y="2150850"/>
-            <a:ext cx="8520600" cy="841800"/>
+            <a:off x="5914739" y="183848"/>
+            <a:ext cx="3223157" cy="717152"/>
           </a:xfrm>
           <a:prstGeom prst="rect">
             <a:avLst/>
           </a:prstGeom>
         </p:spPr>
-        <p:txBody>
-          <a:bodyPr spcFirstLastPara="1" wrap="square" lIns="91425" tIns="91425" rIns="91425" bIns="91425" anchor="ctr" anchorCtr="0">
-            <a:normAutofit/>
-          </a:bodyPr>
-          <a:lstStyle>
-            <a:lvl1pPr lvl="0" algn="ctr">
-              <a:spcBef>
-                <a:spcPts val="0"/>
-              </a:spcBef>
-              <a:spcAft>
-                <a:spcPts val="0"/>
-              </a:spcAft>
-              <a:buSzPts val="3600"/>
-              <a:buNone/>
-              <a:defRPr sz="3600"/>
-            </a:lvl1pPr>
-            <a:lvl2pPr lvl="1" algn="ctr">
-              <a:spcBef>
-                <a:spcPts val="0"/>
-              </a:spcBef>
-              <a:spcAft>
-                <a:spcPts val="0"/>
-              </a:spcAft>
-              <a:buSzPts val="3600"/>
-              <a:buNone/>
-              <a:defRPr sz="3600"/>
-            </a:lvl2pPr>
-            <a:lvl3pPr lvl="2" algn="ctr">
-              <a:spcBef>
-                <a:spcPts val="0"/>
-              </a:spcBef>
-              <a:spcAft>
-                <a:spcPts val="0"/>
-              </a:spcAft>
-              <a:buSzPts val="3600"/>
-              <a:buNone/>
-              <a:defRPr sz="3600"/>
-            </a:lvl3pPr>
-            <a:lvl4pPr lvl="3" algn="ctr">
-              <a:spcBef>
-                <a:spcPts val="0"/>
-              </a:spcBef>
-              <a:spcAft>
-                <a:spcPts val="0"/>
-              </a:spcAft>
-              <a:buSzPts val="3600"/>
-              <a:buNone/>
-              <a:defRPr sz="3600"/>
-            </a:lvl4pPr>
-            <a:lvl5pPr lvl="4" algn="ctr">
-              <a:spcBef>
-                <a:spcPts val="0"/>
-              </a:spcBef>
-              <a:spcAft>
-                <a:spcPts val="0"/>
-              </a:spcAft>
-              <a:buSzPts val="3600"/>
-              <a:buNone/>
-              <a:defRPr sz="3600"/>
-            </a:lvl5pPr>
-            <a:lvl6pPr lvl="5" algn="ctr">
-              <a:spcBef>
-                <a:spcPts val="0"/>
-              </a:spcBef>
-              <a:spcAft>
-                <a:spcPts val="0"/>
-              </a:spcAft>
-              <a:buSzPts val="3600"/>
-              <a:buNone/>
-              <a:defRPr sz="3600"/>
-            </a:lvl6pPr>
-            <a:lvl7pPr lvl="6" algn="ctr">
-              <a:spcBef>
-                <a:spcPts val="0"/>
-              </a:spcBef>
-              <a:spcAft>
-                <a:spcPts val="0"/>
-              </a:spcAft>
-              <a:buSzPts val="3600"/>
-              <a:buNone/>
-              <a:defRPr sz="3600"/>
-            </a:lvl7pPr>
-            <a:lvl8pPr lvl="7" algn="ctr">
-              <a:spcBef>
-                <a:spcPts val="0"/>
-              </a:spcBef>
-              <a:spcAft>
-                <a:spcPts val="0"/>
-              </a:spcAft>
-              <a:buSzPts val="3600"/>
-              <a:buNone/>
-              <a:defRPr sz="3600"/>
-            </a:lvl8pPr>
-            <a:lvl9pPr lvl="8" algn="ctr">
-              <a:spcBef>
-                <a:spcPts val="0"/>
-              </a:spcBef>
-              <a:spcAft>
-                <a:spcPts val="0"/>
-              </a:spcAft>
-              <a:buSzPts val="3600"/>
-              <a:buNone/>
-              <a:defRPr sz="3600"/>
-            </a:lvl9pPr>
-          </a:lstStyle>
-          <a:p>
-            <a:endParaRPr/>
-          </a:p>
-        </p:txBody>
-      </p:sp>
-      <p:sp>
-        <p:nvSpPr>
-          <p:cNvPr id="15" name="Google Shape;15;p3"/>
-          <p:cNvSpPr txBox="1">
-            <a:spLocks noGrp="1"/>
-          </p:cNvSpPr>
-          <p:nvPr>
-            <p:ph type="sldNum" idx="12"/>
-          </p:nvPr>
-        </p:nvSpPr>
-        <p:spPr>
-          <a:xfrm>
-            <a:off x="8472458" y="4663217"/>
-            <a:ext cx="548700" cy="393600"/>
-          </a:xfrm>
-          <a:prstGeom prst="rect">
-            <a:avLst/>
-          </a:prstGeom>
-        </p:spPr>
-        <p:txBody>
-          <a:bodyPr spcFirstLastPara="1" wrap="square" lIns="91425" tIns="91425" rIns="91425" bIns="91425" anchor="ctr" anchorCtr="0">
-            <a:normAutofit/>
-          </a:bodyPr>
-          <a:lstStyle>
-            <a:lvl1pPr lvl="0">
-              <a:buNone/>
-              <a:defRPr/>
-            </a:lvl1pPr>
-            <a:lvl2pPr lvl="1">
-              <a:buNone/>
-              <a:defRPr/>
-            </a:lvl2pPr>
-            <a:lvl3pPr lvl="2">
-              <a:buNone/>
-              <a:defRPr/>
-            </a:lvl3pPr>
-            <a:lvl4pPr lvl="3">
-              <a:buNone/>
-              <a:defRPr/>
-            </a:lvl4pPr>
-            <a:lvl5pPr lvl="4">
-              <a:buNone/>
-              <a:defRPr/>
-            </a:lvl5pPr>
-            <a:lvl6pPr lvl="5">
-              <a:buNone/>
-              <a:defRPr/>
-            </a:lvl6pPr>
-            <a:lvl7pPr lvl="6">
-              <a:buNone/>
-              <a:defRPr/>
-            </a:lvl7pPr>
-            <a:lvl8pPr lvl="7">
-              <a:buNone/>
-              <a:defRPr/>
-            </a:lvl8pPr>
-            <a:lvl9pPr lvl="8">
-              <a:buNone/>
-              <a:defRPr/>
-            </a:lvl9pPr>
-          </a:lstStyle>
-          <a:p>
-            <a:pPr marL="0" lvl="0" indent="0" algn="r" rtl="0">
-              <a:spcBef>
-                <a:spcPts val="0"/>
-              </a:spcBef>
-              <a:spcAft>
-                <a:spcPts val="0"/>
-              </a:spcAft>
-              <a:buNone/>
-            </a:pPr>
-            <a:fld id="{00000000-1234-1234-1234-123412341234}" type="slidenum">
-              <a:rPr lang="en-GB"/>
-              <a:t>‹#›</a:t>
-            </a:fld>
-            <a:endParaRPr lang="en-GB"/>
-          </a:p>
-        </p:txBody>
-      </p:sp>
+      </p:pic>
     </p:spTree>
+    <p:extLst>
+      <p:ext uri="{BB962C8B-B14F-4D97-AF65-F5344CB8AC3E}">
+        <p14:creationId xmlns:p14="http://schemas.microsoft.com/office/powerpoint/2010/main" val="476367146"/>
+      </p:ext>
+    </p:extLst>
   </p:cSld>
   <p:clrMapOvr>
     <a:masterClrMapping/>
@@ -4698,7 +4958,7 @@
 </file>
 
 <file path=ppt/slideLayouts/slideLayout3.xml><?xml version="1.0" encoding="utf-8"?>
-<p:sldLayout xmlns:a="http://schemas.openxmlformats.org/drawingml/2006/main" xmlns:r="http://schemas.openxmlformats.org/officeDocument/2006/relationships" xmlns:p="http://schemas.openxmlformats.org/presentationml/2006/main" matchingName="Title and body" type="tx">
+<p:sldLayout xmlns:a="http://schemas.openxmlformats.org/drawingml/2006/main" xmlns:r="http://schemas.openxmlformats.org/officeDocument/2006/relationships" xmlns:p="http://schemas.openxmlformats.org/presentationml/2006/main" matchingName="Title and body" userDrawn="1">
   <p:cSld name="TITLE_AND_BODY">
     <p:spTree>
       <p:nvGrpSpPr>
@@ -4716,341 +4976,846 @@
       </p:grpSpPr>
       <p:sp>
         <p:nvSpPr>
-          <p:cNvPr id="17" name="Google Shape;17;p4"/>
-          <p:cNvSpPr txBox="1">
+          <p:cNvPr id="2" name="文本占位符 29">
+            <a:extLst>
+              <a:ext uri="{FF2B5EF4-FFF2-40B4-BE49-F238E27FC236}">
+                <a16:creationId xmlns:a16="http://schemas.microsoft.com/office/drawing/2014/main" id="{E4576452-1F74-B98E-0386-FF03A9E75AAA}"/>
+              </a:ext>
+            </a:extLst>
+          </p:cNvPr>
+          <p:cNvSpPr>
             <a:spLocks noGrp="1"/>
           </p:cNvSpPr>
           <p:nvPr>
-            <p:ph type="title"/>
+            <p:ph type="body" sz="quarter" idx="10"/>
           </p:nvPr>
         </p:nvSpPr>
         <p:spPr>
           <a:xfrm>
-            <a:off x="311700" y="445025"/>
-            <a:ext cx="8520600" cy="572700"/>
+            <a:off x="558671" y="378407"/>
+            <a:ext cx="8370918" cy="727947"/>
+          </a:xfrm>
+        </p:spPr>
+        <p:txBody>
+          <a:bodyPr>
+            <a:noAutofit/>
+          </a:bodyPr>
+          <a:lstStyle>
+            <a:lvl1pPr marL="0" indent="0">
+              <a:lnSpc>
+                <a:spcPct val="100000"/>
+              </a:lnSpc>
+              <a:buNone/>
+              <a:defRPr sz="3800" b="1">
+                <a:solidFill>
+                  <a:srgbClr val="008A41"/>
+                </a:solidFill>
+                <a:latin typeface="Times New Roman" panose="02020603050405020304" pitchFamily="18" charset="0"/>
+                <a:ea typeface="黑体" panose="02010609060101010101" pitchFamily="49" charset="-122"/>
+                <a:cs typeface="Times New Roman" panose="02020603050405020304" pitchFamily="18" charset="0"/>
+              </a:defRPr>
+            </a:lvl1pPr>
+            <a:lvl2pPr>
+              <a:defRPr sz="4000">
+                <a:latin typeface="Times New Roman" panose="02020603050405020304" pitchFamily="18" charset="0"/>
+                <a:ea typeface="宋体" panose="02010600030101010101" pitchFamily="2" charset="-122"/>
+                <a:cs typeface="Times New Roman" panose="02020603050405020304" pitchFamily="18" charset="0"/>
+              </a:defRPr>
+            </a:lvl2pPr>
+            <a:lvl3pPr>
+              <a:defRPr sz="4000">
+                <a:latin typeface="Times New Roman" panose="02020603050405020304" pitchFamily="18" charset="0"/>
+                <a:ea typeface="宋体" panose="02010600030101010101" pitchFamily="2" charset="-122"/>
+                <a:cs typeface="Times New Roman" panose="02020603050405020304" pitchFamily="18" charset="0"/>
+              </a:defRPr>
+            </a:lvl3pPr>
+            <a:lvl4pPr>
+              <a:defRPr sz="4000">
+                <a:latin typeface="Times New Roman" panose="02020603050405020304" pitchFamily="18" charset="0"/>
+                <a:ea typeface="宋体" panose="02010600030101010101" pitchFamily="2" charset="-122"/>
+                <a:cs typeface="Times New Roman" panose="02020603050405020304" pitchFamily="18" charset="0"/>
+              </a:defRPr>
+            </a:lvl4pPr>
+            <a:lvl5pPr>
+              <a:defRPr sz="4000">
+                <a:latin typeface="Times New Roman" panose="02020603050405020304" pitchFamily="18" charset="0"/>
+                <a:ea typeface="宋体" panose="02010600030101010101" pitchFamily="2" charset="-122"/>
+                <a:cs typeface="Times New Roman" panose="02020603050405020304" pitchFamily="18" charset="0"/>
+              </a:defRPr>
+            </a:lvl5pPr>
+          </a:lstStyle>
+          <a:p>
+            <a:pPr lvl="0"/>
+            <a:endParaRPr lang="zh-CN" altLang="en-US" dirty="0"/>
+          </a:p>
+        </p:txBody>
+      </p:sp>
+      <p:cxnSp>
+        <p:nvCxnSpPr>
+          <p:cNvPr id="3" name="直接连接符 2">
+            <a:extLst>
+              <a:ext uri="{FF2B5EF4-FFF2-40B4-BE49-F238E27FC236}">
+                <a16:creationId xmlns:a16="http://schemas.microsoft.com/office/drawing/2014/main" id="{F178366B-2CED-346C-42F6-AAB37032C6D3}"/>
+              </a:ext>
+            </a:extLst>
+          </p:cNvPr>
+          <p:cNvCxnSpPr>
+            <a:cxnSpLocks/>
+          </p:cNvCxnSpPr>
+          <p:nvPr userDrawn="1"/>
+        </p:nvCxnSpPr>
+        <p:spPr>
+          <a:xfrm flipV="1">
+            <a:off x="659760" y="1105817"/>
+            <a:ext cx="8269829" cy="1"/>
+          </a:xfrm>
+          <a:prstGeom prst="line">
+            <a:avLst/>
+          </a:prstGeom>
+          <a:ln w="31750">
+            <a:solidFill>
+              <a:srgbClr val="008A41"/>
+            </a:solidFill>
+          </a:ln>
+        </p:spPr>
+        <p:style>
+          <a:lnRef idx="1">
+            <a:schemeClr val="accent1"/>
+          </a:lnRef>
+          <a:fillRef idx="0">
+            <a:schemeClr val="accent1"/>
+          </a:fillRef>
+          <a:effectRef idx="0">
+            <a:schemeClr val="accent1"/>
+          </a:effectRef>
+          <a:fontRef idx="minor">
+            <a:schemeClr val="tx1"/>
+          </a:fontRef>
+        </p:style>
+      </p:cxnSp>
+      <p:sp>
+        <p:nvSpPr>
+          <p:cNvPr id="4" name="矩形 7">
+            <a:extLst>
+              <a:ext uri="{FF2B5EF4-FFF2-40B4-BE49-F238E27FC236}">
+                <a16:creationId xmlns:a16="http://schemas.microsoft.com/office/drawing/2014/main" id="{DA29537D-BF11-214F-AE67-C11326827691}"/>
+              </a:ext>
+            </a:extLst>
+          </p:cNvPr>
+          <p:cNvSpPr/>
+          <p:nvPr userDrawn="1"/>
+        </p:nvSpPr>
+        <p:spPr>
+          <a:xfrm flipH="1">
+            <a:off x="0" y="4778374"/>
+            <a:ext cx="9144000" cy="388032"/>
+          </a:xfrm>
+          <a:custGeom>
+            <a:avLst/>
+            <a:gdLst>
+              <a:gd name="connsiteX0" fmla="*/ 0 w 12192000"/>
+              <a:gd name="connsiteY0" fmla="*/ 0 h 609599"/>
+              <a:gd name="connsiteX1" fmla="*/ 12192000 w 12192000"/>
+              <a:gd name="connsiteY1" fmla="*/ 0 h 609599"/>
+              <a:gd name="connsiteX2" fmla="*/ 12192000 w 12192000"/>
+              <a:gd name="connsiteY2" fmla="*/ 609599 h 609599"/>
+              <a:gd name="connsiteX3" fmla="*/ 0 w 12192000"/>
+              <a:gd name="connsiteY3" fmla="*/ 609599 h 609599"/>
+              <a:gd name="connsiteX4" fmla="*/ 0 w 12192000"/>
+              <a:gd name="connsiteY4" fmla="*/ 0 h 609599"/>
+              <a:gd name="connsiteX0" fmla="*/ 0 w 12192000"/>
+              <a:gd name="connsiteY0" fmla="*/ 548640 h 1158239"/>
+              <a:gd name="connsiteX1" fmla="*/ 12192000 w 12192000"/>
+              <a:gd name="connsiteY1" fmla="*/ 548640 h 1158239"/>
+              <a:gd name="connsiteX2" fmla="*/ 12192000 w 12192000"/>
+              <a:gd name="connsiteY2" fmla="*/ 1158239 h 1158239"/>
+              <a:gd name="connsiteX3" fmla="*/ 0 w 12192000"/>
+              <a:gd name="connsiteY3" fmla="*/ 1158239 h 1158239"/>
+              <a:gd name="connsiteX4" fmla="*/ 0 w 12192000"/>
+              <a:gd name="connsiteY4" fmla="*/ 548640 h 1158239"/>
+              <a:gd name="connsiteX0" fmla="*/ 0 w 12192000"/>
+              <a:gd name="connsiteY0" fmla="*/ 376700 h 986299"/>
+              <a:gd name="connsiteX1" fmla="*/ 12192000 w 12192000"/>
+              <a:gd name="connsiteY1" fmla="*/ 376700 h 986299"/>
+              <a:gd name="connsiteX2" fmla="*/ 12192000 w 12192000"/>
+              <a:gd name="connsiteY2" fmla="*/ 986299 h 986299"/>
+              <a:gd name="connsiteX3" fmla="*/ 0 w 12192000"/>
+              <a:gd name="connsiteY3" fmla="*/ 986299 h 986299"/>
+              <a:gd name="connsiteX4" fmla="*/ 0 w 12192000"/>
+              <a:gd name="connsiteY4" fmla="*/ 376700 h 986299"/>
+              <a:gd name="connsiteX0" fmla="*/ 0 w 12192000"/>
+              <a:gd name="connsiteY0" fmla="*/ 438928 h 1048527"/>
+              <a:gd name="connsiteX1" fmla="*/ 12192000 w 12192000"/>
+              <a:gd name="connsiteY1" fmla="*/ 438928 h 1048527"/>
+              <a:gd name="connsiteX2" fmla="*/ 12192000 w 12192000"/>
+              <a:gd name="connsiteY2" fmla="*/ 1048527 h 1048527"/>
+              <a:gd name="connsiteX3" fmla="*/ 0 w 12192000"/>
+              <a:gd name="connsiteY3" fmla="*/ 1048527 h 1048527"/>
+              <a:gd name="connsiteX4" fmla="*/ 0 w 12192000"/>
+              <a:gd name="connsiteY4" fmla="*/ 438928 h 1048527"/>
+              <a:gd name="connsiteX0" fmla="*/ 0 w 12192000"/>
+              <a:gd name="connsiteY0" fmla="*/ 181799 h 791398"/>
+              <a:gd name="connsiteX1" fmla="*/ 12192000 w 12192000"/>
+              <a:gd name="connsiteY1" fmla="*/ 181799 h 791398"/>
+              <a:gd name="connsiteX2" fmla="*/ 12192000 w 12192000"/>
+              <a:gd name="connsiteY2" fmla="*/ 791398 h 791398"/>
+              <a:gd name="connsiteX3" fmla="*/ 0 w 12192000"/>
+              <a:gd name="connsiteY3" fmla="*/ 791398 h 791398"/>
+              <a:gd name="connsiteX4" fmla="*/ 0 w 12192000"/>
+              <a:gd name="connsiteY4" fmla="*/ 181799 h 791398"/>
+              <a:gd name="connsiteX0" fmla="*/ 0 w 12192000"/>
+              <a:gd name="connsiteY0" fmla="*/ 187345 h 796944"/>
+              <a:gd name="connsiteX1" fmla="*/ 12192000 w 12192000"/>
+              <a:gd name="connsiteY1" fmla="*/ 187345 h 796944"/>
+              <a:gd name="connsiteX2" fmla="*/ 12192000 w 12192000"/>
+              <a:gd name="connsiteY2" fmla="*/ 796944 h 796944"/>
+              <a:gd name="connsiteX3" fmla="*/ 0 w 12192000"/>
+              <a:gd name="connsiteY3" fmla="*/ 796944 h 796944"/>
+              <a:gd name="connsiteX4" fmla="*/ 0 w 12192000"/>
+              <a:gd name="connsiteY4" fmla="*/ 187345 h 796944"/>
+              <a:gd name="connsiteX0" fmla="*/ 0 w 12192000"/>
+              <a:gd name="connsiteY0" fmla="*/ 154569 h 764168"/>
+              <a:gd name="connsiteX1" fmla="*/ 12192000 w 12192000"/>
+              <a:gd name="connsiteY1" fmla="*/ 154569 h 764168"/>
+              <a:gd name="connsiteX2" fmla="*/ 12192000 w 12192000"/>
+              <a:gd name="connsiteY2" fmla="*/ 764168 h 764168"/>
+              <a:gd name="connsiteX3" fmla="*/ 0 w 12192000"/>
+              <a:gd name="connsiteY3" fmla="*/ 764168 h 764168"/>
+              <a:gd name="connsiteX4" fmla="*/ 0 w 12192000"/>
+              <a:gd name="connsiteY4" fmla="*/ 154569 h 764168"/>
+              <a:gd name="connsiteX0" fmla="*/ 0 w 12192000"/>
+              <a:gd name="connsiteY0" fmla="*/ 165354 h 774953"/>
+              <a:gd name="connsiteX1" fmla="*/ 12192000 w 12192000"/>
+              <a:gd name="connsiteY1" fmla="*/ 165354 h 774953"/>
+              <a:gd name="connsiteX2" fmla="*/ 12192000 w 12192000"/>
+              <a:gd name="connsiteY2" fmla="*/ 774953 h 774953"/>
+              <a:gd name="connsiteX3" fmla="*/ 0 w 12192000"/>
+              <a:gd name="connsiteY3" fmla="*/ 774953 h 774953"/>
+              <a:gd name="connsiteX4" fmla="*/ 0 w 12192000"/>
+              <a:gd name="connsiteY4" fmla="*/ 165354 h 774953"/>
+              <a:gd name="connsiteX0" fmla="*/ 0 w 12192000"/>
+              <a:gd name="connsiteY0" fmla="*/ 181798 h 791397"/>
+              <a:gd name="connsiteX1" fmla="*/ 12192000 w 12192000"/>
+              <a:gd name="connsiteY1" fmla="*/ 181798 h 791397"/>
+              <a:gd name="connsiteX2" fmla="*/ 12192000 w 12192000"/>
+              <a:gd name="connsiteY2" fmla="*/ 791397 h 791397"/>
+              <a:gd name="connsiteX3" fmla="*/ 0 w 12192000"/>
+              <a:gd name="connsiteY3" fmla="*/ 791397 h 791397"/>
+              <a:gd name="connsiteX4" fmla="*/ 0 w 12192000"/>
+              <a:gd name="connsiteY4" fmla="*/ 181798 h 791397"/>
+              <a:gd name="connsiteX0" fmla="*/ 0 w 12192000"/>
+              <a:gd name="connsiteY0" fmla="*/ 88858 h 698457"/>
+              <a:gd name="connsiteX1" fmla="*/ 12192000 w 12192000"/>
+              <a:gd name="connsiteY1" fmla="*/ 88858 h 698457"/>
+              <a:gd name="connsiteX2" fmla="*/ 12192000 w 12192000"/>
+              <a:gd name="connsiteY2" fmla="*/ 698457 h 698457"/>
+              <a:gd name="connsiteX3" fmla="*/ 0 w 12192000"/>
+              <a:gd name="connsiteY3" fmla="*/ 698457 h 698457"/>
+              <a:gd name="connsiteX4" fmla="*/ 0 w 12192000"/>
+              <a:gd name="connsiteY4" fmla="*/ 88858 h 698457"/>
+              <a:gd name="connsiteX0" fmla="*/ 10160 w 12192000"/>
+              <a:gd name="connsiteY0" fmla="*/ 93903 h 612062"/>
+              <a:gd name="connsiteX1" fmla="*/ 12192000 w 12192000"/>
+              <a:gd name="connsiteY1" fmla="*/ 2463 h 612062"/>
+              <a:gd name="connsiteX2" fmla="*/ 12192000 w 12192000"/>
+              <a:gd name="connsiteY2" fmla="*/ 612062 h 612062"/>
+              <a:gd name="connsiteX3" fmla="*/ 0 w 12192000"/>
+              <a:gd name="connsiteY3" fmla="*/ 612062 h 612062"/>
+              <a:gd name="connsiteX4" fmla="*/ 10160 w 12192000"/>
+              <a:gd name="connsiteY4" fmla="*/ 93903 h 612062"/>
+              <a:gd name="connsiteX0" fmla="*/ 0 w 12181840"/>
+              <a:gd name="connsiteY0" fmla="*/ 93903 h 612062"/>
+              <a:gd name="connsiteX1" fmla="*/ 12181840 w 12181840"/>
+              <a:gd name="connsiteY1" fmla="*/ 2463 h 612062"/>
+              <a:gd name="connsiteX2" fmla="*/ 12181840 w 12181840"/>
+              <a:gd name="connsiteY2" fmla="*/ 612062 h 612062"/>
+              <a:gd name="connsiteX3" fmla="*/ 12700 w 12181840"/>
+              <a:gd name="connsiteY3" fmla="*/ 612062 h 612062"/>
+              <a:gd name="connsiteX4" fmla="*/ 0 w 12181840"/>
+              <a:gd name="connsiteY4" fmla="*/ 93903 h 612062"/>
+              <a:gd name="connsiteX0" fmla="*/ 0 w 12181840"/>
+              <a:gd name="connsiteY0" fmla="*/ 93459 h 619238"/>
+              <a:gd name="connsiteX1" fmla="*/ 12181840 w 12181840"/>
+              <a:gd name="connsiteY1" fmla="*/ 9639 h 619238"/>
+              <a:gd name="connsiteX2" fmla="*/ 12181840 w 12181840"/>
+              <a:gd name="connsiteY2" fmla="*/ 619238 h 619238"/>
+              <a:gd name="connsiteX3" fmla="*/ 12700 w 12181840"/>
+              <a:gd name="connsiteY3" fmla="*/ 619238 h 619238"/>
+              <a:gd name="connsiteX4" fmla="*/ 0 w 12181840"/>
+              <a:gd name="connsiteY4" fmla="*/ 93459 h 619238"/>
+              <a:gd name="connsiteX0" fmla="*/ 0 w 12181840"/>
+              <a:gd name="connsiteY0" fmla="*/ 93459 h 619238"/>
+              <a:gd name="connsiteX1" fmla="*/ 12181840 w 12181840"/>
+              <a:gd name="connsiteY1" fmla="*/ 9639 h 619238"/>
+              <a:gd name="connsiteX2" fmla="*/ 12181840 w 12181840"/>
+              <a:gd name="connsiteY2" fmla="*/ 619238 h 619238"/>
+              <a:gd name="connsiteX3" fmla="*/ 12700 w 12181840"/>
+              <a:gd name="connsiteY3" fmla="*/ 619238 h 619238"/>
+              <a:gd name="connsiteX4" fmla="*/ 0 w 12181840"/>
+              <a:gd name="connsiteY4" fmla="*/ 93459 h 619238"/>
+              <a:gd name="connsiteX0" fmla="*/ 0 w 12197080"/>
+              <a:gd name="connsiteY0" fmla="*/ 93459 h 619238"/>
+              <a:gd name="connsiteX1" fmla="*/ 12197080 w 12197080"/>
+              <a:gd name="connsiteY1" fmla="*/ 9639 h 619238"/>
+              <a:gd name="connsiteX2" fmla="*/ 12197080 w 12197080"/>
+              <a:gd name="connsiteY2" fmla="*/ 619238 h 619238"/>
+              <a:gd name="connsiteX3" fmla="*/ 27940 w 12197080"/>
+              <a:gd name="connsiteY3" fmla="*/ 619238 h 619238"/>
+              <a:gd name="connsiteX4" fmla="*/ 0 w 12197080"/>
+              <a:gd name="connsiteY4" fmla="*/ 93459 h 619238"/>
+              <a:gd name="connsiteX0" fmla="*/ 2540 w 12199620"/>
+              <a:gd name="connsiteY0" fmla="*/ 93459 h 619238"/>
+              <a:gd name="connsiteX1" fmla="*/ 12199620 w 12199620"/>
+              <a:gd name="connsiteY1" fmla="*/ 9639 h 619238"/>
+              <a:gd name="connsiteX2" fmla="*/ 12199620 w 12199620"/>
+              <a:gd name="connsiteY2" fmla="*/ 619238 h 619238"/>
+              <a:gd name="connsiteX3" fmla="*/ 0 w 12199620"/>
+              <a:gd name="connsiteY3" fmla="*/ 611618 h 619238"/>
+              <a:gd name="connsiteX4" fmla="*/ 2540 w 12199620"/>
+              <a:gd name="connsiteY4" fmla="*/ 93459 h 619238"/>
+              <a:gd name="connsiteX0" fmla="*/ 153 w 12201043"/>
+              <a:gd name="connsiteY0" fmla="*/ 152400 h 609599"/>
+              <a:gd name="connsiteX1" fmla="*/ 12201043 w 12201043"/>
+              <a:gd name="connsiteY1" fmla="*/ 0 h 609599"/>
+              <a:gd name="connsiteX2" fmla="*/ 12201043 w 12201043"/>
+              <a:gd name="connsiteY2" fmla="*/ 609599 h 609599"/>
+              <a:gd name="connsiteX3" fmla="*/ 1423 w 12201043"/>
+              <a:gd name="connsiteY3" fmla="*/ 601979 h 609599"/>
+              <a:gd name="connsiteX4" fmla="*/ 153 w 12201043"/>
+              <a:gd name="connsiteY4" fmla="*/ 152400 h 609599"/>
+              <a:gd name="connsiteX0" fmla="*/ 153 w 12201043"/>
+              <a:gd name="connsiteY0" fmla="*/ 184785 h 609599"/>
+              <a:gd name="connsiteX1" fmla="*/ 12201043 w 12201043"/>
+              <a:gd name="connsiteY1" fmla="*/ 0 h 609599"/>
+              <a:gd name="connsiteX2" fmla="*/ 12201043 w 12201043"/>
+              <a:gd name="connsiteY2" fmla="*/ 609599 h 609599"/>
+              <a:gd name="connsiteX3" fmla="*/ 1423 w 12201043"/>
+              <a:gd name="connsiteY3" fmla="*/ 601979 h 609599"/>
+              <a:gd name="connsiteX4" fmla="*/ 153 w 12201043"/>
+              <a:gd name="connsiteY4" fmla="*/ 184785 h 609599"/>
+            </a:gdLst>
+            <a:ahLst/>
+            <a:cxnLst>
+              <a:cxn ang="0">
+                <a:pos x="connsiteX0" y="connsiteY0"/>
+              </a:cxn>
+              <a:cxn ang="0">
+                <a:pos x="connsiteX1" y="connsiteY1"/>
+              </a:cxn>
+              <a:cxn ang="0">
+                <a:pos x="connsiteX2" y="connsiteY2"/>
+              </a:cxn>
+              <a:cxn ang="0">
+                <a:pos x="connsiteX3" y="connsiteY3"/>
+              </a:cxn>
+              <a:cxn ang="0">
+                <a:pos x="connsiteX4" y="connsiteY4"/>
+              </a:cxn>
+            </a:cxnLst>
+            <a:rect l="l" t="t" r="r" b="b"/>
+            <a:pathLst>
+              <a:path w="12201043" h="609599">
+                <a:moveTo>
+                  <a:pt x="153" y="184785"/>
+                </a:moveTo>
+                <a:cubicBezTo>
+                  <a:pt x="6075833" y="-272415"/>
+                  <a:pt x="8457083" y="1051560"/>
+                  <a:pt x="12201043" y="0"/>
+                </a:cubicBezTo>
+                <a:lnTo>
+                  <a:pt x="12201043" y="609599"/>
+                </a:lnTo>
+                <a:lnTo>
+                  <a:pt x="1423" y="601979"/>
+                </a:lnTo>
+                <a:cubicBezTo>
+                  <a:pt x="2270" y="429259"/>
+                  <a:pt x="-694" y="357505"/>
+                  <a:pt x="153" y="184785"/>
+                </a:cubicBezTo>
+                <a:close/>
+              </a:path>
+            </a:pathLst>
+          </a:custGeom>
+          <a:gradFill flip="none" rotWithShape="1">
+            <a:gsLst>
+              <a:gs pos="60000">
+                <a:srgbClr val="008A41">
+                  <a:alpha val="49804"/>
+                </a:srgbClr>
+              </a:gs>
+              <a:gs pos="0">
+                <a:srgbClr val="008A41">
+                  <a:alpha val="70000"/>
+                </a:srgbClr>
+              </a:gs>
+              <a:gs pos="100000">
+                <a:srgbClr val="A0D2B4"/>
+              </a:gs>
+            </a:gsLst>
+            <a:lin ang="0" scaled="1"/>
+            <a:tileRect/>
+          </a:gradFill>
+          <a:ln>
+            <a:noFill/>
+          </a:ln>
+        </p:spPr>
+        <p:style>
+          <a:lnRef idx="2">
+            <a:schemeClr val="accent1">
+              <a:shade val="50000"/>
+            </a:schemeClr>
+          </a:lnRef>
+          <a:fillRef idx="1">
+            <a:schemeClr val="accent1"/>
+          </a:fillRef>
+          <a:effectRef idx="0">
+            <a:schemeClr val="accent1"/>
+          </a:effectRef>
+          <a:fontRef idx="minor">
+            <a:schemeClr val="lt1"/>
+          </a:fontRef>
+        </p:style>
+        <p:txBody>
+          <a:bodyPr rtlCol="0" anchor="ctr"/>
+          <a:lstStyle/>
+          <a:p>
+            <a:pPr algn="ctr"/>
+            <a:endParaRPr lang="zh-CN" altLang="en-US"/>
+          </a:p>
+        </p:txBody>
+      </p:sp>
+      <p:sp>
+        <p:nvSpPr>
+          <p:cNvPr id="5" name="任意多边形: 形状 4">
+            <a:extLst>
+              <a:ext uri="{FF2B5EF4-FFF2-40B4-BE49-F238E27FC236}">
+                <a16:creationId xmlns:a16="http://schemas.microsoft.com/office/drawing/2014/main" id="{9C8A5216-0B6C-8CC4-B0D2-01C3F914EE11}"/>
+              </a:ext>
+            </a:extLst>
+          </p:cNvPr>
+          <p:cNvSpPr/>
+          <p:nvPr userDrawn="1"/>
+        </p:nvSpPr>
+        <p:spPr>
+          <a:xfrm flipH="1" flipV="1">
+            <a:off x="-6103" y="-10167"/>
+            <a:ext cx="9143999" cy="388031"/>
+          </a:xfrm>
+          <a:custGeom>
+            <a:avLst/>
+            <a:gdLst>
+              <a:gd name="connsiteX0" fmla="*/ 12192000 w 12192000"/>
+              <a:gd name="connsiteY0" fmla="*/ 0 h 2039768"/>
+              <a:gd name="connsiteX1" fmla="*/ 12192000 w 12192000"/>
+              <a:gd name="connsiteY1" fmla="*/ 2039768 h 2039768"/>
+              <a:gd name="connsiteX2" fmla="*/ 0 w 12192000"/>
+              <a:gd name="connsiteY2" fmla="*/ 2039768 h 2039768"/>
+              <a:gd name="connsiteX3" fmla="*/ 0 w 12192000"/>
+              <a:gd name="connsiteY3" fmla="*/ 819391 h 2039768"/>
+              <a:gd name="connsiteX4" fmla="*/ 37309 w 12192000"/>
+              <a:gd name="connsiteY4" fmla="*/ 834936 h 2039768"/>
+              <a:gd name="connsiteX5" fmla="*/ 5319640 w 12192000"/>
+              <a:gd name="connsiteY5" fmla="*/ 1747868 h 2039768"/>
+              <a:gd name="connsiteX6" fmla="*/ 11971651 w 12192000"/>
+              <a:gd name="connsiteY6" fmla="*/ 149892 h 2039768"/>
+              <a:gd name="connsiteX0" fmla="*/ 12192000 w 12192000"/>
+              <a:gd name="connsiteY0" fmla="*/ 373966 h 1893600"/>
+              <a:gd name="connsiteX1" fmla="*/ 12192000 w 12192000"/>
+              <a:gd name="connsiteY1" fmla="*/ 1893600 h 1893600"/>
+              <a:gd name="connsiteX2" fmla="*/ 0 w 12192000"/>
+              <a:gd name="connsiteY2" fmla="*/ 1893600 h 1893600"/>
+              <a:gd name="connsiteX3" fmla="*/ 0 w 12192000"/>
+              <a:gd name="connsiteY3" fmla="*/ 673223 h 1893600"/>
+              <a:gd name="connsiteX4" fmla="*/ 37309 w 12192000"/>
+              <a:gd name="connsiteY4" fmla="*/ 688768 h 1893600"/>
+              <a:gd name="connsiteX5" fmla="*/ 5319640 w 12192000"/>
+              <a:gd name="connsiteY5" fmla="*/ 1601700 h 1893600"/>
+              <a:gd name="connsiteX6" fmla="*/ 11971651 w 12192000"/>
+              <a:gd name="connsiteY6" fmla="*/ 3724 h 1893600"/>
+              <a:gd name="connsiteX7" fmla="*/ 12192000 w 12192000"/>
+              <a:gd name="connsiteY7" fmla="*/ 373966 h 1893600"/>
+              <a:gd name="connsiteX0" fmla="*/ 12192000 w 12192000"/>
+              <a:gd name="connsiteY0" fmla="*/ 1413 h 1521047"/>
+              <a:gd name="connsiteX1" fmla="*/ 12192000 w 12192000"/>
+              <a:gd name="connsiteY1" fmla="*/ 1521047 h 1521047"/>
+              <a:gd name="connsiteX2" fmla="*/ 0 w 12192000"/>
+              <a:gd name="connsiteY2" fmla="*/ 1521047 h 1521047"/>
+              <a:gd name="connsiteX3" fmla="*/ 0 w 12192000"/>
+              <a:gd name="connsiteY3" fmla="*/ 300670 h 1521047"/>
+              <a:gd name="connsiteX4" fmla="*/ 37309 w 12192000"/>
+              <a:gd name="connsiteY4" fmla="*/ 316215 h 1521047"/>
+              <a:gd name="connsiteX5" fmla="*/ 5319640 w 12192000"/>
+              <a:gd name="connsiteY5" fmla="*/ 1229147 h 1521047"/>
+              <a:gd name="connsiteX6" fmla="*/ 12192000 w 12192000"/>
+              <a:gd name="connsiteY6" fmla="*/ 1413 h 1521047"/>
+              <a:gd name="connsiteX0" fmla="*/ 12192000 w 12192000"/>
+              <a:gd name="connsiteY0" fmla="*/ 0 h 1519634"/>
+              <a:gd name="connsiteX1" fmla="*/ 12192000 w 12192000"/>
+              <a:gd name="connsiteY1" fmla="*/ 1519634 h 1519634"/>
+              <a:gd name="connsiteX2" fmla="*/ 0 w 12192000"/>
+              <a:gd name="connsiteY2" fmla="*/ 1519634 h 1519634"/>
+              <a:gd name="connsiteX3" fmla="*/ 0 w 12192000"/>
+              <a:gd name="connsiteY3" fmla="*/ 299257 h 1519634"/>
+              <a:gd name="connsiteX4" fmla="*/ 37309 w 12192000"/>
+              <a:gd name="connsiteY4" fmla="*/ 314802 h 1519634"/>
+              <a:gd name="connsiteX5" fmla="*/ 5319640 w 12192000"/>
+              <a:gd name="connsiteY5" fmla="*/ 1227734 h 1519634"/>
+              <a:gd name="connsiteX6" fmla="*/ 12192000 w 12192000"/>
+              <a:gd name="connsiteY6" fmla="*/ 0 h 1519634"/>
+              <a:gd name="connsiteX0" fmla="*/ 12192000 w 12192000"/>
+              <a:gd name="connsiteY0" fmla="*/ 0 h 1519634"/>
+              <a:gd name="connsiteX1" fmla="*/ 12192000 w 12192000"/>
+              <a:gd name="connsiteY1" fmla="*/ 1519634 h 1519634"/>
+              <a:gd name="connsiteX2" fmla="*/ 0 w 12192000"/>
+              <a:gd name="connsiteY2" fmla="*/ 1519634 h 1519634"/>
+              <a:gd name="connsiteX3" fmla="*/ 0 w 12192000"/>
+              <a:gd name="connsiteY3" fmla="*/ 299257 h 1519634"/>
+              <a:gd name="connsiteX4" fmla="*/ 140179 w 12192000"/>
+              <a:gd name="connsiteY4" fmla="*/ 401490 h 1519634"/>
+              <a:gd name="connsiteX5" fmla="*/ 5319640 w 12192000"/>
+              <a:gd name="connsiteY5" fmla="*/ 1227734 h 1519634"/>
+              <a:gd name="connsiteX6" fmla="*/ 12192000 w 12192000"/>
+              <a:gd name="connsiteY6" fmla="*/ 0 h 1519634"/>
+              <a:gd name="connsiteX0" fmla="*/ 12192000 w 12192000"/>
+              <a:gd name="connsiteY0" fmla="*/ 0 h 1519634"/>
+              <a:gd name="connsiteX1" fmla="*/ 12192000 w 12192000"/>
+              <a:gd name="connsiteY1" fmla="*/ 1519634 h 1519634"/>
+              <a:gd name="connsiteX2" fmla="*/ 0 w 12192000"/>
+              <a:gd name="connsiteY2" fmla="*/ 1519634 h 1519634"/>
+              <a:gd name="connsiteX3" fmla="*/ 0 w 12192000"/>
+              <a:gd name="connsiteY3" fmla="*/ 299257 h 1519634"/>
+              <a:gd name="connsiteX4" fmla="*/ 5319640 w 12192000"/>
+              <a:gd name="connsiteY4" fmla="*/ 1227734 h 1519634"/>
+              <a:gd name="connsiteX5" fmla="*/ 12192000 w 12192000"/>
+              <a:gd name="connsiteY5" fmla="*/ 0 h 1519634"/>
+              <a:gd name="connsiteX0" fmla="*/ 12192000 w 12192000"/>
+              <a:gd name="connsiteY0" fmla="*/ 0 h 1519634"/>
+              <a:gd name="connsiteX1" fmla="*/ 12192000 w 12192000"/>
+              <a:gd name="connsiteY1" fmla="*/ 1519634 h 1519634"/>
+              <a:gd name="connsiteX2" fmla="*/ 0 w 12192000"/>
+              <a:gd name="connsiteY2" fmla="*/ 1519634 h 1519634"/>
+              <a:gd name="connsiteX3" fmla="*/ 3810 w 12192000"/>
+              <a:gd name="connsiteY3" fmla="*/ 628674 h 1519634"/>
+              <a:gd name="connsiteX4" fmla="*/ 5319640 w 12192000"/>
+              <a:gd name="connsiteY4" fmla="*/ 1227734 h 1519634"/>
+              <a:gd name="connsiteX5" fmla="*/ 12192000 w 12192000"/>
+              <a:gd name="connsiteY5" fmla="*/ 0 h 1519634"/>
+              <a:gd name="connsiteX0" fmla="*/ 12192000 w 12192000"/>
+              <a:gd name="connsiteY0" fmla="*/ 0 h 1519634"/>
+              <a:gd name="connsiteX1" fmla="*/ 12192000 w 12192000"/>
+              <a:gd name="connsiteY1" fmla="*/ 1519634 h 1519634"/>
+              <a:gd name="connsiteX2" fmla="*/ 0 w 12192000"/>
+              <a:gd name="connsiteY2" fmla="*/ 1519634 h 1519634"/>
+              <a:gd name="connsiteX3" fmla="*/ 3810 w 12192000"/>
+              <a:gd name="connsiteY3" fmla="*/ 628674 h 1519634"/>
+              <a:gd name="connsiteX4" fmla="*/ 5319640 w 12192000"/>
+              <a:gd name="connsiteY4" fmla="*/ 1227734 h 1519634"/>
+              <a:gd name="connsiteX5" fmla="*/ 12192000 w 12192000"/>
+              <a:gd name="connsiteY5" fmla="*/ 0 h 1519634"/>
+              <a:gd name="connsiteX0" fmla="*/ 12192000 w 12192000"/>
+              <a:gd name="connsiteY0" fmla="*/ 0 h 1519634"/>
+              <a:gd name="connsiteX1" fmla="*/ 12192000 w 12192000"/>
+              <a:gd name="connsiteY1" fmla="*/ 1519634 h 1519634"/>
+              <a:gd name="connsiteX2" fmla="*/ 0 w 12192000"/>
+              <a:gd name="connsiteY2" fmla="*/ 1519634 h 1519634"/>
+              <a:gd name="connsiteX3" fmla="*/ 3810 w 12192000"/>
+              <a:gd name="connsiteY3" fmla="*/ 628674 h 1519634"/>
+              <a:gd name="connsiteX4" fmla="*/ 5319640 w 12192000"/>
+              <a:gd name="connsiteY4" fmla="*/ 1227734 h 1519634"/>
+              <a:gd name="connsiteX5" fmla="*/ 12192000 w 12192000"/>
+              <a:gd name="connsiteY5" fmla="*/ 0 h 1519634"/>
+              <a:gd name="connsiteX0" fmla="*/ 12192000 w 12192000"/>
+              <a:gd name="connsiteY0" fmla="*/ 0 h 1519634"/>
+              <a:gd name="connsiteX1" fmla="*/ 12192000 w 12192000"/>
+              <a:gd name="connsiteY1" fmla="*/ 1519634 h 1519634"/>
+              <a:gd name="connsiteX2" fmla="*/ 0 w 12192000"/>
+              <a:gd name="connsiteY2" fmla="*/ 1519634 h 1519634"/>
+              <a:gd name="connsiteX3" fmla="*/ 3810 w 12192000"/>
+              <a:gd name="connsiteY3" fmla="*/ 628674 h 1519634"/>
+              <a:gd name="connsiteX4" fmla="*/ 5319640 w 12192000"/>
+              <a:gd name="connsiteY4" fmla="*/ 1227734 h 1519634"/>
+              <a:gd name="connsiteX5" fmla="*/ 12192000 w 12192000"/>
+              <a:gd name="connsiteY5" fmla="*/ 0 h 1519634"/>
+              <a:gd name="connsiteX0" fmla="*/ 12198096 w 12198096"/>
+              <a:gd name="connsiteY0" fmla="*/ 0 h 1325451"/>
+              <a:gd name="connsiteX1" fmla="*/ 12192000 w 12198096"/>
+              <a:gd name="connsiteY1" fmla="*/ 1325451 h 1325451"/>
+              <a:gd name="connsiteX2" fmla="*/ 0 w 12198096"/>
+              <a:gd name="connsiteY2" fmla="*/ 1325451 h 1325451"/>
+              <a:gd name="connsiteX3" fmla="*/ 3810 w 12198096"/>
+              <a:gd name="connsiteY3" fmla="*/ 434491 h 1325451"/>
+              <a:gd name="connsiteX4" fmla="*/ 5319640 w 12198096"/>
+              <a:gd name="connsiteY4" fmla="*/ 1033551 h 1325451"/>
+              <a:gd name="connsiteX5" fmla="*/ 12198096 w 12198096"/>
+              <a:gd name="connsiteY5" fmla="*/ 0 h 1325451"/>
+              <a:gd name="connsiteX0" fmla="*/ 12198096 w 12198096"/>
+              <a:gd name="connsiteY0" fmla="*/ 0 h 1325451"/>
+              <a:gd name="connsiteX1" fmla="*/ 12192000 w 12198096"/>
+              <a:gd name="connsiteY1" fmla="*/ 1325451 h 1325451"/>
+              <a:gd name="connsiteX2" fmla="*/ 0 w 12198096"/>
+              <a:gd name="connsiteY2" fmla="*/ 1325451 h 1325451"/>
+              <a:gd name="connsiteX3" fmla="*/ 3810 w 12198096"/>
+              <a:gd name="connsiteY3" fmla="*/ 434491 h 1325451"/>
+              <a:gd name="connsiteX4" fmla="*/ 5325736 w 12198096"/>
+              <a:gd name="connsiteY4" fmla="*/ 978070 h 1325451"/>
+              <a:gd name="connsiteX5" fmla="*/ 12198096 w 12198096"/>
+              <a:gd name="connsiteY5" fmla="*/ 0 h 1325451"/>
+            </a:gdLst>
+            <a:ahLst/>
+            <a:cxnLst>
+              <a:cxn ang="0">
+                <a:pos x="connsiteX0" y="connsiteY0"/>
+              </a:cxn>
+              <a:cxn ang="0">
+                <a:pos x="connsiteX1" y="connsiteY1"/>
+              </a:cxn>
+              <a:cxn ang="0">
+                <a:pos x="connsiteX2" y="connsiteY2"/>
+              </a:cxn>
+              <a:cxn ang="0">
+                <a:pos x="connsiteX3" y="connsiteY3"/>
+              </a:cxn>
+              <a:cxn ang="0">
+                <a:pos x="connsiteX4" y="connsiteY4"/>
+              </a:cxn>
+              <a:cxn ang="0">
+                <a:pos x="connsiteX5" y="connsiteY5"/>
+              </a:cxn>
+            </a:cxnLst>
+            <a:rect l="l" t="t" r="r" b="b"/>
+            <a:pathLst>
+              <a:path w="12198096" h="1325451">
+                <a:moveTo>
+                  <a:pt x="12198096" y="0"/>
+                </a:moveTo>
+                <a:lnTo>
+                  <a:pt x="12192000" y="1325451"/>
+                </a:lnTo>
+                <a:lnTo>
+                  <a:pt x="0" y="1325451"/>
+                </a:lnTo>
+                <a:lnTo>
+                  <a:pt x="3810" y="434491"/>
+                </a:lnTo>
+                <a:cubicBezTo>
+                  <a:pt x="1718603" y="876908"/>
+                  <a:pt x="3533473" y="963319"/>
+                  <a:pt x="5325736" y="978070"/>
+                </a:cubicBezTo>
+                <a:cubicBezTo>
+                  <a:pt x="7351518" y="925603"/>
+                  <a:pt x="10633603" y="731550"/>
+                  <a:pt x="12198096" y="0"/>
+                </a:cubicBezTo>
+                <a:close/>
+              </a:path>
+            </a:pathLst>
+          </a:custGeom>
+          <a:gradFill flip="none" rotWithShape="1">
+            <a:gsLst>
+              <a:gs pos="60000">
+                <a:srgbClr val="A0D2B4">
+                  <a:alpha val="50000"/>
+                </a:srgbClr>
+              </a:gs>
+              <a:gs pos="0">
+                <a:srgbClr val="008A41">
+                  <a:alpha val="70000"/>
+                </a:srgbClr>
+              </a:gs>
+              <a:gs pos="100000">
+                <a:srgbClr val="A0D2B4">
+                  <a:alpha val="50000"/>
+                </a:srgbClr>
+              </a:gs>
+            </a:gsLst>
+            <a:lin ang="10800000" scaled="0"/>
+            <a:tileRect/>
+          </a:gradFill>
+          <a:ln>
+            <a:noFill/>
+          </a:ln>
+        </p:spPr>
+        <p:style>
+          <a:lnRef idx="2">
+            <a:schemeClr val="accent1">
+              <a:shade val="50000"/>
+            </a:schemeClr>
+          </a:lnRef>
+          <a:fillRef idx="1">
+            <a:schemeClr val="accent1"/>
+          </a:fillRef>
+          <a:effectRef idx="0">
+            <a:schemeClr val="accent1"/>
+          </a:effectRef>
+          <a:fontRef idx="minor">
+            <a:schemeClr val="lt1"/>
+          </a:fontRef>
+        </p:style>
+        <p:txBody>
+          <a:bodyPr rtlCol="0" anchor="ctr"/>
+          <a:lstStyle/>
+          <a:p>
+            <a:pPr lvl="0" algn="ctr"/>
+            <a:endParaRPr lang="zh-CN" altLang="en-US"/>
+          </a:p>
+        </p:txBody>
+      </p:sp>
+      <p:pic>
+        <p:nvPicPr>
+          <p:cNvPr id="6" name="图片 5">
+            <a:extLst>
+              <a:ext uri="{FF2B5EF4-FFF2-40B4-BE49-F238E27FC236}">
+                <a16:creationId xmlns:a16="http://schemas.microsoft.com/office/drawing/2014/main" id="{CD3DC2D9-759B-D749-864A-B1DF64BD0D1F}"/>
+              </a:ext>
+            </a:extLst>
+          </p:cNvPr>
+          <p:cNvPicPr>
+            <a:picLocks noChangeAspect="1"/>
+          </p:cNvPicPr>
+          <p:nvPr userDrawn="1"/>
+        </p:nvPicPr>
+        <p:blipFill>
+          <a:blip r:embed="rId2" cstate="print">
+            <a:extLst>
+              <a:ext uri="{BEBA8EAE-BF5A-486C-A8C5-ECC9F3942E4B}">
+                <a14:imgProps xmlns:a14="http://schemas.microsoft.com/office/drawing/2010/main">
+                  <a14:imgLayer r:embed="rId3">
+                    <a14:imgEffect>
+                      <a14:backgroundRemoval t="3090" b="89888" l="2563" r="97313">
+                        <a14:foregroundMark x1="7187" y1="50562" x2="61563" y2="38764"/>
+                        <a14:foregroundMark x1="61563" y1="38764" x2="63438" y2="41292"/>
+                        <a14:foregroundMark x1="29875" y1="86798" x2="41313" y2="84551"/>
+                        <a14:foregroundMark x1="41313" y1="84551" x2="57375" y2="89607"/>
+                        <a14:foregroundMark x1="57375" y1="89607" x2="63438" y2="85112"/>
+                        <a14:foregroundMark x1="63438" y1="85112" x2="64063" y2="85112"/>
+                        <a14:foregroundMark x1="22250" y1="25843" x2="23375" y2="34831"/>
+                        <a14:foregroundMark x1="22375" y1="26124" x2="26438" y2="23876"/>
+                        <a14:foregroundMark x1="26438" y1="23876" x2="28688" y2="24438"/>
+                        <a14:foregroundMark x1="22313" y1="23315" x2="28750" y2="25562"/>
+                        <a14:foregroundMark x1="68313" y1="24157" x2="68313" y2="24157"/>
+                        <a14:foregroundMark x1="68375" y1="70506" x2="68375" y2="70506"/>
+                        <a14:foregroundMark x1="68063" y1="61236" x2="68063" y2="61236"/>
+                        <a14:foregroundMark x1="83438" y1="31180" x2="87688" y2="19382"/>
+                        <a14:foregroundMark x1="87688" y1="19382" x2="91813" y2="23315"/>
+                        <a14:foregroundMark x1="91813" y1="23315" x2="95063" y2="37079"/>
+                        <a14:foregroundMark x1="95063" y1="37079" x2="95188" y2="56461"/>
+                        <a14:foregroundMark x1="95188" y1="56461" x2="91188" y2="72753"/>
+                        <a14:foregroundMark x1="91188" y1="72753" x2="86438" y2="75562"/>
+                        <a14:foregroundMark x1="86438" y1="75562" x2="82438" y2="60393"/>
+                        <a14:foregroundMark x1="82438" y1="60393" x2="82125" y2="40449"/>
+                        <a14:foregroundMark x1="82125" y1="40449" x2="83813" y2="29213"/>
+                        <a14:foregroundMark x1="85688" y1="46910" x2="91313" y2="42416"/>
+                        <a14:foregroundMark x1="84500" y1="41854" x2="89125" y2="45506"/>
+                        <a14:foregroundMark x1="89125" y1="45506" x2="89313" y2="66573"/>
+                        <a14:foregroundMark x1="89313" y1="66573" x2="85375" y2="56742"/>
+                        <a14:foregroundMark x1="85375" y1="56742" x2="86188" y2="33427"/>
+                        <a14:foregroundMark x1="86188" y1="33427" x2="89625" y2="23315"/>
+                        <a14:foregroundMark x1="89625" y1="23315" x2="93063" y2="58146"/>
+                        <a14:foregroundMark x1="93063" y1="58146" x2="92625" y2="60955"/>
+                        <a14:foregroundMark x1="83250" y1="28933" x2="87125" y2="18539"/>
+                        <a14:foregroundMark x1="87125" y1="18539" x2="92063" y2="21629"/>
+                        <a14:foregroundMark x1="92063" y1="21629" x2="95063" y2="33989"/>
+                        <a14:foregroundMark x1="95063" y1="33989" x2="95875" y2="52247"/>
+                        <a14:foregroundMark x1="95875" y1="52247" x2="92688" y2="71910"/>
+                        <a14:foregroundMark x1="92688" y1="71910" x2="89188" y2="80337"/>
+                        <a14:foregroundMark x1="89188" y1="80337" x2="84125" y2="70787"/>
+                        <a14:foregroundMark x1="84125" y1="70787" x2="81313" y2="53371"/>
+                        <a14:foregroundMark x1="81313" y1="53371" x2="81875" y2="39607"/>
+                        <a14:foregroundMark x1="60250" y1="39888" x2="58125" y2="37079"/>
+                        <a14:foregroundMark x1="67625" y1="32022" x2="69313" y2="53090"/>
+                        <a14:foregroundMark x1="69313" y1="53090" x2="75000" y2="35674"/>
+                        <a14:foregroundMark x1="75000" y1="35674" x2="68813" y2="40449"/>
+                        <a14:foregroundMark x1="68813" y1="40449" x2="69000" y2="21629"/>
+                        <a14:foregroundMark x1="69000" y1="21629" x2="74250" y2="16292"/>
+                        <a14:foregroundMark x1="74250" y1="16292" x2="78563" y2="24719"/>
+                        <a14:foregroundMark x1="78563" y1="24719" x2="80063" y2="46348"/>
+                        <a14:foregroundMark x1="80063" y1="46348" x2="75813" y2="71067"/>
+                        <a14:foregroundMark x1="75813" y1="71067" x2="70438" y2="74719"/>
+                        <a14:foregroundMark x1="70438" y1="74719" x2="77063" y2="69944"/>
+                        <a14:foregroundMark x1="77063" y1="69944" x2="72313" y2="77528"/>
+                        <a14:foregroundMark x1="72313" y1="77528" x2="67500" y2="53090"/>
+                        <a14:foregroundMark x1="67500" y1="53090" x2="68063" y2="72753"/>
+                        <a14:foregroundMark x1="68063" y1="72753" x2="69000" y2="77528"/>
+                        <a14:foregroundMark x1="70688" y1="76685" x2="72438" y2="80056"/>
+                        <a14:foregroundMark x1="73750" y1="78371" x2="75688" y2="78652"/>
+                        <a14:foregroundMark x1="70813" y1="78090" x2="72063" y2="73876"/>
+                        <a14:foregroundMark x1="5407" y1="21913" x2="10063" y2="20506"/>
+                        <a14:foregroundMark x1="10063" y1="20506" x2="33938" y2="20506"/>
+                        <a14:foregroundMark x1="33938" y1="20506" x2="53813" y2="11798"/>
+                        <a14:foregroundMark x1="53813" y1="11798" x2="64813" y2="15449"/>
+                        <a14:foregroundMark x1="64813" y1="15449" x2="67750" y2="43539"/>
+                        <a14:foregroundMark x1="67750" y1="43539" x2="67750" y2="73876"/>
+                        <a14:foregroundMark x1="67750" y1="73876" x2="59750" y2="97753"/>
+                        <a14:foregroundMark x1="59750" y1="97753" x2="40250" y2="95506"/>
+                        <a14:foregroundMark x1="40250" y1="95506" x2="9375" y2="72753"/>
+                        <a14:foregroundMark x1="9375" y1="72753" x2="5309" y2="63916"/>
+                        <a14:foregroundMark x1="10125" y1="10955" x2="11750" y2="27528"/>
+                        <a14:foregroundMark x1="11750" y1="27528" x2="9125" y2="14045"/>
+                        <a14:foregroundMark x1="9125" y1="14045" x2="13188" y2="16011"/>
+                        <a14:foregroundMark x1="86698" y1="5849" x2="92049" y2="12903"/>
+                        <a14:foregroundMark x1="97370" y1="25565" x2="99688" y2="49719"/>
+                        <a14:foregroundMark x1="99688" y1="49719" x2="98188" y2="69101"/>
+                        <a14:foregroundMark x1="98188" y1="69101" x2="93563" y2="85112"/>
+                        <a14:foregroundMark x1="93563" y1="85112" x2="55688" y2="99719"/>
+                        <a14:foregroundMark x1="55688" y1="99719" x2="7164" y2="90806"/>
+                        <a14:foregroundMark x1="5404" y1="20395" x2="5750" y2="17978"/>
+                        <a14:foregroundMark x1="5750" y1="17978" x2="44938" y2="2528"/>
+                        <a14:foregroundMark x1="44938" y1="2528" x2="90875" y2="24438"/>
+                        <a14:foregroundMark x1="90875" y1="24438" x2="80938" y2="14607"/>
+                        <a14:foregroundMark x1="80938" y1="14607" x2="81099" y2="13463"/>
+                        <a14:foregroundMark x1="68750" y1="12360" x2="78063" y2="17135"/>
+                        <a14:foregroundMark x1="78063" y1="17135" x2="87938" y2="14607"/>
+                        <a14:foregroundMark x1="87938" y1="14607" x2="93500" y2="20506"/>
+                        <a14:foregroundMark x1="93500" y1="20506" x2="97500" y2="30618"/>
+                        <a14:foregroundMark x1="97500" y1="30618" x2="97313" y2="59831"/>
+                        <a14:foregroundMark x1="97313" y1="59831" x2="89563" y2="72753"/>
+                        <a14:foregroundMark x1="89563" y1="72753" x2="79813" y2="68258"/>
+                        <a14:foregroundMark x1="79813" y1="68258" x2="69438" y2="31180"/>
+                        <a14:foregroundMark x1="69438" y1="31180" x2="68688" y2="12921"/>
+                        <a14:foregroundMark x1="68688" y1="12921" x2="68688" y2="12640"/>
+                        <a14:foregroundMark x1="5938" y1="33708" x2="6750" y2="79213"/>
+                        <a14:backgroundMark x1="95264" y1="19646" x2="99063" y2="22472"/>
+                        <a14:backgroundMark x1="72250" y1="2528" x2="84419" y2="11579"/>
+                        <a14:backgroundMark x1="99063" y1="22472" x2="99563" y2="1685"/>
+                        <a14:backgroundMark x1="99563" y1="1685" x2="71625" y2="1966"/>
+                        <a14:backgroundMark x1="563" y1="11236" x2="6375" y2="95506"/>
+                        <a14:backgroundMark x1="3125" y1="64607" x2="4500" y2="85112"/>
+                        <a14:backgroundMark x1="2313" y1="66573" x2="3375" y2="64607"/>
+                        <a14:backgroundMark x1="313" y1="17416" x2="625" y2="98315"/>
+                        <a14:backgroundMark x1="1188" y1="19382" x2="4313" y2="98596"/>
+                        <a14:backgroundMark x1="2750" y1="26685" x2="3125" y2="37079"/>
+                        <a14:backgroundMark x1="1750" y1="19382" x2="4500" y2="38483"/>
+                        <a14:backgroundMark x1="1750" y1="15449" x2="1750" y2="15449"/>
+                        <a14:backgroundMark x1="1750" y1="17135" x2="4313" y2="37640"/>
+                        <a14:backgroundMark x1="1875" y1="21910" x2="3938" y2="26966"/>
+                        <a14:backgroundMark x1="4313" y1="3371" x2="4375" y2="39888"/>
+                      </a14:backgroundRemoval>
+                    </a14:imgEffect>
+                  </a14:imgLayer>
+                </a14:imgProps>
+              </a:ext>
+              <a:ext uri="{28A0092B-C50C-407E-A947-70E740481C1C}">
+                <a14:useLocalDpi xmlns:a14="http://schemas.microsoft.com/office/drawing/2010/main" val="0"/>
+              </a:ext>
+            </a:extLst>
+          </a:blip>
+          <a:stretch>
+            <a:fillRect/>
+          </a:stretch>
+        </p:blipFill>
+        <p:spPr>
+          <a:xfrm>
+            <a:off x="5914739" y="183848"/>
+            <a:ext cx="3223157" cy="717152"/>
           </a:xfrm>
           <a:prstGeom prst="rect">
             <a:avLst/>
           </a:prstGeom>
         </p:spPr>
-        <p:txBody>
-          <a:bodyPr spcFirstLastPara="1" wrap="square" lIns="91425" tIns="91425" rIns="91425" bIns="91425" anchor="t" anchorCtr="0">
-            <a:normAutofit/>
-          </a:bodyPr>
-          <a:lstStyle>
-            <a:lvl1pPr lvl="0">
-              <a:spcBef>
-                <a:spcPts val="0"/>
-              </a:spcBef>
-              <a:spcAft>
-                <a:spcPts val="0"/>
-              </a:spcAft>
-              <a:buSzPts val="2800"/>
-              <a:buNone/>
-              <a:defRPr/>
-            </a:lvl1pPr>
-            <a:lvl2pPr lvl="1">
-              <a:spcBef>
-                <a:spcPts val="0"/>
-              </a:spcBef>
-              <a:spcAft>
-                <a:spcPts val="0"/>
-              </a:spcAft>
-              <a:buSzPts val="2800"/>
-              <a:buNone/>
-              <a:defRPr/>
-            </a:lvl2pPr>
-            <a:lvl3pPr lvl="2">
-              <a:spcBef>
-                <a:spcPts val="0"/>
-              </a:spcBef>
-              <a:spcAft>
-                <a:spcPts val="0"/>
-              </a:spcAft>
-              <a:buSzPts val="2800"/>
-              <a:buNone/>
-              <a:defRPr/>
-            </a:lvl3pPr>
-            <a:lvl4pPr lvl="3">
-              <a:spcBef>
-                <a:spcPts val="0"/>
-              </a:spcBef>
-              <a:spcAft>
-                <a:spcPts val="0"/>
-              </a:spcAft>
-              <a:buSzPts val="2800"/>
-              <a:buNone/>
-              <a:defRPr/>
-            </a:lvl4pPr>
-            <a:lvl5pPr lvl="4">
-              <a:spcBef>
-                <a:spcPts val="0"/>
-              </a:spcBef>
-              <a:spcAft>
-                <a:spcPts val="0"/>
-              </a:spcAft>
-              <a:buSzPts val="2800"/>
-              <a:buNone/>
-              <a:defRPr/>
-            </a:lvl5pPr>
-            <a:lvl6pPr lvl="5">
-              <a:spcBef>
-                <a:spcPts val="0"/>
-              </a:spcBef>
-              <a:spcAft>
-                <a:spcPts val="0"/>
-              </a:spcAft>
-              <a:buSzPts val="2800"/>
-              <a:buNone/>
-              <a:defRPr/>
-            </a:lvl6pPr>
-            <a:lvl7pPr lvl="6">
-              <a:spcBef>
-                <a:spcPts val="0"/>
-              </a:spcBef>
-              <a:spcAft>
-                <a:spcPts val="0"/>
-              </a:spcAft>
-              <a:buSzPts val="2800"/>
-              <a:buNone/>
-              <a:defRPr/>
-            </a:lvl7pPr>
-            <a:lvl8pPr lvl="7">
-              <a:spcBef>
-                <a:spcPts val="0"/>
-              </a:spcBef>
-              <a:spcAft>
-                <a:spcPts val="0"/>
-              </a:spcAft>
-              <a:buSzPts val="2800"/>
-              <a:buNone/>
-              <a:defRPr/>
-            </a:lvl8pPr>
-            <a:lvl9pPr lvl="8">
-              <a:spcBef>
-                <a:spcPts val="0"/>
-              </a:spcBef>
-              <a:spcAft>
-                <a:spcPts val="0"/>
-              </a:spcAft>
-              <a:buSzPts val="2800"/>
-              <a:buNone/>
-              <a:defRPr/>
-            </a:lvl9pPr>
-          </a:lstStyle>
-          <a:p>
-            <a:endParaRPr/>
-          </a:p>
-        </p:txBody>
-      </p:sp>
-      <p:sp>
-        <p:nvSpPr>
-          <p:cNvPr id="18" name="Google Shape;18;p4"/>
-          <p:cNvSpPr txBox="1">
-            <a:spLocks noGrp="1"/>
-          </p:cNvSpPr>
-          <p:nvPr>
-            <p:ph type="body" idx="1"/>
-          </p:nvPr>
-        </p:nvSpPr>
-        <p:spPr>
-          <a:xfrm>
-            <a:off x="311700" y="1152475"/>
-            <a:ext cx="8520600" cy="3416400"/>
-          </a:xfrm>
-          <a:prstGeom prst="rect">
-            <a:avLst/>
-          </a:prstGeom>
-        </p:spPr>
-        <p:txBody>
-          <a:bodyPr spcFirstLastPara="1" wrap="square" lIns="91425" tIns="91425" rIns="91425" bIns="91425" anchor="t" anchorCtr="0">
-            <a:normAutofit/>
-          </a:bodyPr>
-          <a:lstStyle>
-            <a:lvl1pPr marL="457200" lvl="0" indent="-342900">
-              <a:spcBef>
-                <a:spcPts val="0"/>
-              </a:spcBef>
-              <a:spcAft>
-                <a:spcPts val="0"/>
-              </a:spcAft>
-              <a:buSzPts val="1800"/>
-              <a:buChar char="●"/>
-              <a:defRPr/>
-            </a:lvl1pPr>
-            <a:lvl2pPr marL="914400" lvl="1" indent="-317500">
-              <a:spcBef>
-                <a:spcPts val="0"/>
-              </a:spcBef>
-              <a:spcAft>
-                <a:spcPts val="0"/>
-              </a:spcAft>
-              <a:buSzPts val="1400"/>
-              <a:buChar char="○"/>
-              <a:defRPr/>
-            </a:lvl2pPr>
-            <a:lvl3pPr marL="1371600" lvl="2" indent="-317500">
-              <a:spcBef>
-                <a:spcPts val="0"/>
-              </a:spcBef>
-              <a:spcAft>
-                <a:spcPts val="0"/>
-              </a:spcAft>
-              <a:buSzPts val="1400"/>
-              <a:buChar char="■"/>
-              <a:defRPr/>
-            </a:lvl3pPr>
-            <a:lvl4pPr marL="1828800" lvl="3" indent="-317500">
-              <a:spcBef>
-                <a:spcPts val="0"/>
-              </a:spcBef>
-              <a:spcAft>
-                <a:spcPts val="0"/>
-              </a:spcAft>
-              <a:buSzPts val="1400"/>
-              <a:buChar char="●"/>
-              <a:defRPr/>
-            </a:lvl4pPr>
-            <a:lvl5pPr marL="2286000" lvl="4" indent="-317500">
-              <a:spcBef>
-                <a:spcPts val="0"/>
-              </a:spcBef>
-              <a:spcAft>
-                <a:spcPts val="0"/>
-              </a:spcAft>
-              <a:buSzPts val="1400"/>
-              <a:buChar char="○"/>
-              <a:defRPr/>
-            </a:lvl5pPr>
-            <a:lvl6pPr marL="2743200" lvl="5" indent="-317500">
-              <a:spcBef>
-                <a:spcPts val="0"/>
-              </a:spcBef>
-              <a:spcAft>
-                <a:spcPts val="0"/>
-              </a:spcAft>
-              <a:buSzPts val="1400"/>
-              <a:buChar char="■"/>
-              <a:defRPr/>
-            </a:lvl6pPr>
-            <a:lvl7pPr marL="3200400" lvl="6" indent="-317500">
-              <a:spcBef>
-                <a:spcPts val="0"/>
-              </a:spcBef>
-              <a:spcAft>
-                <a:spcPts val="0"/>
-              </a:spcAft>
-              <a:buSzPts val="1400"/>
-              <a:buChar char="●"/>
-              <a:defRPr/>
-            </a:lvl7pPr>
-            <a:lvl8pPr marL="3657600" lvl="7" indent="-317500">
-              <a:spcBef>
-                <a:spcPts val="0"/>
-              </a:spcBef>
-              <a:spcAft>
-                <a:spcPts val="0"/>
-              </a:spcAft>
-              <a:buSzPts val="1400"/>
-              <a:buChar char="○"/>
-              <a:defRPr/>
-            </a:lvl8pPr>
-            <a:lvl9pPr marL="4114800" lvl="8" indent="-317500">
-              <a:spcBef>
-                <a:spcPts val="0"/>
-              </a:spcBef>
-              <a:spcAft>
-                <a:spcPts val="0"/>
-              </a:spcAft>
-              <a:buSzPts val="1400"/>
-              <a:buChar char="■"/>
-              <a:defRPr/>
-            </a:lvl9pPr>
-          </a:lstStyle>
-          <a:p>
-            <a:endParaRPr/>
-          </a:p>
-        </p:txBody>
-      </p:sp>
-      <p:sp>
-        <p:nvSpPr>
-          <p:cNvPr id="19" name="Google Shape;19;p4"/>
-          <p:cNvSpPr txBox="1">
-            <a:spLocks noGrp="1"/>
-          </p:cNvSpPr>
-          <p:nvPr>
-            <p:ph type="sldNum" idx="12"/>
-          </p:nvPr>
-        </p:nvSpPr>
-        <p:spPr>
-          <a:xfrm>
-            <a:off x="8472458" y="4663217"/>
-            <a:ext cx="548700" cy="393600"/>
-          </a:xfrm>
-          <a:prstGeom prst="rect">
-            <a:avLst/>
-          </a:prstGeom>
-        </p:spPr>
-        <p:txBody>
-          <a:bodyPr spcFirstLastPara="1" wrap="square" lIns="91425" tIns="91425" rIns="91425" bIns="91425" anchor="ctr" anchorCtr="0">
-            <a:normAutofit/>
-          </a:bodyPr>
-          <a:lstStyle>
-            <a:lvl1pPr lvl="0">
-              <a:buNone/>
-              <a:defRPr/>
-            </a:lvl1pPr>
-            <a:lvl2pPr lvl="1">
-              <a:buNone/>
-              <a:defRPr/>
-            </a:lvl2pPr>
-            <a:lvl3pPr lvl="2">
-              <a:buNone/>
-              <a:defRPr/>
-            </a:lvl3pPr>
-            <a:lvl4pPr lvl="3">
-              <a:buNone/>
-              <a:defRPr/>
-            </a:lvl4pPr>
-            <a:lvl5pPr lvl="4">
-              <a:buNone/>
-              <a:defRPr/>
-            </a:lvl5pPr>
-            <a:lvl6pPr lvl="5">
-              <a:buNone/>
-              <a:defRPr/>
-            </a:lvl6pPr>
-            <a:lvl7pPr lvl="6">
-              <a:buNone/>
-              <a:defRPr/>
-            </a:lvl7pPr>
-            <a:lvl8pPr lvl="7">
-              <a:buNone/>
-              <a:defRPr/>
-            </a:lvl8pPr>
-            <a:lvl9pPr lvl="8">
-              <a:buNone/>
-              <a:defRPr/>
-            </a:lvl9pPr>
-          </a:lstStyle>
-          <a:p>
-            <a:pPr marL="0" lvl="0" indent="0" algn="r" rtl="0">
-              <a:spcBef>
-                <a:spcPts val="0"/>
-              </a:spcBef>
-              <a:spcAft>
-                <a:spcPts val="0"/>
-              </a:spcAft>
-              <a:buNone/>
-            </a:pPr>
-            <a:fld id="{00000000-1234-1234-1234-123412341234}" type="slidenum">
-              <a:rPr lang="en-GB"/>
-              <a:t>‹#›</a:t>
-            </a:fld>
-            <a:endParaRPr lang="en-GB"/>
-          </a:p>
-        </p:txBody>
-      </p:sp>
+      </p:pic>
     </p:spTree>
   </p:cSld>
   <p:clrMapOvr>
@@ -7651,8 +8416,8 @@
   </p:cSld>
   <p:clrMap bg1="lt1" tx1="dk1" bg2="dk2" tx2="lt2" accent1="accent1" accent2="accent2" accent3="accent3" accent4="accent4" accent5="accent5" accent6="accent6" hlink="hlink" folHlink="folHlink"/>
   <p:sldLayoutIdLst>
-    <p:sldLayoutId id="2147483649" r:id="rId1"/>
-    <p:sldLayoutId id="2147483650" r:id="rId2"/>
+    <p:sldLayoutId id="2147483650" r:id="rId1"/>
+    <p:sldLayoutId id="2147483660" r:id="rId2"/>
     <p:sldLayoutId id="2147483651" r:id="rId3"/>
     <p:sldLayoutId id="2147483652" r:id="rId4"/>
     <p:sldLayoutId id="2147483653" r:id="rId5"/>
@@ -8361,7 +9126,7 @@
   <p:cSld>
     <p:spTree>
       <p:nvGrpSpPr>
-        <p:cNvPr id="1" name="Shape 53"/>
+        <p:cNvPr id="1" name=""/>
         <p:cNvGrpSpPr/>
         <p:nvPr/>
       </p:nvGrpSpPr>
@@ -8375,17 +9140,21 @@
       </p:grpSpPr>
       <p:sp>
         <p:nvSpPr>
-          <p:cNvPr id="54" name="Google Shape;54;p13"/>
+          <p:cNvPr id="3" name="Google Shape;54;p13">
+            <a:extLst>
+              <a:ext uri="{FF2B5EF4-FFF2-40B4-BE49-F238E27FC236}">
+                <a16:creationId xmlns:a16="http://schemas.microsoft.com/office/drawing/2014/main" id="{453A66B1-5E4D-01DB-5970-AFDA273BF31D}"/>
+              </a:ext>
+            </a:extLst>
+          </p:cNvPr>
           <p:cNvSpPr txBox="1">
-            <a:spLocks noGrp="1"/>
+            <a:spLocks/>
           </p:cNvSpPr>
-          <p:nvPr>
-            <p:ph type="ctrTitle"/>
-          </p:nvPr>
+          <p:nvPr/>
         </p:nvSpPr>
         <p:spPr>
           <a:xfrm>
-            <a:off x="311708" y="744575"/>
+            <a:off x="311708" y="910829"/>
             <a:ext cx="8520600" cy="2052600"/>
           </a:xfrm>
           <a:prstGeom prst="rect">
@@ -8396,21 +9165,241 @@
           <a:bodyPr spcFirstLastPara="1" wrap="square" lIns="91425" tIns="91425" rIns="91425" bIns="91425" anchor="b" anchorCtr="0">
             <a:normAutofit/>
           </a:bodyPr>
-          <a:lstStyle/>
+          <a:lstStyle>
+            <a:defPPr marR="0" lvl="0" algn="l" rtl="0">
+              <a:lnSpc>
+                <a:spcPct val="100000"/>
+              </a:lnSpc>
+              <a:spcBef>
+                <a:spcPts val="0"/>
+              </a:spcBef>
+              <a:spcAft>
+                <a:spcPts val="0"/>
+              </a:spcAft>
+            </a:defPPr>
+            <a:lvl1pPr marR="0" lvl="0" algn="l" rtl="0">
+              <a:lnSpc>
+                <a:spcPct val="100000"/>
+              </a:lnSpc>
+              <a:spcBef>
+                <a:spcPts val="0"/>
+              </a:spcBef>
+              <a:spcAft>
+                <a:spcPts val="0"/>
+              </a:spcAft>
+              <a:buClr>
+                <a:srgbClr val="000000"/>
+              </a:buClr>
+              <a:buFont typeface="Arial" panose="020B0604020202020204"/>
+              <a:defRPr sz="1400" b="0" i="0" u="none" strike="noStrike" cap="none">
+                <a:solidFill>
+                  <a:srgbClr val="000000"/>
+                </a:solidFill>
+                <a:latin typeface="Arial" panose="020B0604020202020204"/>
+                <a:ea typeface="Arial" panose="020B0604020202020204"/>
+                <a:cs typeface="Arial" panose="020B0604020202020204"/>
+                <a:sym typeface="Arial" panose="020B0604020202020204"/>
+              </a:defRPr>
+            </a:lvl1pPr>
+            <a:lvl2pPr marR="0" lvl="1" algn="l" rtl="0">
+              <a:lnSpc>
+                <a:spcPct val="100000"/>
+              </a:lnSpc>
+              <a:spcBef>
+                <a:spcPts val="0"/>
+              </a:spcBef>
+              <a:spcAft>
+                <a:spcPts val="0"/>
+              </a:spcAft>
+              <a:buClr>
+                <a:srgbClr val="000000"/>
+              </a:buClr>
+              <a:buFont typeface="Arial" panose="020B0604020202020204"/>
+              <a:defRPr sz="1400" b="0" i="0" u="none" strike="noStrike" cap="none">
+                <a:solidFill>
+                  <a:srgbClr val="000000"/>
+                </a:solidFill>
+                <a:latin typeface="Arial" panose="020B0604020202020204"/>
+                <a:ea typeface="Arial" panose="020B0604020202020204"/>
+                <a:cs typeface="Arial" panose="020B0604020202020204"/>
+                <a:sym typeface="Arial" panose="020B0604020202020204"/>
+              </a:defRPr>
+            </a:lvl2pPr>
+            <a:lvl3pPr marR="0" lvl="2" algn="l" rtl="0">
+              <a:lnSpc>
+                <a:spcPct val="100000"/>
+              </a:lnSpc>
+              <a:spcBef>
+                <a:spcPts val="0"/>
+              </a:spcBef>
+              <a:spcAft>
+                <a:spcPts val="0"/>
+              </a:spcAft>
+              <a:buClr>
+                <a:srgbClr val="000000"/>
+              </a:buClr>
+              <a:buFont typeface="Arial" panose="020B0604020202020204"/>
+              <a:defRPr sz="1400" b="0" i="0" u="none" strike="noStrike" cap="none">
+                <a:solidFill>
+                  <a:srgbClr val="000000"/>
+                </a:solidFill>
+                <a:latin typeface="Arial" panose="020B0604020202020204"/>
+                <a:ea typeface="Arial" panose="020B0604020202020204"/>
+                <a:cs typeface="Arial" panose="020B0604020202020204"/>
+                <a:sym typeface="Arial" panose="020B0604020202020204"/>
+              </a:defRPr>
+            </a:lvl3pPr>
+            <a:lvl4pPr marR="0" lvl="3" algn="l" rtl="0">
+              <a:lnSpc>
+                <a:spcPct val="100000"/>
+              </a:lnSpc>
+              <a:spcBef>
+                <a:spcPts val="0"/>
+              </a:spcBef>
+              <a:spcAft>
+                <a:spcPts val="0"/>
+              </a:spcAft>
+              <a:buClr>
+                <a:srgbClr val="000000"/>
+              </a:buClr>
+              <a:buFont typeface="Arial" panose="020B0604020202020204"/>
+              <a:defRPr sz="1400" b="0" i="0" u="none" strike="noStrike" cap="none">
+                <a:solidFill>
+                  <a:srgbClr val="000000"/>
+                </a:solidFill>
+                <a:latin typeface="Arial" panose="020B0604020202020204"/>
+                <a:ea typeface="Arial" panose="020B0604020202020204"/>
+                <a:cs typeface="Arial" panose="020B0604020202020204"/>
+                <a:sym typeface="Arial" panose="020B0604020202020204"/>
+              </a:defRPr>
+            </a:lvl4pPr>
+            <a:lvl5pPr marR="0" lvl="4" algn="l" rtl="0">
+              <a:lnSpc>
+                <a:spcPct val="100000"/>
+              </a:lnSpc>
+              <a:spcBef>
+                <a:spcPts val="0"/>
+              </a:spcBef>
+              <a:spcAft>
+                <a:spcPts val="0"/>
+              </a:spcAft>
+              <a:buClr>
+                <a:srgbClr val="000000"/>
+              </a:buClr>
+              <a:buFont typeface="Arial" panose="020B0604020202020204"/>
+              <a:defRPr sz="1400" b="0" i="0" u="none" strike="noStrike" cap="none">
+                <a:solidFill>
+                  <a:srgbClr val="000000"/>
+                </a:solidFill>
+                <a:latin typeface="Arial" panose="020B0604020202020204"/>
+                <a:ea typeface="Arial" panose="020B0604020202020204"/>
+                <a:cs typeface="Arial" panose="020B0604020202020204"/>
+                <a:sym typeface="Arial" panose="020B0604020202020204"/>
+              </a:defRPr>
+            </a:lvl5pPr>
+            <a:lvl6pPr marR="0" lvl="5" algn="l" rtl="0">
+              <a:lnSpc>
+                <a:spcPct val="100000"/>
+              </a:lnSpc>
+              <a:spcBef>
+                <a:spcPts val="0"/>
+              </a:spcBef>
+              <a:spcAft>
+                <a:spcPts val="0"/>
+              </a:spcAft>
+              <a:buClr>
+                <a:srgbClr val="000000"/>
+              </a:buClr>
+              <a:buFont typeface="Arial" panose="020B0604020202020204"/>
+              <a:defRPr sz="1400" b="0" i="0" u="none" strike="noStrike" cap="none">
+                <a:solidFill>
+                  <a:srgbClr val="000000"/>
+                </a:solidFill>
+                <a:latin typeface="Arial" panose="020B0604020202020204"/>
+                <a:ea typeface="Arial" panose="020B0604020202020204"/>
+                <a:cs typeface="Arial" panose="020B0604020202020204"/>
+                <a:sym typeface="Arial" panose="020B0604020202020204"/>
+              </a:defRPr>
+            </a:lvl6pPr>
+            <a:lvl7pPr marR="0" lvl="6" algn="l" rtl="0">
+              <a:lnSpc>
+                <a:spcPct val="100000"/>
+              </a:lnSpc>
+              <a:spcBef>
+                <a:spcPts val="0"/>
+              </a:spcBef>
+              <a:spcAft>
+                <a:spcPts val="0"/>
+              </a:spcAft>
+              <a:buClr>
+                <a:srgbClr val="000000"/>
+              </a:buClr>
+              <a:buFont typeface="Arial" panose="020B0604020202020204"/>
+              <a:defRPr sz="1400" b="0" i="0" u="none" strike="noStrike" cap="none">
+                <a:solidFill>
+                  <a:srgbClr val="000000"/>
+                </a:solidFill>
+                <a:latin typeface="Arial" panose="020B0604020202020204"/>
+                <a:ea typeface="Arial" panose="020B0604020202020204"/>
+                <a:cs typeface="Arial" panose="020B0604020202020204"/>
+                <a:sym typeface="Arial" panose="020B0604020202020204"/>
+              </a:defRPr>
+            </a:lvl7pPr>
+            <a:lvl8pPr marR="0" lvl="7" algn="l" rtl="0">
+              <a:lnSpc>
+                <a:spcPct val="100000"/>
+              </a:lnSpc>
+              <a:spcBef>
+                <a:spcPts val="0"/>
+              </a:spcBef>
+              <a:spcAft>
+                <a:spcPts val="0"/>
+              </a:spcAft>
+              <a:buClr>
+                <a:srgbClr val="000000"/>
+              </a:buClr>
+              <a:buFont typeface="Arial" panose="020B0604020202020204"/>
+              <a:defRPr sz="1400" b="0" i="0" u="none" strike="noStrike" cap="none">
+                <a:solidFill>
+                  <a:srgbClr val="000000"/>
+                </a:solidFill>
+                <a:latin typeface="Arial" panose="020B0604020202020204"/>
+                <a:ea typeface="Arial" panose="020B0604020202020204"/>
+                <a:cs typeface="Arial" panose="020B0604020202020204"/>
+                <a:sym typeface="Arial" panose="020B0604020202020204"/>
+              </a:defRPr>
+            </a:lvl8pPr>
+            <a:lvl9pPr marR="0" lvl="8" algn="l" rtl="0">
+              <a:lnSpc>
+                <a:spcPct val="100000"/>
+              </a:lnSpc>
+              <a:spcBef>
+                <a:spcPts val="0"/>
+              </a:spcBef>
+              <a:spcAft>
+                <a:spcPts val="0"/>
+              </a:spcAft>
+              <a:buClr>
+                <a:srgbClr val="000000"/>
+              </a:buClr>
+              <a:buFont typeface="Arial" panose="020B0604020202020204"/>
+              <a:defRPr sz="1400" b="0" i="0" u="none" strike="noStrike" cap="none">
+                <a:solidFill>
+                  <a:srgbClr val="000000"/>
+                </a:solidFill>
+                <a:latin typeface="Arial" panose="020B0604020202020204"/>
+                <a:ea typeface="Arial" panose="020B0604020202020204"/>
+                <a:cs typeface="Arial" panose="020B0604020202020204"/>
+                <a:sym typeface="Arial" panose="020B0604020202020204"/>
+              </a:defRPr>
+            </a:lvl9pPr>
+          </a:lstStyle>
           <a:p>
-            <a:pPr marL="0" lvl="0" indent="0" algn="ctr" rtl="0">
-              <a:spcBef>
-                <a:spcPts val="0"/>
-              </a:spcBef>
-              <a:spcAft>
-                <a:spcPts val="0"/>
-              </a:spcAft>
-              <a:buNone/>
-            </a:pPr>
-            <a:r>
-              <a:rPr lang="en-GB" sz="4000" b="1" dirty="0">
-                <a:solidFill>
-                  <a:srgbClr val="980000"/>
+            <a:pPr algn="ctr"/>
+            <a:r>
+              <a:rPr lang="en-US" sz="4000" b="1">
+                <a:solidFill>
+                  <a:srgbClr val="009242"/>
                 </a:solidFill>
                 <a:latin typeface="Times New Roman" panose="02020603050405020304" charset="0"/>
                 <a:ea typeface="SimSun" panose="02010600030101010101" pitchFamily="2" charset="-122"/>
@@ -8419,9 +9408,9 @@
               <a:t>Instructions for IEEE UV2026 </a:t>
             </a:r>
             <a:br>
-              <a:rPr lang="en-GB" sz="4000" b="1" dirty="0">
-                <a:solidFill>
-                  <a:srgbClr val="980000"/>
+              <a:rPr lang="en-US" sz="4000" b="1">
+                <a:solidFill>
+                  <a:srgbClr val="009242"/>
                 </a:solidFill>
                 <a:latin typeface="Times New Roman" panose="02020603050405020304" charset="0"/>
                 <a:ea typeface="SimSun" panose="02010600030101010101" pitchFamily="2" charset="-122"/>
@@ -8429,30 +9418,19 @@
               </a:rPr>
             </a:br>
             <a:r>
-              <a:rPr lang="en-GB" sz="4000" b="1" dirty="0">
-                <a:solidFill>
-                  <a:srgbClr val="980000"/>
+              <a:rPr lang="en-US" sz="4000" b="1">
+                <a:solidFill>
+                  <a:srgbClr val="009242"/>
                 </a:solidFill>
                 <a:latin typeface="Times New Roman" panose="02020603050405020304" charset="0"/>
                 <a:ea typeface="SimSun" panose="02010600030101010101" pitchFamily="2" charset="-122"/>
                 <a:cs typeface="Times New Roman" panose="02020603050405020304" charset="0"/>
               </a:rPr>
-              <a:t>Paper and Presentation Submission on </a:t>
-            </a:r>
-            <a:r>
-              <a:rPr lang="en-GB" sz="4000" b="1" dirty="0" err="1">
-                <a:solidFill>
-                  <a:srgbClr val="980000"/>
-                </a:solidFill>
-                <a:latin typeface="Times New Roman" panose="02020603050405020304" charset="0"/>
-                <a:ea typeface="SimSun" panose="02010600030101010101" pitchFamily="2" charset="-122"/>
-                <a:cs typeface="Times New Roman" panose="02020603050405020304" charset="0"/>
-              </a:rPr>
-              <a:t>EasyChair</a:t>
-            </a:r>
-            <a:endParaRPr sz="4000" b="1" dirty="0">
+              <a:t>Paper and Presentation Submission on EasyChair</a:t>
+            </a:r>
+            <a:endParaRPr lang="en-US" sz="4000" b="1" dirty="0">
               <a:solidFill>
-                <a:srgbClr val="980000"/>
+                <a:srgbClr val="009242"/>
               </a:solidFill>
               <a:latin typeface="Times New Roman" panose="02020603050405020304" charset="0"/>
               <a:ea typeface="SimSun" panose="02010600030101010101" pitchFamily="2" charset="-122"/>
@@ -8463,17 +9441,21 @@
       </p:sp>
       <p:sp>
         <p:nvSpPr>
-          <p:cNvPr id="55" name="Google Shape;55;p13"/>
+          <p:cNvPr id="4" name="Google Shape;55;p13">
+            <a:extLst>
+              <a:ext uri="{FF2B5EF4-FFF2-40B4-BE49-F238E27FC236}">
+                <a16:creationId xmlns:a16="http://schemas.microsoft.com/office/drawing/2014/main" id="{EDA3906A-6F91-010B-DD77-7012B9634622}"/>
+              </a:ext>
+            </a:extLst>
+          </p:cNvPr>
           <p:cNvSpPr txBox="1">
-            <a:spLocks noGrp="1"/>
+            <a:spLocks/>
           </p:cNvSpPr>
-          <p:nvPr>
-            <p:ph type="subTitle" idx="1"/>
-          </p:nvPr>
+          <p:nvPr/>
         </p:nvSpPr>
         <p:spPr>
           <a:xfrm>
-            <a:off x="311785" y="3113405"/>
+            <a:off x="311785" y="3279659"/>
             <a:ext cx="8520430" cy="1650365"/>
           </a:xfrm>
           <a:prstGeom prst="rect">
@@ -8484,35 +9466,253 @@
           <a:bodyPr spcFirstLastPara="1" wrap="square" lIns="91425" tIns="91425" rIns="91425" bIns="91425" anchor="t" anchorCtr="0">
             <a:normAutofit/>
           </a:bodyPr>
-          <a:lstStyle/>
+          <a:lstStyle>
+            <a:defPPr marR="0" lvl="0" algn="l" rtl="0">
+              <a:lnSpc>
+                <a:spcPct val="100000"/>
+              </a:lnSpc>
+              <a:spcBef>
+                <a:spcPts val="0"/>
+              </a:spcBef>
+              <a:spcAft>
+                <a:spcPts val="0"/>
+              </a:spcAft>
+            </a:defPPr>
+            <a:lvl1pPr marR="0" lvl="0" algn="l" rtl="0">
+              <a:lnSpc>
+                <a:spcPct val="100000"/>
+              </a:lnSpc>
+              <a:spcBef>
+                <a:spcPts val="0"/>
+              </a:spcBef>
+              <a:spcAft>
+                <a:spcPts val="0"/>
+              </a:spcAft>
+              <a:buClr>
+                <a:srgbClr val="000000"/>
+              </a:buClr>
+              <a:buFont typeface="Arial" panose="020B0604020202020204"/>
+              <a:defRPr sz="1400" b="0" i="0" u="none" strike="noStrike" cap="none">
+                <a:solidFill>
+                  <a:srgbClr val="000000"/>
+                </a:solidFill>
+                <a:latin typeface="Arial" panose="020B0604020202020204"/>
+                <a:ea typeface="Arial" panose="020B0604020202020204"/>
+                <a:cs typeface="Arial" panose="020B0604020202020204"/>
+                <a:sym typeface="Arial" panose="020B0604020202020204"/>
+              </a:defRPr>
+            </a:lvl1pPr>
+            <a:lvl2pPr marR="0" lvl="1" algn="l" rtl="0">
+              <a:lnSpc>
+                <a:spcPct val="100000"/>
+              </a:lnSpc>
+              <a:spcBef>
+                <a:spcPts val="0"/>
+              </a:spcBef>
+              <a:spcAft>
+                <a:spcPts val="0"/>
+              </a:spcAft>
+              <a:buClr>
+                <a:srgbClr val="000000"/>
+              </a:buClr>
+              <a:buFont typeface="Arial" panose="020B0604020202020204"/>
+              <a:defRPr sz="1400" b="0" i="0" u="none" strike="noStrike" cap="none">
+                <a:solidFill>
+                  <a:srgbClr val="000000"/>
+                </a:solidFill>
+                <a:latin typeface="Arial" panose="020B0604020202020204"/>
+                <a:ea typeface="Arial" panose="020B0604020202020204"/>
+                <a:cs typeface="Arial" panose="020B0604020202020204"/>
+                <a:sym typeface="Arial" panose="020B0604020202020204"/>
+              </a:defRPr>
+            </a:lvl2pPr>
+            <a:lvl3pPr marR="0" lvl="2" algn="l" rtl="0">
+              <a:lnSpc>
+                <a:spcPct val="100000"/>
+              </a:lnSpc>
+              <a:spcBef>
+                <a:spcPts val="0"/>
+              </a:spcBef>
+              <a:spcAft>
+                <a:spcPts val="0"/>
+              </a:spcAft>
+              <a:buClr>
+                <a:srgbClr val="000000"/>
+              </a:buClr>
+              <a:buFont typeface="Arial" panose="020B0604020202020204"/>
+              <a:defRPr sz="1400" b="0" i="0" u="none" strike="noStrike" cap="none">
+                <a:solidFill>
+                  <a:srgbClr val="000000"/>
+                </a:solidFill>
+                <a:latin typeface="Arial" panose="020B0604020202020204"/>
+                <a:ea typeface="Arial" panose="020B0604020202020204"/>
+                <a:cs typeface="Arial" panose="020B0604020202020204"/>
+                <a:sym typeface="Arial" panose="020B0604020202020204"/>
+              </a:defRPr>
+            </a:lvl3pPr>
+            <a:lvl4pPr marR="0" lvl="3" algn="l" rtl="0">
+              <a:lnSpc>
+                <a:spcPct val="100000"/>
+              </a:lnSpc>
+              <a:spcBef>
+                <a:spcPts val="0"/>
+              </a:spcBef>
+              <a:spcAft>
+                <a:spcPts val="0"/>
+              </a:spcAft>
+              <a:buClr>
+                <a:srgbClr val="000000"/>
+              </a:buClr>
+              <a:buFont typeface="Arial" panose="020B0604020202020204"/>
+              <a:defRPr sz="1400" b="0" i="0" u="none" strike="noStrike" cap="none">
+                <a:solidFill>
+                  <a:srgbClr val="000000"/>
+                </a:solidFill>
+                <a:latin typeface="Arial" panose="020B0604020202020204"/>
+                <a:ea typeface="Arial" panose="020B0604020202020204"/>
+                <a:cs typeface="Arial" panose="020B0604020202020204"/>
+                <a:sym typeface="Arial" panose="020B0604020202020204"/>
+              </a:defRPr>
+            </a:lvl4pPr>
+            <a:lvl5pPr marR="0" lvl="4" algn="l" rtl="0">
+              <a:lnSpc>
+                <a:spcPct val="100000"/>
+              </a:lnSpc>
+              <a:spcBef>
+                <a:spcPts val="0"/>
+              </a:spcBef>
+              <a:spcAft>
+                <a:spcPts val="0"/>
+              </a:spcAft>
+              <a:buClr>
+                <a:srgbClr val="000000"/>
+              </a:buClr>
+              <a:buFont typeface="Arial" panose="020B0604020202020204"/>
+              <a:defRPr sz="1400" b="0" i="0" u="none" strike="noStrike" cap="none">
+                <a:solidFill>
+                  <a:srgbClr val="000000"/>
+                </a:solidFill>
+                <a:latin typeface="Arial" panose="020B0604020202020204"/>
+                <a:ea typeface="Arial" panose="020B0604020202020204"/>
+                <a:cs typeface="Arial" panose="020B0604020202020204"/>
+                <a:sym typeface="Arial" panose="020B0604020202020204"/>
+              </a:defRPr>
+            </a:lvl5pPr>
+            <a:lvl6pPr marR="0" lvl="5" algn="l" rtl="0">
+              <a:lnSpc>
+                <a:spcPct val="100000"/>
+              </a:lnSpc>
+              <a:spcBef>
+                <a:spcPts val="0"/>
+              </a:spcBef>
+              <a:spcAft>
+                <a:spcPts val="0"/>
+              </a:spcAft>
+              <a:buClr>
+                <a:srgbClr val="000000"/>
+              </a:buClr>
+              <a:buFont typeface="Arial" panose="020B0604020202020204"/>
+              <a:defRPr sz="1400" b="0" i="0" u="none" strike="noStrike" cap="none">
+                <a:solidFill>
+                  <a:srgbClr val="000000"/>
+                </a:solidFill>
+                <a:latin typeface="Arial" panose="020B0604020202020204"/>
+                <a:ea typeface="Arial" panose="020B0604020202020204"/>
+                <a:cs typeface="Arial" panose="020B0604020202020204"/>
+                <a:sym typeface="Arial" panose="020B0604020202020204"/>
+              </a:defRPr>
+            </a:lvl6pPr>
+            <a:lvl7pPr marR="0" lvl="6" algn="l" rtl="0">
+              <a:lnSpc>
+                <a:spcPct val="100000"/>
+              </a:lnSpc>
+              <a:spcBef>
+                <a:spcPts val="0"/>
+              </a:spcBef>
+              <a:spcAft>
+                <a:spcPts val="0"/>
+              </a:spcAft>
+              <a:buClr>
+                <a:srgbClr val="000000"/>
+              </a:buClr>
+              <a:buFont typeface="Arial" panose="020B0604020202020204"/>
+              <a:defRPr sz="1400" b="0" i="0" u="none" strike="noStrike" cap="none">
+                <a:solidFill>
+                  <a:srgbClr val="000000"/>
+                </a:solidFill>
+                <a:latin typeface="Arial" panose="020B0604020202020204"/>
+                <a:ea typeface="Arial" panose="020B0604020202020204"/>
+                <a:cs typeface="Arial" panose="020B0604020202020204"/>
+                <a:sym typeface="Arial" panose="020B0604020202020204"/>
+              </a:defRPr>
+            </a:lvl7pPr>
+            <a:lvl8pPr marR="0" lvl="7" algn="l" rtl="0">
+              <a:lnSpc>
+                <a:spcPct val="100000"/>
+              </a:lnSpc>
+              <a:spcBef>
+                <a:spcPts val="0"/>
+              </a:spcBef>
+              <a:spcAft>
+                <a:spcPts val="0"/>
+              </a:spcAft>
+              <a:buClr>
+                <a:srgbClr val="000000"/>
+              </a:buClr>
+              <a:buFont typeface="Arial" panose="020B0604020202020204"/>
+              <a:defRPr sz="1400" b="0" i="0" u="none" strike="noStrike" cap="none">
+                <a:solidFill>
+                  <a:srgbClr val="000000"/>
+                </a:solidFill>
+                <a:latin typeface="Arial" panose="020B0604020202020204"/>
+                <a:ea typeface="Arial" panose="020B0604020202020204"/>
+                <a:cs typeface="Arial" panose="020B0604020202020204"/>
+                <a:sym typeface="Arial" panose="020B0604020202020204"/>
+              </a:defRPr>
+            </a:lvl8pPr>
+            <a:lvl9pPr marR="0" lvl="8" algn="l" rtl="0">
+              <a:lnSpc>
+                <a:spcPct val="100000"/>
+              </a:lnSpc>
+              <a:spcBef>
+                <a:spcPts val="0"/>
+              </a:spcBef>
+              <a:spcAft>
+                <a:spcPts val="0"/>
+              </a:spcAft>
+              <a:buClr>
+                <a:srgbClr val="000000"/>
+              </a:buClr>
+              <a:buFont typeface="Arial" panose="020B0604020202020204"/>
+              <a:defRPr sz="1400" b="0" i="0" u="none" strike="noStrike" cap="none">
+                <a:solidFill>
+                  <a:srgbClr val="000000"/>
+                </a:solidFill>
+                <a:latin typeface="Arial" panose="020B0604020202020204"/>
+                <a:ea typeface="Arial" panose="020B0604020202020204"/>
+                <a:cs typeface="Arial" panose="020B0604020202020204"/>
+                <a:sym typeface="Arial" panose="020B0604020202020204"/>
+              </a:defRPr>
+            </a:lvl9pPr>
+          </a:lstStyle>
           <a:p>
-            <a:pPr marL="0" lvl="0" indent="0" algn="ctr" rtl="0">
-              <a:spcBef>
-                <a:spcPts val="0"/>
-              </a:spcBef>
-              <a:spcAft>
-                <a:spcPts val="0"/>
-              </a:spcAft>
-              <a:buNone/>
-            </a:pPr>
-            <a:endParaRPr lang="en-GB" dirty="0">
+            <a:pPr algn="ctr"/>
+            <a:endParaRPr lang="en-GB">
+              <a:solidFill>
+                <a:srgbClr val="009242"/>
+              </a:solidFill>
               <a:latin typeface="Times New Roman" panose="02020603050405020304" charset="0"/>
               <a:ea typeface="SimSun" panose="02010600030101010101" pitchFamily="2" charset="-122"/>
               <a:cs typeface="Times New Roman" panose="02020603050405020304" charset="0"/>
             </a:endParaRPr>
           </a:p>
           <a:p>
-            <a:pPr marL="0" lvl="0" indent="0" algn="ctr" rtl="0">
-              <a:spcBef>
-                <a:spcPts val="0"/>
-              </a:spcBef>
-              <a:spcAft>
-                <a:spcPts val="0"/>
-              </a:spcAft>
-              <a:buNone/>
-            </a:pPr>
-            <a:r>
-              <a:rPr lang="en-GB" dirty="0">
+            <a:pPr algn="ctr"/>
+            <a:r>
+              <a:rPr lang="en-GB">
+                <a:solidFill>
+                  <a:srgbClr val="009242"/>
+                </a:solidFill>
                 <a:latin typeface="Times New Roman" panose="02020603050405020304" charset="0"/>
                 <a:ea typeface="SimSun" panose="02010600030101010101" pitchFamily="2" charset="-122"/>
                 <a:cs typeface="Times New Roman" panose="02020603050405020304" charset="0"/>
@@ -8520,47 +9720,62 @@
               <a:t>Contact: </a:t>
             </a:r>
             <a:r>
-              <a:rPr lang="en-GB" dirty="0">
+              <a:rPr lang="en-GB">
+                <a:solidFill>
+                  <a:srgbClr val="009242"/>
+                </a:solidFill>
                 <a:latin typeface="Times New Roman" panose="02020603050405020304" charset="0"/>
                 <a:ea typeface="SimSun" panose="02010600030101010101" pitchFamily="2" charset="-122"/>
                 <a:cs typeface="Times New Roman" panose="02020603050405020304" charset="0"/>
-                <a:hlinkClick r:id="rId3"/>
+                <a:hlinkClick r:id="rId2">
+                  <a:extLst>
+                    <a:ext uri="{A12FA001-AC4F-418D-AE19-62706E023703}">
+                      <ahyp:hlinkClr xmlns:ahyp="http://schemas.microsoft.com/office/drawing/2018/hyperlinkcolor" val="tx"/>
+                    </a:ext>
+                  </a:extLst>
+                </a:hlinkClick>
               </a:rPr>
               <a:t>uv2026.conf@universal-village.org</a:t>
             </a:r>
-            <a:endParaRPr lang="en-GB" dirty="0">
+            <a:endParaRPr lang="en-GB">
+              <a:solidFill>
+                <a:srgbClr val="009242"/>
+              </a:solidFill>
               <a:latin typeface="Times New Roman" panose="02020603050405020304" charset="0"/>
               <a:ea typeface="SimSun" panose="02010600030101010101" pitchFamily="2" charset="-122"/>
               <a:cs typeface="Times New Roman" panose="02020603050405020304" charset="0"/>
             </a:endParaRPr>
           </a:p>
           <a:p>
-            <a:pPr marL="0" lvl="0" indent="0" algn="ctr" rtl="0">
-              <a:spcBef>
-                <a:spcPts val="0"/>
-              </a:spcBef>
-              <a:spcAft>
-                <a:spcPts val="0"/>
-              </a:spcAft>
-              <a:buNone/>
-            </a:pPr>
-            <a:r>
-              <a:rPr lang="en-GB" dirty="0">
+            <a:pPr algn="ctr"/>
+            <a:r>
+              <a:rPr lang="en-GB">
+                <a:solidFill>
+                  <a:srgbClr val="009242"/>
+                </a:solidFill>
                 <a:latin typeface="Times New Roman" panose="02020603050405020304" charset="0"/>
                 <a:ea typeface="SimSun" panose="02010600030101010101" pitchFamily="2" charset="-122"/>
                 <a:cs typeface="Times New Roman" panose="02020603050405020304" charset="0"/>
               </a:rPr>
               <a:t> </a:t>
             </a:r>
+            <a:endParaRPr lang="en-GB" dirty="0">
+              <a:solidFill>
+                <a:srgbClr val="009242"/>
+              </a:solidFill>
+              <a:latin typeface="Times New Roman" panose="02020603050405020304" charset="0"/>
+              <a:ea typeface="SimSun" panose="02010600030101010101" pitchFamily="2" charset="-122"/>
+              <a:cs typeface="Times New Roman" panose="02020603050405020304" charset="0"/>
+            </a:endParaRPr>
           </a:p>
         </p:txBody>
       </p:sp>
       <p:sp>
         <p:nvSpPr>
-          <p:cNvPr id="2" name="Google Shape;55;p13">
+          <p:cNvPr id="5" name="Google Shape;55;p13">
             <a:extLst>
               <a:ext uri="{FF2B5EF4-FFF2-40B4-BE49-F238E27FC236}">
-                <a16:creationId xmlns:a16="http://schemas.microsoft.com/office/drawing/2014/main" id="{48393946-C846-DBF2-C623-B2B8181CB7B9}"/>
+                <a16:creationId xmlns:a16="http://schemas.microsoft.com/office/drawing/2014/main" id="{C2E34D35-655F-7D88-FF91-54BAA9F05CAF}"/>
               </a:ext>
             </a:extLst>
           </p:cNvPr>
@@ -8571,7 +9786,7 @@
         </p:nvSpPr>
         <p:spPr>
           <a:xfrm>
-            <a:off x="311700" y="2834125"/>
+            <a:off x="311700" y="3000379"/>
             <a:ext cx="8520600" cy="792600"/>
           </a:xfrm>
           <a:prstGeom prst="rect">
@@ -8839,13 +10054,22 @@
               <a:buChar char="-"/>
             </a:pPr>
             <a:r>
-              <a:rPr lang="en-GB" dirty="0"/>
+              <a:rPr lang="en-GB" dirty="0">
+                <a:solidFill>
+                  <a:srgbClr val="009242"/>
+                </a:solidFill>
+              </a:rPr>
               <a:t>Authors &amp; Presenters</a:t>
             </a:r>
           </a:p>
         </p:txBody>
       </p:sp>
     </p:spTree>
+    <p:extLst>
+      <p:ext uri="{BB962C8B-B14F-4D97-AF65-F5344CB8AC3E}">
+        <p14:creationId xmlns:p14="http://schemas.microsoft.com/office/powerpoint/2010/main" val="2270002730"/>
+      </p:ext>
+    </p:extLst>
   </p:cSld>
   <p:clrMapOvr>
     <a:masterClrMapping/>
@@ -8877,13 +10101,13 @@
             <a:spLocks noGrp="1"/>
           </p:cNvSpPr>
           <p:nvPr>
-            <p:ph type="body" idx="1"/>
+            <p:ph type="body" idx="4294967295"/>
           </p:nvPr>
         </p:nvSpPr>
         <p:spPr>
           <a:xfrm>
-            <a:off x="156124" y="555425"/>
-            <a:ext cx="8520600" cy="3278400"/>
+            <a:off x="156124" y="1136073"/>
+            <a:ext cx="8520600" cy="2697752"/>
           </a:xfrm>
           <a:prstGeom prst="rect">
             <a:avLst/>
@@ -8952,7 +10176,7 @@
         </p:nvGrpSpPr>
         <p:grpSpPr>
           <a:xfrm>
-            <a:off x="241299" y="1348277"/>
+            <a:off x="287481" y="1706162"/>
             <a:ext cx="8660766" cy="3437338"/>
             <a:chOff x="241299" y="1348277"/>
             <a:chExt cx="8660766" cy="3437338"/>
@@ -8996,10 +10220,10 @@
             <p:nvPr/>
           </p:nvPicPr>
           <p:blipFill>
-            <a:blip r:embed="rId4">
+            <a:blip>
               <a:extLst>
                 <a:ext uri="{96DAC541-7B7A-43D3-8B79-37D633B846F1}">
-                  <asvg:svgBlip xmlns:asvg="http://schemas.microsoft.com/office/drawing/2016/SVG/main" r:embed="rId5"/>
+                  <asvg:svgBlip xmlns:asvg="http://schemas.microsoft.com/office/drawing/2016/SVG/main" r:embed="rId4"/>
                 </a:ext>
               </a:extLst>
             </a:blip>
@@ -9026,10 +10250,10 @@
             <p:nvPr/>
           </p:nvPicPr>
           <p:blipFill>
-            <a:blip r:embed="rId6">
+            <a:blip>
               <a:extLst>
                 <a:ext uri="{96DAC541-7B7A-43D3-8B79-37D633B846F1}">
-                  <asvg:svgBlip xmlns:asvg="http://schemas.microsoft.com/office/drawing/2016/SVG/main" r:embed="rId7"/>
+                  <asvg:svgBlip xmlns:asvg="http://schemas.microsoft.com/office/drawing/2016/SVG/main" r:embed="rId5"/>
                 </a:ext>
               </a:extLst>
             </a:blip>
@@ -9050,15 +10274,21 @@
       </p:grpSp>
       <p:sp>
         <p:nvSpPr>
-          <p:cNvPr id="4" name="Google Shape;66;p15"/>
+          <p:cNvPr id="2" name="Google Shape;66;p15">
+            <a:extLst>
+              <a:ext uri="{FF2B5EF4-FFF2-40B4-BE49-F238E27FC236}">
+                <a16:creationId xmlns:a16="http://schemas.microsoft.com/office/drawing/2014/main" id="{9184465A-EE04-6F23-AF25-3ADF49BFAFF7}"/>
+              </a:ext>
+            </a:extLst>
+          </p:cNvPr>
           <p:cNvSpPr txBox="1">
-            <a:spLocks noGrp="1"/>
+            <a:spLocks/>
           </p:cNvSpPr>
           <p:nvPr/>
         </p:nvSpPr>
         <p:spPr>
           <a:xfrm>
-            <a:off x="250740" y="62120"/>
+            <a:off x="311700" y="445025"/>
             <a:ext cx="8520600" cy="572700"/>
           </a:xfrm>
           <a:prstGeom prst="rect">
@@ -9070,8 +10300,8 @@
           </a:ln>
         </p:spPr>
         <p:txBody>
-          <a:bodyPr wrap="square" lIns="91425" tIns="91425" rIns="91425" bIns="91425" anchor="t" anchorCtr="0">
-            <a:normAutofit fontScale="85000" lnSpcReduction="10000"/>
+          <a:bodyPr spcFirstLastPara="1" wrap="square" lIns="91425" tIns="91425" rIns="91425" bIns="91425" anchor="t" anchorCtr="0">
+            <a:normAutofit fontScale="82500" lnSpcReduction="20000"/>
           </a:bodyPr>
           <a:lstStyle>
             <a:defPPr marR="0" lvl="0" algn="l" rtl="0">
@@ -9321,49 +10551,42 @@
             </a:lvl9pPr>
           </a:lstStyle>
           <a:p>
-            <a:pPr marL="457200" lvl="0" indent="-381000" algn="l" rtl="0">
+            <a:pPr marL="76200">
               <a:lnSpc>
                 <a:spcPct val="115000"/>
               </a:lnSpc>
-              <a:spcBef>
-                <a:spcPts val="0"/>
-              </a:spcBef>
-              <a:spcAft>
-                <a:spcPts val="0"/>
-              </a:spcAft>
               <a:buClr>
                 <a:srgbClr val="980000"/>
               </a:buClr>
               <a:buSzPts val="2400"/>
-              <a:buAutoNum type="arabicPeriod"/>
             </a:pPr>
             <a:r>
-              <a:rPr lang="en-US" altLang="zh-CN" sz="3110" b="1" dirty="0">
-                <a:solidFill>
-                  <a:srgbClr val="980000"/>
-                </a:solidFill>
-                <a:latin typeface="Times New Roman" panose="02020603050405020304" pitchFamily="18" charset="0"/>
-                <a:cs typeface="Times New Roman" panose="02020603050405020304" pitchFamily="18" charset="0"/>
-              </a:rPr>
-              <a:t>Create an </a:t>
-            </a:r>
-            <a:r>
-              <a:rPr lang="en-US" altLang="zh-CN" sz="3110" b="1" dirty="0" err="1">
-                <a:solidFill>
-                  <a:srgbClr val="980000"/>
-                </a:solidFill>
-                <a:latin typeface="Times New Roman" panose="02020603050405020304" pitchFamily="18" charset="0"/>
-                <a:cs typeface="Times New Roman" panose="02020603050405020304" pitchFamily="18" charset="0"/>
+              <a:rPr lang="en-US" altLang="zh-CN" sz="3200" b="1" dirty="0">
+                <a:solidFill>
+                  <a:srgbClr val="009242"/>
+                </a:solidFill>
+                <a:latin typeface="Times New Roman" panose="02020603050405020304" charset="0"/>
+                <a:cs typeface="Times New Roman" panose="02020603050405020304" charset="0"/>
+              </a:rPr>
+              <a:t>1. Create an </a:t>
+            </a:r>
+            <a:r>
+              <a:rPr lang="en-US" altLang="zh-CN" sz="3200" b="1" dirty="0" err="1">
+                <a:solidFill>
+                  <a:srgbClr val="009242"/>
+                </a:solidFill>
+                <a:latin typeface="Times New Roman" panose="02020603050405020304" charset="0"/>
+                <a:cs typeface="Times New Roman" panose="02020603050405020304" charset="0"/>
               </a:rPr>
               <a:t>EasyChair</a:t>
             </a:r>
             <a:r>
-              <a:rPr lang="en-US" altLang="zh-CN" sz="3110" b="1" dirty="0">
-                <a:solidFill>
-                  <a:srgbClr val="980000"/>
-                </a:solidFill>
-                <a:latin typeface="Times New Roman" panose="02020603050405020304" pitchFamily="18" charset="0"/>
-                <a:cs typeface="Times New Roman" panose="02020603050405020304" pitchFamily="18" charset="0"/>
+              <a:rPr lang="en-US" altLang="zh-CN" sz="3200" b="1" dirty="0">
+                <a:solidFill>
+                  <a:srgbClr val="009242"/>
+                </a:solidFill>
+                <a:latin typeface="Times New Roman" panose="02020603050405020304" charset="0"/>
+                <a:cs typeface="Times New Roman" panose="02020603050405020304" charset="0"/>
               </a:rPr>
               <a:t> Account-8</a:t>
             </a:r>
@@ -9402,7 +10625,7 @@
             <a:spLocks noGrp="1"/>
           </p:cNvSpPr>
           <p:nvPr>
-            <p:ph type="title"/>
+            <p:ph type="title" idx="4294967295"/>
           </p:nvPr>
         </p:nvSpPr>
         <p:spPr>
@@ -9435,7 +10658,7 @@
             <a:r>
               <a:rPr lang="en-GB" sz="3110" b="1" dirty="0">
                 <a:solidFill>
-                  <a:srgbClr val="980000"/>
+                  <a:srgbClr val="009242"/>
                 </a:solidFill>
                 <a:latin typeface="Times New Roman" panose="02020603050405020304" charset="0"/>
                 <a:cs typeface="Times New Roman" panose="02020603050405020304" charset="0"/>
@@ -9445,7 +10668,7 @@
             <a:r>
               <a:rPr lang="en-US" altLang="zh-CN" sz="3110" b="1" dirty="0">
                 <a:solidFill>
-                  <a:srgbClr val="980000"/>
+                  <a:srgbClr val="009242"/>
                 </a:solidFill>
                 <a:latin typeface="Times New Roman" panose="02020603050405020304" charset="0"/>
                 <a:cs typeface="Times New Roman" panose="02020603050405020304" charset="0"/>
@@ -9462,7 +10685,7 @@
             <a:spLocks noGrp="1"/>
           </p:cNvSpPr>
           <p:nvPr>
-            <p:ph type="body" idx="1"/>
+            <p:ph type="body" idx="4294967295"/>
           </p:nvPr>
         </p:nvSpPr>
         <p:spPr>
@@ -9740,7 +10963,7 @@
         </p:blipFill>
         <p:spPr>
           <a:xfrm>
-            <a:off x="4375150" y="2585085"/>
+            <a:off x="4719147" y="2941320"/>
             <a:ext cx="4191635" cy="2146300"/>
           </a:xfrm>
           <a:prstGeom prst="rect">
@@ -9769,8 +10992,8 @@
         </p:blipFill>
         <p:spPr>
           <a:xfrm>
-            <a:off x="5028565" y="187960"/>
-            <a:ext cx="2762885" cy="2115820"/>
+            <a:off x="5722017" y="1173018"/>
+            <a:ext cx="2498348" cy="1701886"/>
           </a:xfrm>
           <a:prstGeom prst="rect">
             <a:avLst/>
@@ -9815,7 +11038,7 @@
             <a:spLocks noGrp="1"/>
           </p:cNvSpPr>
           <p:nvPr>
-            <p:ph type="body" idx="1"/>
+            <p:ph type="body" idx="4294967295"/>
           </p:nvPr>
         </p:nvSpPr>
         <p:spPr>
@@ -9850,7 +11073,7 @@
               <a:buNone/>
             </a:pPr>
             <a:r>
-              <a:rPr lang="en-US" altLang="en-GB" sz="1600" dirty="0">
+              <a:rPr lang="en-US" altLang="en-GB" sz="1400" dirty="0">
                 <a:solidFill>
                   <a:schemeClr val="dk1"/>
                 </a:solidFill>
@@ -9860,7 +11083,7 @@
               <a:t>c)  </a:t>
             </a:r>
             <a:r>
-              <a:rPr lang="en-US" altLang="zh-CN" sz="1600" dirty="0">
+              <a:rPr lang="en-US" altLang="zh-CN" sz="1400" dirty="0">
                 <a:solidFill>
                   <a:schemeClr val="dk1"/>
                 </a:solidFill>
@@ -9888,7 +11111,7 @@
               <a:buNone/>
             </a:pPr>
             <a:r>
-              <a:rPr lang="en-US" altLang="zh-CN" sz="1600" b="1" dirty="0">
+              <a:rPr lang="en-US" altLang="zh-CN" sz="1400" b="1" dirty="0">
                 <a:solidFill>
                   <a:schemeClr val="dk1"/>
                 </a:solidFill>
@@ -9916,7 +11139,7 @@
               <a:buNone/>
             </a:pPr>
             <a:r>
-              <a:rPr lang="en-US" altLang="zh-CN" sz="1600" b="1" dirty="0">
+              <a:rPr lang="en-US" altLang="zh-CN" sz="1400" b="1" dirty="0">
                 <a:solidFill>
                   <a:schemeClr val="dk1"/>
                 </a:solidFill>
@@ -9944,7 +11167,7 @@
               <a:buNone/>
             </a:pPr>
             <a:r>
-              <a:rPr lang="en-US" altLang="zh-CN" sz="1600" b="1" dirty="0">
+              <a:rPr lang="en-US" altLang="zh-CN" sz="1400" b="1" dirty="0">
                 <a:solidFill>
                   <a:schemeClr val="dk1"/>
                 </a:solidFill>
@@ -9972,7 +11195,7 @@
               <a:buNone/>
             </a:pPr>
             <a:r>
-              <a:rPr lang="en-US" altLang="zh-CN" sz="1600" b="1" dirty="0">
+              <a:rPr lang="en-US" altLang="zh-CN" sz="1400" b="1" dirty="0">
                 <a:solidFill>
                   <a:schemeClr val="dk1"/>
                 </a:solidFill>
@@ -10000,7 +11223,7 @@
               <a:buNone/>
             </a:pPr>
             <a:r>
-              <a:rPr lang="en-US" altLang="zh-CN" sz="1600" b="1" dirty="0">
+              <a:rPr lang="en-US" altLang="zh-CN" sz="1400" b="1" dirty="0">
                 <a:solidFill>
                   <a:schemeClr val="dk1"/>
                 </a:solidFill>
@@ -10028,7 +11251,7 @@
               <a:buNone/>
             </a:pPr>
             <a:r>
-              <a:rPr lang="en-US" altLang="zh-CN" sz="1600" dirty="0">
+              <a:rPr lang="en-US" altLang="zh-CN" sz="1400" dirty="0">
                 <a:solidFill>
                   <a:schemeClr val="dk1"/>
                 </a:solidFill>
@@ -10056,7 +11279,7 @@
               <a:buNone/>
             </a:pPr>
             <a:r>
-              <a:rPr lang="en-US" altLang="zh-CN" sz="1400" b="1" dirty="0">
+              <a:rPr lang="en-US" altLang="zh-CN" sz="1200" b="1" dirty="0">
                 <a:solidFill>
                   <a:schemeClr val="dk1"/>
                 </a:solidFill>
@@ -10070,7 +11293,7 @@
               <a:t>[Important] </a:t>
             </a:r>
             <a:r>
-              <a:rPr lang="en-US" altLang="zh-CN" sz="1400" b="1" dirty="0">
+              <a:rPr lang="en-US" altLang="zh-CN" sz="1200" b="1" dirty="0">
                 <a:solidFill>
                   <a:schemeClr val="dk1"/>
                 </a:solidFill>
@@ -10371,7 +11594,7 @@
             <a:r>
               <a:rPr lang="en-GB" sz="2700" b="1" dirty="0">
                 <a:solidFill>
-                  <a:srgbClr val="980000"/>
+                  <a:srgbClr val="009242"/>
                 </a:solidFill>
                 <a:latin typeface="Times New Roman" panose="02020603050405020304" charset="0"/>
                 <a:cs typeface="Times New Roman" panose="02020603050405020304" charset="0"/>
@@ -10381,7 +11604,7 @@
             <a:r>
               <a:rPr lang="en-US" altLang="zh-CN" sz="2700" b="1" dirty="0">
                 <a:solidFill>
-                  <a:srgbClr val="980000"/>
+                  <a:srgbClr val="009242"/>
                 </a:solidFill>
                 <a:latin typeface="Times New Roman" panose="02020603050405020304" charset="0"/>
                 <a:cs typeface="Times New Roman" panose="02020603050405020304" charset="0"/>
@@ -10408,7 +11631,7 @@
         </p:blipFill>
         <p:spPr>
           <a:xfrm>
-            <a:off x="3913505" y="1269365"/>
+            <a:off x="4001250" y="1472565"/>
             <a:ext cx="4870450" cy="3067050"/>
           </a:xfrm>
           <a:prstGeom prst="rect">
@@ -10453,7 +11676,7 @@
             <a:spLocks noGrp="1"/>
           </p:cNvSpPr>
           <p:nvPr>
-            <p:ph type="body" idx="1"/>
+            <p:ph type="body" idx="4294967295"/>
           </p:nvPr>
         </p:nvSpPr>
         <p:spPr>
@@ -10624,34 +11847,6 @@
               <a:solidFill>
                 <a:schemeClr val="dk1"/>
               </a:solidFill>
-              <a:latin typeface="Times New Roman" panose="02020603050405020304" charset="0"/>
-              <a:cs typeface="Times New Roman" panose="02020603050405020304" charset="0"/>
-            </a:endParaRPr>
-          </a:p>
-          <a:p>
-            <a:pPr marL="146050" lvl="0" indent="0" algn="l" rtl="0">
-              <a:lnSpc>
-                <a:spcPct val="150000"/>
-              </a:lnSpc>
-              <a:spcBef>
-                <a:spcPts val="1000"/>
-              </a:spcBef>
-              <a:spcAft>
-                <a:spcPts val="0"/>
-              </a:spcAft>
-              <a:buClr>
-                <a:schemeClr val="dk1"/>
-              </a:buClr>
-              <a:buSzPts val="1300"/>
-              <a:buNone/>
-            </a:pPr>
-            <a:endParaRPr lang="en-US" altLang="zh-CN" sz="1400" b="1" dirty="0">
-              <a:solidFill>
-                <a:schemeClr val="dk1"/>
-              </a:solidFill>
-              <a:highlight>
-                <a:srgbClr val="FFFF00"/>
-              </a:highlight>
               <a:latin typeface="Times New Roman" panose="02020603050405020304" charset="0"/>
               <a:cs typeface="Times New Roman" panose="02020603050405020304" charset="0"/>
             </a:endParaRPr>
@@ -10778,7 +11973,7 @@
             <a:spLocks noGrp="1"/>
           </p:cNvSpPr>
           <p:nvPr>
-            <p:ph type="title"/>
+            <p:ph type="title" idx="4294967295"/>
           </p:nvPr>
         </p:nvSpPr>
         <p:spPr>
@@ -10811,7 +12006,7 @@
             <a:r>
               <a:rPr lang="en-GB" sz="3110" b="1" dirty="0">
                 <a:solidFill>
-                  <a:srgbClr val="980000"/>
+                  <a:srgbClr val="009242"/>
                 </a:solidFill>
                 <a:latin typeface="Times New Roman" panose="02020603050405020304" charset="0"/>
                 <a:cs typeface="Times New Roman" panose="02020603050405020304" charset="0"/>
@@ -10821,7 +12016,7 @@
             <a:r>
               <a:rPr lang="en-US" altLang="zh-CN" sz="3110" b="1" dirty="0">
                 <a:solidFill>
-                  <a:srgbClr val="980000"/>
+                  <a:srgbClr val="009242"/>
                 </a:solidFill>
                 <a:latin typeface="Times New Roman" panose="02020603050405020304" charset="0"/>
                 <a:cs typeface="Times New Roman" panose="02020603050405020304" charset="0"/>
@@ -10863,7 +12058,7 @@
             <a:spLocks noGrp="1"/>
           </p:cNvSpPr>
           <p:nvPr>
-            <p:ph type="body" idx="1"/>
+            <p:ph type="body" idx="4294967295"/>
           </p:nvPr>
         </p:nvSpPr>
         <p:spPr>
@@ -10927,7 +12122,7 @@
             <a:spLocks noGrp="1"/>
           </p:cNvSpPr>
           <p:nvPr>
-            <p:ph type="title"/>
+            <p:ph type="title" idx="4294967295"/>
           </p:nvPr>
         </p:nvSpPr>
         <p:spPr>
@@ -10960,7 +12155,7 @@
             <a:r>
               <a:rPr lang="en-GB" sz="3110" b="1" dirty="0">
                 <a:solidFill>
-                  <a:srgbClr val="980000"/>
+                  <a:srgbClr val="009242"/>
                 </a:solidFill>
                 <a:latin typeface="Times New Roman" panose="02020603050405020304" charset="0"/>
                 <a:cs typeface="Times New Roman" panose="02020603050405020304" charset="0"/>
@@ -10970,7 +12165,7 @@
             <a:r>
               <a:rPr lang="en-US" altLang="zh-CN" sz="3110" b="1" dirty="0">
                 <a:solidFill>
-                  <a:srgbClr val="980000"/>
+                  <a:srgbClr val="009242"/>
                 </a:solidFill>
                 <a:latin typeface="Times New Roman" panose="02020603050405020304" charset="0"/>
                 <a:cs typeface="Times New Roman" panose="02020603050405020304" charset="0"/>
@@ -11042,7 +12237,7 @@
             <a:spLocks noGrp="1"/>
           </p:cNvSpPr>
           <p:nvPr>
-            <p:ph type="title"/>
+            <p:ph type="title" idx="4294967295"/>
           </p:nvPr>
         </p:nvSpPr>
         <p:spPr>
@@ -11080,7 +12275,7 @@
             <a:r>
               <a:rPr lang="en-GB" sz="3110" b="1" dirty="0">
                 <a:solidFill>
-                  <a:srgbClr val="980000"/>
+                  <a:srgbClr val="009242"/>
                 </a:solidFill>
                 <a:latin typeface="Times New Roman" panose="02020603050405020304" charset="0"/>
                 <a:cs typeface="Times New Roman" panose="02020603050405020304" charset="0"/>
@@ -11090,7 +12285,7 @@
             <a:r>
               <a:rPr lang="en-US" altLang="zh-CN" sz="3110" b="1" dirty="0">
                 <a:solidFill>
-                  <a:srgbClr val="980000"/>
+                  <a:srgbClr val="009242"/>
                 </a:solidFill>
                 <a:latin typeface="Times New Roman" panose="02020603050405020304" charset="0"/>
                 <a:cs typeface="Times New Roman" panose="02020603050405020304" charset="0"/>
@@ -11098,6 +12293,9 @@
               <a:t>Update an Existing Submission-1</a:t>
             </a:r>
             <a:endParaRPr sz="3110" dirty="0">
+              <a:solidFill>
+                <a:srgbClr val="009242"/>
+              </a:solidFill>
               <a:latin typeface="Times New Roman" panose="02020603050405020304" charset="0"/>
               <a:cs typeface="Times New Roman" panose="02020603050405020304" charset="0"/>
             </a:endParaRPr>
@@ -11111,7 +12309,7 @@
             <a:spLocks noGrp="1"/>
           </p:cNvSpPr>
           <p:nvPr>
-            <p:ph type="body" idx="1"/>
+            <p:ph type="body" idx="4294967295"/>
           </p:nvPr>
         </p:nvSpPr>
         <p:spPr>
@@ -11380,7 +12578,7 @@
             <a:spLocks noGrp="1"/>
           </p:cNvSpPr>
           <p:nvPr>
-            <p:ph type="body" idx="1"/>
+            <p:ph type="body" idx="4294967295"/>
           </p:nvPr>
         </p:nvSpPr>
         <p:spPr>
@@ -11527,7 +12725,7 @@
             <a:spLocks noGrp="1"/>
           </p:cNvSpPr>
           <p:nvPr>
-            <p:ph type="title"/>
+            <p:ph type="title" idx="4294967295"/>
           </p:nvPr>
         </p:nvSpPr>
         <p:spPr>
@@ -11565,7 +12763,7 @@
             <a:r>
               <a:rPr lang="en-GB" sz="3110" b="1" dirty="0">
                 <a:solidFill>
-                  <a:srgbClr val="980000"/>
+                  <a:srgbClr val="009242"/>
                 </a:solidFill>
                 <a:latin typeface="Times New Roman" panose="02020603050405020304" charset="0"/>
                 <a:cs typeface="Times New Roman" panose="02020603050405020304" charset="0"/>
@@ -11575,7 +12773,7 @@
             <a:r>
               <a:rPr lang="en-US" altLang="zh-CN" sz="3110" b="1" dirty="0">
                 <a:solidFill>
-                  <a:srgbClr val="980000"/>
+                  <a:srgbClr val="009242"/>
                 </a:solidFill>
                 <a:latin typeface="Times New Roman" panose="02020603050405020304" charset="0"/>
                 <a:cs typeface="Times New Roman" panose="02020603050405020304" charset="0"/>
@@ -11583,6 +12781,9 @@
               <a:t>Update an Existing Submission-2</a:t>
             </a:r>
             <a:endParaRPr sz="3110" dirty="0">
+              <a:solidFill>
+                <a:srgbClr val="009242"/>
+              </a:solidFill>
               <a:latin typeface="Times New Roman" panose="02020603050405020304" charset="0"/>
               <a:cs typeface="Times New Roman" panose="02020603050405020304" charset="0"/>
             </a:endParaRPr>
@@ -11606,7 +12807,7 @@
         </p:blipFill>
         <p:spPr>
           <a:xfrm>
-            <a:off x="5150485" y="1063625"/>
+            <a:off x="5150485" y="1211409"/>
             <a:ext cx="3516630" cy="1369060"/>
           </a:xfrm>
           <a:prstGeom prst="rect">
@@ -11635,7 +12836,7 @@
         </p:blipFill>
         <p:spPr>
           <a:xfrm>
-            <a:off x="5149850" y="2655570"/>
+            <a:off x="5149850" y="2803354"/>
             <a:ext cx="3517265" cy="2070735"/>
           </a:xfrm>
           <a:prstGeom prst="rect">
@@ -11708,7 +12909,7 @@
             <a:spLocks noGrp="1"/>
           </p:cNvSpPr>
           <p:nvPr>
-            <p:ph type="body" idx="1"/>
+            <p:ph type="body" idx="4294967295"/>
           </p:nvPr>
         </p:nvSpPr>
         <p:spPr>
@@ -11792,7 +12993,7 @@
             <a:spLocks noGrp="1"/>
           </p:cNvSpPr>
           <p:nvPr>
-            <p:ph type="title"/>
+            <p:ph type="title" idx="4294967295"/>
           </p:nvPr>
         </p:nvSpPr>
         <p:spPr>
@@ -11830,7 +13031,7 @@
             <a:r>
               <a:rPr lang="en-GB" sz="3110" b="1" dirty="0">
                 <a:solidFill>
-                  <a:srgbClr val="980000"/>
+                  <a:srgbClr val="009242"/>
                 </a:solidFill>
                 <a:latin typeface="Times New Roman" panose="02020603050405020304" charset="0"/>
                 <a:cs typeface="Times New Roman" panose="02020603050405020304" charset="0"/>
@@ -11840,7 +13041,7 @@
             <a:r>
               <a:rPr lang="en-US" altLang="zh-CN" sz="3110" b="1" dirty="0">
                 <a:solidFill>
-                  <a:srgbClr val="980000"/>
+                  <a:srgbClr val="009242"/>
                 </a:solidFill>
                 <a:latin typeface="Times New Roman" panose="02020603050405020304" charset="0"/>
                 <a:cs typeface="Times New Roman" panose="02020603050405020304" charset="0"/>
@@ -11848,6 +13049,9 @@
               <a:t>Update an Existing Submission-2</a:t>
             </a:r>
             <a:endParaRPr sz="3110" dirty="0">
+              <a:solidFill>
+                <a:srgbClr val="009242"/>
+              </a:solidFill>
               <a:latin typeface="Times New Roman" panose="02020603050405020304" charset="0"/>
               <a:cs typeface="Times New Roman" panose="02020603050405020304" charset="0"/>
             </a:endParaRPr>
@@ -11915,7 +13119,7 @@
             <a:spLocks noGrp="1"/>
           </p:cNvSpPr>
           <p:nvPr>
-            <p:ph type="body" idx="1"/>
+            <p:ph type="body" idx="4294967295"/>
           </p:nvPr>
         </p:nvSpPr>
         <p:spPr>
@@ -11950,7 +13154,7 @@
               <a:buNone/>
             </a:pPr>
             <a:r>
-              <a:rPr lang="en-US" altLang="en-GB" sz="1600">
+              <a:rPr lang="en-US" altLang="en-GB" sz="1600" dirty="0">
                 <a:solidFill>
                   <a:schemeClr val="dk1"/>
                 </a:solidFill>
@@ -11960,7 +13164,7 @@
               <a:t>e)  </a:t>
             </a:r>
             <a:r>
-              <a:rPr lang="en-US" altLang="zh-CN" sz="1600">
+              <a:rPr lang="en-US" altLang="zh-CN" sz="1600" dirty="0">
                 <a:solidFill>
                   <a:schemeClr val="dk1"/>
                 </a:solidFill>
@@ -11987,7 +13191,7 @@
               <a:buSzPts val="1300"/>
               <a:buNone/>
             </a:pPr>
-            <a:endParaRPr lang="en-US" altLang="en-GB" sz="1600">
+            <a:endParaRPr lang="en-US" altLang="en-GB" sz="1600" dirty="0">
               <a:solidFill>
                 <a:schemeClr val="dk1"/>
               </a:solidFill>
@@ -12013,7 +13217,7 @@
               <a:buNone/>
             </a:pPr>
             <a:r>
-              <a:rPr lang="en-US" altLang="en-GB" sz="1600">
+              <a:rPr lang="en-US" altLang="en-GB" sz="1600" dirty="0">
                 <a:solidFill>
                   <a:schemeClr val="dk1"/>
                 </a:solidFill>
@@ -12023,7 +13227,7 @@
               <a:t>f)  </a:t>
             </a:r>
             <a:r>
-              <a:rPr lang="en-US" altLang="zh-CN" sz="1600">
+              <a:rPr lang="en-US" altLang="zh-CN" sz="1600" dirty="0">
                 <a:solidFill>
                   <a:schemeClr val="dk1"/>
                 </a:solidFill>
@@ -12033,7 +13237,7 @@
               <a:t>Click “</a:t>
             </a:r>
             <a:r>
-              <a:rPr lang="en-US" altLang="zh-CN" sz="1600" b="1">
+              <a:rPr lang="en-US" altLang="zh-CN" sz="1600" b="1" dirty="0">
                 <a:solidFill>
                   <a:schemeClr val="dk1"/>
                 </a:solidFill>
@@ -12043,7 +13247,7 @@
               <a:t>Submit</a:t>
             </a:r>
             <a:r>
-              <a:rPr lang="en-US" altLang="zh-CN" sz="1600">
+              <a:rPr lang="en-US" altLang="zh-CN" sz="1600" dirty="0">
                 <a:solidFill>
                   <a:schemeClr val="dk1"/>
                 </a:solidFill>
@@ -12070,7 +13274,7 @@
               <a:buSzPts val="1300"/>
               <a:buNone/>
             </a:pPr>
-            <a:endParaRPr lang="en-US" altLang="en-GB" sz="1600">
+            <a:endParaRPr lang="en-US" altLang="en-GB" sz="1600" dirty="0">
               <a:solidFill>
                 <a:schemeClr val="tx1"/>
               </a:solidFill>
@@ -12096,7 +13300,7 @@
               <a:buNone/>
             </a:pPr>
             <a:r>
-              <a:rPr lang="en-US" altLang="en-GB" sz="1600">
+              <a:rPr lang="en-US" altLang="en-GB" sz="1600" dirty="0">
                 <a:solidFill>
                   <a:schemeClr val="tx1"/>
                 </a:solidFill>
@@ -12106,7 +13310,7 @@
               <a:t>g)  </a:t>
             </a:r>
             <a:r>
-              <a:rPr lang="en-US" altLang="zh-CN" sz="1600">
+              <a:rPr lang="en-US" altLang="zh-CN" sz="1600" dirty="0">
                 <a:solidFill>
                   <a:schemeClr val="tx1"/>
                 </a:solidFill>
@@ -12125,7 +13329,7 @@
             <a:spLocks noGrp="1"/>
           </p:cNvSpPr>
           <p:nvPr>
-            <p:ph type="title"/>
+            <p:ph type="title" idx="4294967295"/>
           </p:nvPr>
         </p:nvSpPr>
         <p:spPr>
@@ -12163,7 +13367,7 @@
             <a:r>
               <a:rPr lang="en-GB" sz="3110" b="1" dirty="0">
                 <a:solidFill>
-                  <a:srgbClr val="980000"/>
+                  <a:srgbClr val="009242"/>
                 </a:solidFill>
                 <a:latin typeface="Times New Roman" panose="02020603050405020304" charset="0"/>
                 <a:cs typeface="Times New Roman" panose="02020603050405020304" charset="0"/>
@@ -12173,7 +13377,7 @@
             <a:r>
               <a:rPr lang="en-US" altLang="zh-CN" sz="3110" b="1" dirty="0">
                 <a:solidFill>
-                  <a:srgbClr val="980000"/>
+                  <a:srgbClr val="009242"/>
                 </a:solidFill>
                 <a:latin typeface="Times New Roman" panose="02020603050405020304" charset="0"/>
                 <a:cs typeface="Times New Roman" panose="02020603050405020304" charset="0"/>
@@ -12181,6 +13385,9 @@
               <a:t>Update an Existing Submission-3</a:t>
             </a:r>
             <a:endParaRPr sz="3110" dirty="0">
+              <a:solidFill>
+                <a:srgbClr val="009242"/>
+              </a:solidFill>
               <a:latin typeface="Times New Roman" panose="02020603050405020304" charset="0"/>
               <a:cs typeface="Times New Roman" panose="02020603050405020304" charset="0"/>
             </a:endParaRPr>
@@ -12300,7 +13507,7 @@
         </p:nvSpPr>
         <p:spPr>
           <a:xfrm>
-            <a:off x="180975" y="4670425"/>
+            <a:off x="180657" y="4510058"/>
             <a:ext cx="8782685" cy="376834"/>
           </a:xfrm>
           <a:prstGeom prst="rect">
@@ -12379,7 +13586,7 @@
             <a:spLocks noGrp="1"/>
           </p:cNvSpPr>
           <p:nvPr>
-            <p:ph type="title"/>
+            <p:ph type="title" idx="4294967295"/>
           </p:nvPr>
         </p:nvSpPr>
         <p:spPr>
@@ -12412,7 +13619,7 @@
             <a:r>
               <a:rPr lang="en-GB" b="1" dirty="0">
                 <a:solidFill>
-                  <a:srgbClr val="980000"/>
+                  <a:srgbClr val="009242"/>
                 </a:solidFill>
                 <a:latin typeface="Times New Roman" panose="02020603050405020304" charset="0"/>
                 <a:cs typeface="Times New Roman" panose="02020603050405020304" charset="0"/>
@@ -12422,7 +13629,7 @@
             <a:r>
               <a:rPr lang="en-US" altLang="zh-CN" b="1" dirty="0">
                 <a:solidFill>
-                  <a:srgbClr val="980000"/>
+                  <a:srgbClr val="009242"/>
                 </a:solidFill>
                 <a:latin typeface="Times New Roman" panose="02020603050405020304" charset="0"/>
                 <a:cs typeface="Times New Roman" panose="02020603050405020304" charset="0"/>
@@ -12439,7 +13646,7 @@
             <a:spLocks noGrp="1"/>
           </p:cNvSpPr>
           <p:nvPr>
-            <p:ph type="body" idx="1"/>
+            <p:ph type="body" idx="4294967295"/>
           </p:nvPr>
         </p:nvSpPr>
         <p:spPr>
@@ -12657,7 +13864,7 @@
             <a:spLocks noGrp="1"/>
           </p:cNvSpPr>
           <p:nvPr>
-            <p:ph type="title"/>
+            <p:ph type="title" idx="4294967295"/>
           </p:nvPr>
         </p:nvSpPr>
         <p:spPr>
@@ -12685,9 +13892,9 @@
               <a:buNone/>
             </a:pPr>
             <a:r>
-              <a:rPr lang="en-GB" b="1">
-                <a:solidFill>
-                  <a:srgbClr val="980000"/>
+              <a:rPr lang="en-GB" b="1" dirty="0">
+                <a:solidFill>
+                  <a:srgbClr val="009242"/>
                 </a:solidFill>
                 <a:latin typeface="Times New Roman" panose="02020603050405020304" charset="0"/>
                 <a:cs typeface="Times New Roman" panose="02020603050405020304" charset="0"/>
@@ -12704,7 +13911,7 @@
             <a:spLocks noGrp="1"/>
           </p:cNvSpPr>
           <p:nvPr>
-            <p:ph type="body" idx="1"/>
+            <p:ph type="body" idx="4294967295"/>
           </p:nvPr>
         </p:nvSpPr>
         <p:spPr>
@@ -13271,7 +14478,7 @@
                 <a:latin typeface="Times New Roman" panose="02020603050405020304" charset="0"/>
                 <a:cs typeface="Times New Roman" panose="02020603050405020304" charset="0"/>
               </a:rPr>
-              <a:t>n		             </a:t>
+              <a:t>n		              </a:t>
             </a:r>
             <a:r>
               <a:rPr lang="en-GB" sz="2000" dirty="0">
@@ -13346,7 +14553,7 @@
             <a:spLocks noGrp="1"/>
           </p:cNvSpPr>
           <p:nvPr>
-            <p:ph type="body" idx="1"/>
+            <p:ph type="body" idx="4294967295"/>
           </p:nvPr>
         </p:nvSpPr>
         <p:spPr>
@@ -13428,8 +14635,8 @@
         </p:nvSpPr>
         <p:spPr>
           <a:xfrm>
-            <a:off x="466640" y="391050"/>
-            <a:ext cx="8520600" cy="572700"/>
+            <a:off x="466640" y="577272"/>
+            <a:ext cx="8520600" cy="386477"/>
           </a:xfrm>
           <a:prstGeom prst="rect">
             <a:avLst/>
@@ -13706,7 +14913,7 @@
             <a:r>
               <a:rPr lang="en-GB" b="1" dirty="0">
                 <a:solidFill>
-                  <a:srgbClr val="980000"/>
+                  <a:srgbClr val="009242"/>
                 </a:solidFill>
                 <a:latin typeface="Times New Roman" panose="02020603050405020304" charset="0"/>
                 <a:cs typeface="Times New Roman" panose="02020603050405020304" charset="0"/>
@@ -13716,7 +14923,7 @@
             <a:r>
               <a:rPr lang="en-US" altLang="zh-CN" b="1" dirty="0">
                 <a:solidFill>
-                  <a:srgbClr val="980000"/>
+                  <a:srgbClr val="009242"/>
                 </a:solidFill>
                 <a:latin typeface="Times New Roman" panose="02020603050405020304" charset="0"/>
                 <a:cs typeface="Times New Roman" panose="02020603050405020304" charset="0"/>
@@ -13788,12 +14995,12 @@
             <a:spLocks noGrp="1"/>
           </p:cNvSpPr>
           <p:nvPr>
-            <p:ph type="body" idx="1"/>
+            <p:ph type="body" idx="4294967295"/>
           </p:nvPr>
         </p:nvSpPr>
         <p:spPr>
           <a:xfrm>
-            <a:off x="245150" y="920875"/>
+            <a:off x="245150" y="1096366"/>
             <a:ext cx="8520600" cy="3416400"/>
           </a:xfrm>
           <a:prstGeom prst="rect">
@@ -13855,7 +15062,7 @@
         </p:blipFill>
         <p:spPr>
           <a:xfrm>
-            <a:off x="4511040" y="1082040"/>
+            <a:off x="4511040" y="1257531"/>
             <a:ext cx="306705" cy="243205"/>
           </a:xfrm>
           <a:prstGeom prst="rect">
@@ -13876,13 +15083,13 @@
             <a:spLocks noGrp="1"/>
           </p:cNvSpPr>
           <p:nvPr>
-            <p:ph type="title"/>
+            <p:ph type="title" idx="4294967295"/>
           </p:nvPr>
         </p:nvSpPr>
         <p:spPr>
           <a:xfrm>
-            <a:off x="311700" y="231665"/>
-            <a:ext cx="8520600" cy="572700"/>
+            <a:off x="311700" y="471055"/>
+            <a:ext cx="8520600" cy="333310"/>
           </a:xfrm>
           <a:prstGeom prst="rect">
             <a:avLst/>
@@ -13909,7 +15116,7 @@
             <a:r>
               <a:rPr lang="en-GB" b="1" dirty="0">
                 <a:solidFill>
-                  <a:srgbClr val="980000"/>
+                  <a:srgbClr val="009242"/>
                 </a:solidFill>
                 <a:latin typeface="Times New Roman" panose="02020603050405020304" charset="0"/>
                 <a:cs typeface="Times New Roman" panose="02020603050405020304" charset="0"/>
@@ -13919,7 +15126,7 @@
             <a:r>
               <a:rPr lang="en-US" altLang="zh-CN" b="1" dirty="0">
                 <a:solidFill>
-                  <a:srgbClr val="980000"/>
+                  <a:srgbClr val="009242"/>
                 </a:solidFill>
                 <a:latin typeface="Times New Roman" panose="02020603050405020304" charset="0"/>
                 <a:cs typeface="Times New Roman" panose="02020603050405020304" charset="0"/>
@@ -13945,7 +15152,7 @@
         </p:blipFill>
         <p:spPr>
           <a:xfrm>
-            <a:off x="1488440" y="1885950"/>
+            <a:off x="1488757" y="1707237"/>
             <a:ext cx="6166485" cy="3097530"/>
           </a:xfrm>
           <a:prstGeom prst="rect">
@@ -13990,7 +15197,7 @@
             <a:spLocks noGrp="1"/>
           </p:cNvSpPr>
           <p:nvPr>
-            <p:ph type="body" idx="1"/>
+            <p:ph type="body" idx="4294967295"/>
           </p:nvPr>
         </p:nvSpPr>
         <p:spPr>
@@ -14371,7 +15578,7 @@
             <a:r>
               <a:rPr lang="en-GB" b="1" dirty="0">
                 <a:solidFill>
-                  <a:srgbClr val="980000"/>
+                  <a:srgbClr val="009242"/>
                 </a:solidFill>
                 <a:latin typeface="Times New Roman" panose="02020603050405020304" charset="0"/>
                 <a:cs typeface="Times New Roman" panose="02020603050405020304" charset="0"/>
@@ -14381,7 +15588,7 @@
             <a:r>
               <a:rPr lang="en-US" altLang="zh-CN" b="1" dirty="0">
                 <a:solidFill>
-                  <a:srgbClr val="980000"/>
+                  <a:srgbClr val="009242"/>
                 </a:solidFill>
                 <a:latin typeface="Times New Roman" panose="02020603050405020304" charset="0"/>
                 <a:cs typeface="Times New Roman" panose="02020603050405020304" charset="0"/>
@@ -14423,13 +15630,13 @@
             <a:spLocks noGrp="1"/>
           </p:cNvSpPr>
           <p:nvPr>
-            <p:ph type="body" idx="1"/>
+            <p:ph type="body" idx="4294967295"/>
           </p:nvPr>
         </p:nvSpPr>
         <p:spPr>
           <a:xfrm>
-            <a:off x="238760" y="786130"/>
-            <a:ext cx="8520430" cy="4154805"/>
+            <a:off x="238760" y="1131455"/>
+            <a:ext cx="8520430" cy="3809480"/>
           </a:xfrm>
           <a:prstGeom prst="rect">
             <a:avLst/>
@@ -14651,13 +15858,13 @@
             <a:spLocks noGrp="1"/>
           </p:cNvSpPr>
           <p:nvPr>
-            <p:ph type="title"/>
+            <p:ph type="title" idx="4294967295"/>
           </p:nvPr>
         </p:nvSpPr>
         <p:spPr>
           <a:xfrm>
-            <a:off x="238675" y="213250"/>
-            <a:ext cx="8520600" cy="572700"/>
+            <a:off x="238675" y="544944"/>
+            <a:ext cx="8520600" cy="241005"/>
           </a:xfrm>
           <a:prstGeom prst="rect">
             <a:avLst/>
@@ -14684,7 +15891,7 @@
             <a:r>
               <a:rPr lang="en-US" altLang="en-GB" sz="3110" b="1" dirty="0">
                 <a:solidFill>
-                  <a:srgbClr val="980000"/>
+                  <a:srgbClr val="009242"/>
                 </a:solidFill>
                 <a:latin typeface="Times New Roman" panose="02020603050405020304" charset="0"/>
                 <a:cs typeface="Times New Roman" panose="02020603050405020304" charset="0"/>
@@ -14694,7 +15901,7 @@
             <a:r>
               <a:rPr lang="en-GB" sz="3110" b="1" dirty="0">
                 <a:solidFill>
-                  <a:srgbClr val="980000"/>
+                  <a:srgbClr val="009242"/>
                 </a:solidFill>
                 <a:latin typeface="Times New Roman" panose="02020603050405020304" charset="0"/>
                 <a:cs typeface="Times New Roman" panose="02020603050405020304" charset="0"/>
@@ -14704,7 +15911,7 @@
             <a:r>
               <a:rPr lang="en-US" altLang="zh-CN" sz="3110" b="1" dirty="0">
                 <a:solidFill>
-                  <a:srgbClr val="980000"/>
+                  <a:srgbClr val="009242"/>
                 </a:solidFill>
                 <a:latin typeface="Times New Roman" panose="02020603050405020304" charset="0"/>
                 <a:cs typeface="Times New Roman" panose="02020603050405020304" charset="0"/>
@@ -14746,7 +15953,7 @@
             <a:spLocks noGrp="1"/>
           </p:cNvSpPr>
           <p:nvPr>
-            <p:ph type="title"/>
+            <p:ph type="title" idx="4294967295"/>
           </p:nvPr>
         </p:nvSpPr>
         <p:spPr>
@@ -14777,9 +15984,9 @@
               <a:buNone/>
             </a:pPr>
             <a:r>
-              <a:rPr lang="en-US" altLang="en-GB" sz="3110" b="1">
-                <a:solidFill>
-                  <a:srgbClr val="980000"/>
+              <a:rPr lang="en-US" altLang="en-GB" sz="3110" b="1" dirty="0">
+                <a:solidFill>
+                  <a:srgbClr val="009242"/>
                 </a:solidFill>
                 <a:latin typeface="Times New Roman" panose="02020603050405020304" charset="0"/>
                 <a:cs typeface="Times New Roman" panose="02020603050405020304" charset="0"/>
@@ -14787,9 +15994,9 @@
               <a:t>6</a:t>
             </a:r>
             <a:r>
-              <a:rPr lang="en-GB" sz="3110" b="1">
-                <a:solidFill>
-                  <a:srgbClr val="980000"/>
+              <a:rPr lang="en-GB" sz="3110" b="1" dirty="0">
+                <a:solidFill>
+                  <a:srgbClr val="009242"/>
                 </a:solidFill>
                 <a:latin typeface="Times New Roman" panose="02020603050405020304" charset="0"/>
                 <a:cs typeface="Times New Roman" panose="02020603050405020304" charset="0"/>
@@ -14797,9 +16004,9 @@
               <a:t>. </a:t>
             </a:r>
             <a:r>
-              <a:rPr lang="en-US" altLang="zh-CN" sz="3110" b="1">
-                <a:solidFill>
-                  <a:srgbClr val="980000"/>
+              <a:rPr lang="en-US" altLang="zh-CN" sz="3110" b="1" dirty="0">
+                <a:solidFill>
+                  <a:srgbClr val="009242"/>
                 </a:solidFill>
                 <a:latin typeface="Times New Roman" panose="02020603050405020304" charset="0"/>
                 <a:cs typeface="Times New Roman" panose="02020603050405020304" charset="0"/>
@@ -14816,13 +16023,13 @@
             <a:spLocks noGrp="1"/>
           </p:cNvSpPr>
           <p:nvPr>
-            <p:ph type="body" idx="1"/>
+            <p:ph type="body" idx="4294967295"/>
           </p:nvPr>
         </p:nvSpPr>
         <p:spPr>
           <a:xfrm>
-            <a:off x="311785" y="1017905"/>
-            <a:ext cx="8578850" cy="4095115"/>
+            <a:off x="311785" y="1126836"/>
+            <a:ext cx="8578850" cy="3986184"/>
           </a:xfrm>
           <a:prstGeom prst="rect">
             <a:avLst/>
@@ -15231,7 +16438,7 @@
             <a:spLocks noGrp="1"/>
           </p:cNvSpPr>
           <p:nvPr>
-            <p:ph type="title"/>
+            <p:ph type="title" idx="4294967295"/>
           </p:nvPr>
         </p:nvSpPr>
         <p:spPr>
@@ -15245,7 +16452,7 @@
         </p:spPr>
         <p:txBody>
           <a:bodyPr spcFirstLastPara="1" wrap="square" lIns="91425" tIns="91425" rIns="91425" bIns="91425" anchor="t" anchorCtr="0">
-            <a:normAutofit fontScale="90000"/>
+            <a:noAutofit/>
           </a:bodyPr>
           <a:lstStyle/>
           <a:p>
@@ -15262,9 +16469,9 @@
               <a:buNone/>
             </a:pPr>
             <a:r>
-              <a:rPr lang="en-US" altLang="en-GB" sz="3110" b="1" dirty="0">
-                <a:solidFill>
-                  <a:srgbClr val="980000"/>
+              <a:rPr lang="en-US" altLang="en-GB" sz="2500" b="1" dirty="0">
+                <a:solidFill>
+                  <a:srgbClr val="009242"/>
                 </a:solidFill>
                 <a:latin typeface="Times New Roman" panose="02020603050405020304" charset="0"/>
                 <a:cs typeface="Times New Roman" panose="02020603050405020304" charset="0"/>
@@ -15272,9 +16479,9 @@
               <a:t>7</a:t>
             </a:r>
             <a:r>
-              <a:rPr lang="en-GB" sz="3110" b="1" dirty="0">
-                <a:solidFill>
-                  <a:srgbClr val="980000"/>
+              <a:rPr lang="en-GB" sz="2500" b="1" dirty="0">
+                <a:solidFill>
+                  <a:srgbClr val="009242"/>
                 </a:solidFill>
                 <a:latin typeface="Times New Roman" panose="02020603050405020304" charset="0"/>
                 <a:cs typeface="Times New Roman" panose="02020603050405020304" charset="0"/>
@@ -15282,9 +16489,9 @@
               <a:t>. </a:t>
             </a:r>
             <a:r>
-              <a:rPr lang="en-US" altLang="zh-CN" sz="3110" b="1" dirty="0">
-                <a:solidFill>
-                  <a:srgbClr val="980000"/>
+              <a:rPr lang="en-US" altLang="zh-CN" sz="2500" b="1" dirty="0">
+                <a:solidFill>
+                  <a:srgbClr val="009242"/>
                 </a:solidFill>
                 <a:latin typeface="Times New Roman" panose="02020603050405020304" charset="0"/>
                 <a:cs typeface="Times New Roman" panose="02020603050405020304" charset="0"/>
@@ -15936,13 +17143,13 @@
             <a:spLocks noGrp="1"/>
           </p:cNvSpPr>
           <p:nvPr>
-            <p:ph type="title"/>
+            <p:ph type="title" idx="4294967295"/>
           </p:nvPr>
         </p:nvSpPr>
         <p:spPr>
           <a:xfrm>
-            <a:off x="238675" y="213250"/>
-            <a:ext cx="8520600" cy="572700"/>
+            <a:off x="238675" y="577272"/>
+            <a:ext cx="8520600" cy="208677"/>
           </a:xfrm>
           <a:prstGeom prst="rect">
             <a:avLst/>
@@ -15950,7 +17157,7 @@
         </p:spPr>
         <p:txBody>
           <a:bodyPr spcFirstLastPara="1" wrap="square" lIns="91425" tIns="91425" rIns="91425" bIns="91425" anchor="t" anchorCtr="0">
-            <a:normAutofit fontScale="90000"/>
+            <a:noAutofit/>
           </a:bodyPr>
           <a:lstStyle/>
           <a:p>
@@ -15967,9 +17174,9 @@
               <a:buNone/>
             </a:pPr>
             <a:r>
-              <a:rPr lang="en-US" altLang="en-GB" sz="3110" b="1" dirty="0">
-                <a:solidFill>
-                  <a:srgbClr val="980000"/>
+              <a:rPr lang="en-US" altLang="en-GB" sz="2400" b="1" dirty="0">
+                <a:solidFill>
+                  <a:srgbClr val="009242"/>
                 </a:solidFill>
                 <a:latin typeface="Times New Roman" panose="02020603050405020304" charset="0"/>
                 <a:cs typeface="Times New Roman" panose="02020603050405020304" charset="0"/>
@@ -15977,9 +17184,9 @@
               <a:t>8</a:t>
             </a:r>
             <a:r>
-              <a:rPr lang="en-GB" sz="3110" b="1" dirty="0">
-                <a:solidFill>
-                  <a:srgbClr val="980000"/>
+              <a:rPr lang="en-GB" sz="2400" b="1" dirty="0">
+                <a:solidFill>
+                  <a:srgbClr val="009242"/>
                 </a:solidFill>
                 <a:latin typeface="Times New Roman" panose="02020603050405020304" charset="0"/>
                 <a:cs typeface="Times New Roman" panose="02020603050405020304" charset="0"/>
@@ -15987,9 +17194,9 @@
               <a:t>. </a:t>
             </a:r>
             <a:r>
-              <a:rPr lang="en-US" altLang="zh-CN" sz="3110" b="1" dirty="0">
-                <a:solidFill>
-                  <a:srgbClr val="980000"/>
+              <a:rPr lang="en-US" altLang="zh-CN" sz="2400" b="1" dirty="0">
+                <a:solidFill>
+                  <a:srgbClr val="009242"/>
                 </a:solidFill>
                 <a:latin typeface="Times New Roman" panose="02020603050405020304" charset="0"/>
                 <a:cs typeface="Times New Roman" panose="02020603050405020304" charset="0"/>
@@ -16007,8 +17214,8 @@
         </p:nvSpPr>
         <p:spPr>
           <a:xfrm>
-            <a:off x="238125" y="915670"/>
-            <a:ext cx="4333875" cy="4144645"/>
+            <a:off x="238125" y="1140691"/>
+            <a:ext cx="4333875" cy="3919624"/>
           </a:xfrm>
           <a:prstGeom prst="rect">
             <a:avLst/>
@@ -16255,8 +17462,8 @@
         </p:nvSpPr>
         <p:spPr>
           <a:xfrm>
-            <a:off x="4572000" y="915670"/>
-            <a:ext cx="4008120" cy="2945130"/>
+            <a:off x="4572000" y="1140690"/>
+            <a:ext cx="4008120" cy="2720109"/>
           </a:xfrm>
           <a:prstGeom prst="rect">
             <a:avLst/>
@@ -16355,7 +17562,7 @@
               <a:buChar char="l"/>
             </a:pPr>
             <a:r>
-              <a:rPr lang="en-US" altLang="zh-CN">
+              <a:rPr lang="en-US" altLang="zh-CN" dirty="0">
                 <a:solidFill>
                   <a:schemeClr val="tx1"/>
                 </a:solidFill>
@@ -16435,7 +17642,7 @@
             <a:spLocks noGrp="1"/>
           </p:cNvSpPr>
           <p:nvPr>
-            <p:ph type="body" idx="1"/>
+            <p:ph type="body" idx="4294967295"/>
           </p:nvPr>
         </p:nvSpPr>
         <p:spPr>
@@ -16495,8 +17702,8 @@
         </p:nvSpPr>
         <p:spPr>
           <a:xfrm>
-            <a:off x="311700" y="418990"/>
-            <a:ext cx="8520600" cy="572700"/>
+            <a:off x="311700" y="581891"/>
+            <a:ext cx="8520600" cy="512617"/>
           </a:xfrm>
           <a:prstGeom prst="rect">
             <a:avLst/>
@@ -16771,9 +17978,9 @@
               <a:buNone/>
             </a:pPr>
             <a:r>
-              <a:rPr lang="en-US" altLang="en-GB" sz="2700" b="1" dirty="0">
-                <a:solidFill>
-                  <a:srgbClr val="980000"/>
+              <a:rPr lang="en-US" altLang="en-GB" sz="2400" b="1" dirty="0">
+                <a:solidFill>
+                  <a:srgbClr val="009242"/>
                 </a:solidFill>
                 <a:latin typeface="Times New Roman" panose="02020603050405020304" charset="0"/>
                 <a:cs typeface="Times New Roman" panose="02020603050405020304" charset="0"/>
@@ -16781,9 +17988,9 @@
               <a:t>9</a:t>
             </a:r>
             <a:r>
-              <a:rPr lang="en-GB" sz="2700" b="1" dirty="0">
-                <a:solidFill>
-                  <a:srgbClr val="980000"/>
+              <a:rPr lang="en-GB" sz="2400" b="1" dirty="0">
+                <a:solidFill>
+                  <a:srgbClr val="009242"/>
                 </a:solidFill>
                 <a:latin typeface="Times New Roman" panose="02020603050405020304" charset="0"/>
                 <a:cs typeface="Times New Roman" panose="02020603050405020304" charset="0"/>
@@ -16791,9 +17998,9 @@
               <a:t>. </a:t>
             </a:r>
             <a:r>
-              <a:rPr lang="en-US" altLang="zh-CN" sz="2700" b="1" dirty="0">
-                <a:solidFill>
-                  <a:srgbClr val="980000"/>
+              <a:rPr lang="en-US" altLang="zh-CN" sz="2400" b="1" dirty="0">
+                <a:solidFill>
+                  <a:srgbClr val="009242"/>
                 </a:solidFill>
                 <a:latin typeface="Times New Roman" panose="02020603050405020304" charset="0"/>
                 <a:cs typeface="Times New Roman" panose="02020603050405020304" charset="0"/>
@@ -16835,7 +18042,7 @@
             <a:spLocks noGrp="1"/>
           </p:cNvSpPr>
           <p:nvPr>
-            <p:ph type="title"/>
+            <p:ph type="title" idx="4294967295"/>
           </p:nvPr>
         </p:nvSpPr>
         <p:spPr>
@@ -16871,7 +18078,7 @@
             <a:r>
               <a:rPr lang="en-US" altLang="zh-CN" sz="3110" b="1" dirty="0">
                 <a:solidFill>
-                  <a:srgbClr val="980000"/>
+                  <a:srgbClr val="009242"/>
                 </a:solidFill>
                 <a:latin typeface="Times New Roman" panose="02020603050405020304" charset="0"/>
                 <a:cs typeface="Times New Roman" panose="02020603050405020304" charset="0"/>
@@ -16881,7 +18088,7 @@
             <a:r>
               <a:rPr lang="en-US" altLang="zh-CN" sz="3110" b="1" dirty="0" err="1">
                 <a:solidFill>
-                  <a:srgbClr val="980000"/>
+                  <a:srgbClr val="009242"/>
                 </a:solidFill>
                 <a:latin typeface="Times New Roman" panose="02020603050405020304" charset="0"/>
                 <a:cs typeface="Times New Roman" panose="02020603050405020304" charset="0"/>
@@ -16891,7 +18098,7 @@
             <a:r>
               <a:rPr lang="en-US" altLang="zh-CN" sz="3110" b="1" dirty="0">
                 <a:solidFill>
-                  <a:srgbClr val="980000"/>
+                  <a:srgbClr val="009242"/>
                 </a:solidFill>
                 <a:latin typeface="Times New Roman" panose="02020603050405020304" charset="0"/>
                 <a:cs typeface="Times New Roman" panose="02020603050405020304" charset="0"/>
@@ -16908,7 +18115,7 @@
             <a:spLocks noGrp="1"/>
           </p:cNvSpPr>
           <p:nvPr>
-            <p:ph type="body" idx="1"/>
+            <p:ph type="body" idx="4294967295"/>
           </p:nvPr>
         </p:nvSpPr>
         <p:spPr>
@@ -17260,7 +18467,7 @@
             <a:spLocks noGrp="1"/>
           </p:cNvSpPr>
           <p:nvPr>
-            <p:ph type="body" idx="1"/>
+            <p:ph type="body" idx="4294967295"/>
           </p:nvPr>
         </p:nvSpPr>
         <p:spPr>
@@ -17650,7 +18857,7 @@
             </a:lvl9pPr>
           </a:lstStyle>
           <a:p>
-            <a:pPr marL="457200" lvl="0" indent="-381000" algn="l" rtl="0">
+            <a:pPr marL="76200" lvl="0" algn="l" rtl="0">
               <a:lnSpc>
                 <a:spcPct val="115000"/>
               </a:lnSpc>
@@ -17664,22 +18871,21 @@
                 <a:srgbClr val="980000"/>
               </a:buClr>
               <a:buSzPts val="2400"/>
-              <a:buAutoNum type="arabicPeriod"/>
             </a:pPr>
             <a:r>
               <a:rPr lang="en-US" altLang="zh-CN" b="1" dirty="0">
                 <a:solidFill>
-                  <a:srgbClr val="980000"/>
-                </a:solidFill>
-                <a:latin typeface="Times New Roman" panose="02020603050405020304" charset="0"/>
-                <a:cs typeface="Times New Roman" panose="02020603050405020304" charset="0"/>
-              </a:rPr>
-              <a:t>Create an </a:t>
+                  <a:srgbClr val="009242"/>
+                </a:solidFill>
+                <a:latin typeface="Times New Roman" panose="02020603050405020304" charset="0"/>
+                <a:cs typeface="Times New Roman" panose="02020603050405020304" charset="0"/>
+              </a:rPr>
+              <a:t>1. Create an </a:t>
             </a:r>
             <a:r>
               <a:rPr lang="en-US" altLang="zh-CN" b="1" dirty="0" err="1">
                 <a:solidFill>
-                  <a:srgbClr val="980000"/>
+                  <a:srgbClr val="009242"/>
                 </a:solidFill>
                 <a:latin typeface="Times New Roman" panose="02020603050405020304" charset="0"/>
                 <a:cs typeface="Times New Roman" panose="02020603050405020304" charset="0"/>
@@ -17689,7 +18895,7 @@
             <a:r>
               <a:rPr lang="en-US" altLang="zh-CN" b="1" dirty="0">
                 <a:solidFill>
-                  <a:srgbClr val="980000"/>
+                  <a:srgbClr val="009242"/>
                 </a:solidFill>
                 <a:latin typeface="Times New Roman" panose="02020603050405020304" charset="0"/>
                 <a:cs typeface="Times New Roman" panose="02020603050405020304" charset="0"/>
@@ -17731,7 +18937,7 @@
             <a:spLocks noGrp="1"/>
           </p:cNvSpPr>
           <p:nvPr>
-            <p:ph type="body" idx="1"/>
+            <p:ph type="body" idx="4294967295"/>
           </p:nvPr>
         </p:nvSpPr>
         <p:spPr>
@@ -17833,7 +19039,7 @@
             <a:spLocks noGrp="1"/>
           </p:cNvSpPr>
           <p:nvPr>
-            <p:ph type="title"/>
+            <p:ph type="title" idx="4294967295"/>
           </p:nvPr>
         </p:nvSpPr>
         <p:spPr>
@@ -17851,36 +19057,29 @@
           </a:bodyPr>
           <a:lstStyle/>
           <a:p>
-            <a:pPr marL="457200" lvl="0" indent="-381000" algn="l" rtl="0">
+            <a:pPr marL="76200" lvl="0">
               <a:lnSpc>
                 <a:spcPct val="115000"/>
               </a:lnSpc>
-              <a:spcBef>
-                <a:spcPts val="0"/>
-              </a:spcBef>
-              <a:spcAft>
-                <a:spcPts val="0"/>
-              </a:spcAft>
               <a:buClr>
                 <a:srgbClr val="980000"/>
               </a:buClr>
               <a:buSzPts val="2400"/>
-              <a:buAutoNum type="arabicPeriod"/>
             </a:pPr>
             <a:r>
-              <a:rPr lang="en-US" altLang="zh-CN" sz="3110" b="1" dirty="0">
-                <a:solidFill>
-                  <a:srgbClr val="980000"/>
-                </a:solidFill>
-                <a:latin typeface="Times New Roman" panose="02020603050405020304" charset="0"/>
-                <a:cs typeface="Times New Roman" panose="02020603050405020304" charset="0"/>
-              </a:rPr>
-              <a:t>Create an </a:t>
-            </a:r>
-            <a:r>
-              <a:rPr lang="en-US" altLang="zh-CN" sz="3110" b="1" dirty="0" err="1">
-                <a:solidFill>
-                  <a:srgbClr val="980000"/>
+              <a:rPr lang="en-US" altLang="zh-CN" sz="3200" b="1" dirty="0">
+                <a:solidFill>
+                  <a:srgbClr val="009242"/>
+                </a:solidFill>
+                <a:latin typeface="Times New Roman" panose="02020603050405020304" charset="0"/>
+                <a:cs typeface="Times New Roman" panose="02020603050405020304" charset="0"/>
+              </a:rPr>
+              <a:t>1. Create an </a:t>
+            </a:r>
+            <a:r>
+              <a:rPr lang="en-US" altLang="zh-CN" sz="3200" b="1" dirty="0" err="1">
+                <a:solidFill>
+                  <a:srgbClr val="009242"/>
                 </a:solidFill>
                 <a:latin typeface="Times New Roman" panose="02020603050405020304" charset="0"/>
                 <a:cs typeface="Times New Roman" panose="02020603050405020304" charset="0"/>
@@ -17888,9 +19087,9 @@
               <a:t>EasyChair</a:t>
             </a:r>
             <a:r>
-              <a:rPr lang="en-US" altLang="zh-CN" sz="3110" b="1" dirty="0">
-                <a:solidFill>
-                  <a:srgbClr val="980000"/>
+              <a:rPr lang="en-US" altLang="zh-CN" sz="3200" b="1" dirty="0">
+                <a:solidFill>
+                  <a:srgbClr val="009242"/>
                 </a:solidFill>
                 <a:latin typeface="Times New Roman" panose="02020603050405020304" charset="0"/>
                 <a:cs typeface="Times New Roman" panose="02020603050405020304" charset="0"/>
@@ -17932,7 +19131,7 @@
             <a:spLocks noGrp="1"/>
           </p:cNvSpPr>
           <p:nvPr>
-            <p:ph type="body" idx="1"/>
+            <p:ph type="body" idx="4294967295"/>
           </p:nvPr>
         </p:nvSpPr>
         <p:spPr>
@@ -18166,80 +19365,6 @@
           </a:ln>
         </p:spPr>
       </p:pic>
-      <p:sp>
-        <p:nvSpPr>
-          <p:cNvPr id="66" name="Google Shape;66;p15"/>
-          <p:cNvSpPr txBox="1">
-            <a:spLocks noGrp="1"/>
-          </p:cNvSpPr>
-          <p:nvPr>
-            <p:ph type="title"/>
-          </p:nvPr>
-        </p:nvSpPr>
-        <p:spPr>
-          <a:xfrm>
-            <a:off x="311700" y="445025"/>
-            <a:ext cx="8520600" cy="572700"/>
-          </a:xfrm>
-          <a:prstGeom prst="rect">
-            <a:avLst/>
-          </a:prstGeom>
-        </p:spPr>
-        <p:txBody>
-          <a:bodyPr spcFirstLastPara="1" wrap="square" lIns="91425" tIns="91425" rIns="91425" bIns="91425" anchor="t" anchorCtr="0">
-            <a:normAutofit fontScale="90000"/>
-          </a:bodyPr>
-          <a:lstStyle/>
-          <a:p>
-            <a:pPr marL="457200" lvl="0" indent="-381000" algn="l" rtl="0">
-              <a:lnSpc>
-                <a:spcPct val="115000"/>
-              </a:lnSpc>
-              <a:spcBef>
-                <a:spcPts val="0"/>
-              </a:spcBef>
-              <a:spcAft>
-                <a:spcPts val="0"/>
-              </a:spcAft>
-              <a:buClr>
-                <a:srgbClr val="980000"/>
-              </a:buClr>
-              <a:buSzPts val="2400"/>
-              <a:buAutoNum type="arabicPeriod"/>
-            </a:pPr>
-            <a:r>
-              <a:rPr lang="en-US" altLang="zh-CN" sz="3110" b="1" dirty="0">
-                <a:solidFill>
-                  <a:srgbClr val="980000"/>
-                </a:solidFill>
-                <a:latin typeface="Times New Roman" panose="02020603050405020304" charset="0"/>
-                <a:cs typeface="Times New Roman" panose="02020603050405020304" charset="0"/>
-              </a:rPr>
-              <a:t>Create an </a:t>
-            </a:r>
-            <a:r>
-              <a:rPr lang="en-US" altLang="zh-CN" sz="3110" b="1" dirty="0" err="1">
-                <a:solidFill>
-                  <a:srgbClr val="980000"/>
-                </a:solidFill>
-                <a:latin typeface="Times New Roman" panose="02020603050405020304" charset="0"/>
-                <a:cs typeface="Times New Roman" panose="02020603050405020304" charset="0"/>
-              </a:rPr>
-              <a:t>EasyChair</a:t>
-            </a:r>
-            <a:r>
-              <a:rPr lang="en-US" altLang="zh-CN" sz="3110" b="1" dirty="0">
-                <a:solidFill>
-                  <a:srgbClr val="980000"/>
-                </a:solidFill>
-                <a:latin typeface="Times New Roman" panose="02020603050405020304" charset="0"/>
-                <a:cs typeface="Times New Roman" panose="02020603050405020304" charset="0"/>
-              </a:rPr>
-              <a:t> Account-4</a:t>
-            </a:r>
-          </a:p>
-        </p:txBody>
-      </p:sp>
       <p:pic>
         <p:nvPicPr>
           <p:cNvPr id="96" name="Google Shape;96;p19"/>
@@ -18272,6 +19397,327 @@
           </a:ln>
         </p:spPr>
       </p:pic>
+      <p:sp>
+        <p:nvSpPr>
+          <p:cNvPr id="2" name="Google Shape;66;p15">
+            <a:extLst>
+              <a:ext uri="{FF2B5EF4-FFF2-40B4-BE49-F238E27FC236}">
+                <a16:creationId xmlns:a16="http://schemas.microsoft.com/office/drawing/2014/main" id="{5F38D45D-B260-2D30-7112-1124FF767EFD}"/>
+              </a:ext>
+            </a:extLst>
+          </p:cNvPr>
+          <p:cNvSpPr txBox="1">
+            <a:spLocks/>
+          </p:cNvSpPr>
+          <p:nvPr/>
+        </p:nvSpPr>
+        <p:spPr>
+          <a:xfrm>
+            <a:off x="311700" y="445025"/>
+            <a:ext cx="8520600" cy="572700"/>
+          </a:xfrm>
+          <a:prstGeom prst="rect">
+            <a:avLst/>
+          </a:prstGeom>
+          <a:noFill/>
+          <a:ln>
+            <a:noFill/>
+          </a:ln>
+        </p:spPr>
+        <p:txBody>
+          <a:bodyPr spcFirstLastPara="1" wrap="square" lIns="91425" tIns="91425" rIns="91425" bIns="91425" anchor="t" anchorCtr="0">
+            <a:normAutofit fontScale="82500" lnSpcReduction="20000"/>
+          </a:bodyPr>
+          <a:lstStyle>
+            <a:defPPr marR="0" lvl="0" algn="l" rtl="0">
+              <a:lnSpc>
+                <a:spcPct val="100000"/>
+              </a:lnSpc>
+              <a:spcBef>
+                <a:spcPts val="0"/>
+              </a:spcBef>
+              <a:spcAft>
+                <a:spcPts val="0"/>
+              </a:spcAft>
+            </a:defPPr>
+            <a:lvl1pPr marR="0" lvl="0" algn="l" rtl="0">
+              <a:lnSpc>
+                <a:spcPct val="100000"/>
+              </a:lnSpc>
+              <a:spcBef>
+                <a:spcPts val="0"/>
+              </a:spcBef>
+              <a:spcAft>
+                <a:spcPts val="0"/>
+              </a:spcAft>
+              <a:buClr>
+                <a:schemeClr val="dk1"/>
+              </a:buClr>
+              <a:buSzPts val="2800"/>
+              <a:buFont typeface="Arial" panose="020B0604020202020204"/>
+              <a:buNone/>
+              <a:defRPr sz="2800" b="0" i="0" u="none" strike="noStrike" cap="none">
+                <a:solidFill>
+                  <a:schemeClr val="dk1"/>
+                </a:solidFill>
+                <a:latin typeface="Arial" panose="020B0604020202020204"/>
+                <a:ea typeface="Arial" panose="020B0604020202020204"/>
+                <a:cs typeface="Arial" panose="020B0604020202020204"/>
+                <a:sym typeface="Arial" panose="020B0604020202020204"/>
+              </a:defRPr>
+            </a:lvl1pPr>
+            <a:lvl2pPr marR="0" lvl="1" algn="l" rtl="0">
+              <a:lnSpc>
+                <a:spcPct val="100000"/>
+              </a:lnSpc>
+              <a:spcBef>
+                <a:spcPts val="0"/>
+              </a:spcBef>
+              <a:spcAft>
+                <a:spcPts val="0"/>
+              </a:spcAft>
+              <a:buClr>
+                <a:schemeClr val="dk1"/>
+              </a:buClr>
+              <a:buSzPts val="2800"/>
+              <a:buFont typeface="Arial" panose="020B0604020202020204"/>
+              <a:buNone/>
+              <a:defRPr sz="2800" b="0" i="0" u="none" strike="noStrike" cap="none">
+                <a:solidFill>
+                  <a:schemeClr val="dk1"/>
+                </a:solidFill>
+                <a:latin typeface="Arial" panose="020B0604020202020204"/>
+                <a:ea typeface="Arial" panose="020B0604020202020204"/>
+                <a:cs typeface="Arial" panose="020B0604020202020204"/>
+                <a:sym typeface="Arial" panose="020B0604020202020204"/>
+              </a:defRPr>
+            </a:lvl2pPr>
+            <a:lvl3pPr marR="0" lvl="2" algn="l" rtl="0">
+              <a:lnSpc>
+                <a:spcPct val="100000"/>
+              </a:lnSpc>
+              <a:spcBef>
+                <a:spcPts val="0"/>
+              </a:spcBef>
+              <a:spcAft>
+                <a:spcPts val="0"/>
+              </a:spcAft>
+              <a:buClr>
+                <a:schemeClr val="dk1"/>
+              </a:buClr>
+              <a:buSzPts val="2800"/>
+              <a:buFont typeface="Arial" panose="020B0604020202020204"/>
+              <a:buNone/>
+              <a:defRPr sz="2800" b="0" i="0" u="none" strike="noStrike" cap="none">
+                <a:solidFill>
+                  <a:schemeClr val="dk1"/>
+                </a:solidFill>
+                <a:latin typeface="Arial" panose="020B0604020202020204"/>
+                <a:ea typeface="Arial" panose="020B0604020202020204"/>
+                <a:cs typeface="Arial" panose="020B0604020202020204"/>
+                <a:sym typeface="Arial" panose="020B0604020202020204"/>
+              </a:defRPr>
+            </a:lvl3pPr>
+            <a:lvl4pPr marR="0" lvl="3" algn="l" rtl="0">
+              <a:lnSpc>
+                <a:spcPct val="100000"/>
+              </a:lnSpc>
+              <a:spcBef>
+                <a:spcPts val="0"/>
+              </a:spcBef>
+              <a:spcAft>
+                <a:spcPts val="0"/>
+              </a:spcAft>
+              <a:buClr>
+                <a:schemeClr val="dk1"/>
+              </a:buClr>
+              <a:buSzPts val="2800"/>
+              <a:buFont typeface="Arial" panose="020B0604020202020204"/>
+              <a:buNone/>
+              <a:defRPr sz="2800" b="0" i="0" u="none" strike="noStrike" cap="none">
+                <a:solidFill>
+                  <a:schemeClr val="dk1"/>
+                </a:solidFill>
+                <a:latin typeface="Arial" panose="020B0604020202020204"/>
+                <a:ea typeface="Arial" panose="020B0604020202020204"/>
+                <a:cs typeface="Arial" panose="020B0604020202020204"/>
+                <a:sym typeface="Arial" panose="020B0604020202020204"/>
+              </a:defRPr>
+            </a:lvl4pPr>
+            <a:lvl5pPr marR="0" lvl="4" algn="l" rtl="0">
+              <a:lnSpc>
+                <a:spcPct val="100000"/>
+              </a:lnSpc>
+              <a:spcBef>
+                <a:spcPts val="0"/>
+              </a:spcBef>
+              <a:spcAft>
+                <a:spcPts val="0"/>
+              </a:spcAft>
+              <a:buClr>
+                <a:schemeClr val="dk1"/>
+              </a:buClr>
+              <a:buSzPts val="2800"/>
+              <a:buFont typeface="Arial" panose="020B0604020202020204"/>
+              <a:buNone/>
+              <a:defRPr sz="2800" b="0" i="0" u="none" strike="noStrike" cap="none">
+                <a:solidFill>
+                  <a:schemeClr val="dk1"/>
+                </a:solidFill>
+                <a:latin typeface="Arial" panose="020B0604020202020204"/>
+                <a:ea typeface="Arial" panose="020B0604020202020204"/>
+                <a:cs typeface="Arial" panose="020B0604020202020204"/>
+                <a:sym typeface="Arial" panose="020B0604020202020204"/>
+              </a:defRPr>
+            </a:lvl5pPr>
+            <a:lvl6pPr marR="0" lvl="5" algn="l" rtl="0">
+              <a:lnSpc>
+                <a:spcPct val="100000"/>
+              </a:lnSpc>
+              <a:spcBef>
+                <a:spcPts val="0"/>
+              </a:spcBef>
+              <a:spcAft>
+                <a:spcPts val="0"/>
+              </a:spcAft>
+              <a:buClr>
+                <a:schemeClr val="dk1"/>
+              </a:buClr>
+              <a:buSzPts val="2800"/>
+              <a:buFont typeface="Arial" panose="020B0604020202020204"/>
+              <a:buNone/>
+              <a:defRPr sz="2800" b="0" i="0" u="none" strike="noStrike" cap="none">
+                <a:solidFill>
+                  <a:schemeClr val="dk1"/>
+                </a:solidFill>
+                <a:latin typeface="Arial" panose="020B0604020202020204"/>
+                <a:ea typeface="Arial" panose="020B0604020202020204"/>
+                <a:cs typeface="Arial" panose="020B0604020202020204"/>
+                <a:sym typeface="Arial" panose="020B0604020202020204"/>
+              </a:defRPr>
+            </a:lvl6pPr>
+            <a:lvl7pPr marR="0" lvl="6" algn="l" rtl="0">
+              <a:lnSpc>
+                <a:spcPct val="100000"/>
+              </a:lnSpc>
+              <a:spcBef>
+                <a:spcPts val="0"/>
+              </a:spcBef>
+              <a:spcAft>
+                <a:spcPts val="0"/>
+              </a:spcAft>
+              <a:buClr>
+                <a:schemeClr val="dk1"/>
+              </a:buClr>
+              <a:buSzPts val="2800"/>
+              <a:buFont typeface="Arial" panose="020B0604020202020204"/>
+              <a:buNone/>
+              <a:defRPr sz="2800" b="0" i="0" u="none" strike="noStrike" cap="none">
+                <a:solidFill>
+                  <a:schemeClr val="dk1"/>
+                </a:solidFill>
+                <a:latin typeface="Arial" panose="020B0604020202020204"/>
+                <a:ea typeface="Arial" panose="020B0604020202020204"/>
+                <a:cs typeface="Arial" panose="020B0604020202020204"/>
+                <a:sym typeface="Arial" panose="020B0604020202020204"/>
+              </a:defRPr>
+            </a:lvl7pPr>
+            <a:lvl8pPr marR="0" lvl="7" algn="l" rtl="0">
+              <a:lnSpc>
+                <a:spcPct val="100000"/>
+              </a:lnSpc>
+              <a:spcBef>
+                <a:spcPts val="0"/>
+              </a:spcBef>
+              <a:spcAft>
+                <a:spcPts val="0"/>
+              </a:spcAft>
+              <a:buClr>
+                <a:schemeClr val="dk1"/>
+              </a:buClr>
+              <a:buSzPts val="2800"/>
+              <a:buFont typeface="Arial" panose="020B0604020202020204"/>
+              <a:buNone/>
+              <a:defRPr sz="2800" b="0" i="0" u="none" strike="noStrike" cap="none">
+                <a:solidFill>
+                  <a:schemeClr val="dk1"/>
+                </a:solidFill>
+                <a:latin typeface="Arial" panose="020B0604020202020204"/>
+                <a:ea typeface="Arial" panose="020B0604020202020204"/>
+                <a:cs typeface="Arial" panose="020B0604020202020204"/>
+                <a:sym typeface="Arial" panose="020B0604020202020204"/>
+              </a:defRPr>
+            </a:lvl8pPr>
+            <a:lvl9pPr marR="0" lvl="8" algn="l" rtl="0">
+              <a:lnSpc>
+                <a:spcPct val="100000"/>
+              </a:lnSpc>
+              <a:spcBef>
+                <a:spcPts val="0"/>
+              </a:spcBef>
+              <a:spcAft>
+                <a:spcPts val="0"/>
+              </a:spcAft>
+              <a:buClr>
+                <a:schemeClr val="dk1"/>
+              </a:buClr>
+              <a:buSzPts val="2800"/>
+              <a:buFont typeface="Arial" panose="020B0604020202020204"/>
+              <a:buNone/>
+              <a:defRPr sz="2800" b="0" i="0" u="none" strike="noStrike" cap="none">
+                <a:solidFill>
+                  <a:schemeClr val="dk1"/>
+                </a:solidFill>
+                <a:latin typeface="Arial" panose="020B0604020202020204"/>
+                <a:ea typeface="Arial" panose="020B0604020202020204"/>
+                <a:cs typeface="Arial" panose="020B0604020202020204"/>
+                <a:sym typeface="Arial" panose="020B0604020202020204"/>
+              </a:defRPr>
+            </a:lvl9pPr>
+          </a:lstStyle>
+          <a:p>
+            <a:pPr marL="76200">
+              <a:lnSpc>
+                <a:spcPct val="115000"/>
+              </a:lnSpc>
+              <a:buClr>
+                <a:srgbClr val="980000"/>
+              </a:buClr>
+              <a:buSzPts val="2400"/>
+            </a:pPr>
+            <a:r>
+              <a:rPr lang="en-US" altLang="zh-CN" sz="3200" b="1" dirty="0">
+                <a:solidFill>
+                  <a:srgbClr val="009242"/>
+                </a:solidFill>
+                <a:latin typeface="Times New Roman" panose="02020603050405020304" charset="0"/>
+                <a:cs typeface="Times New Roman" panose="02020603050405020304" charset="0"/>
+              </a:rPr>
+              <a:t>1. Create an </a:t>
+            </a:r>
+            <a:r>
+              <a:rPr lang="en-US" altLang="zh-CN" sz="3200" b="1" dirty="0" err="1">
+                <a:solidFill>
+                  <a:srgbClr val="009242"/>
+                </a:solidFill>
+                <a:latin typeface="Times New Roman" panose="02020603050405020304" charset="0"/>
+                <a:cs typeface="Times New Roman" panose="02020603050405020304" charset="0"/>
+              </a:rPr>
+              <a:t>EasyChair</a:t>
+            </a:r>
+            <a:r>
+              <a:rPr lang="en-US" altLang="zh-CN" sz="3200" b="1" dirty="0">
+                <a:solidFill>
+                  <a:srgbClr val="009242"/>
+                </a:solidFill>
+                <a:latin typeface="Times New Roman" panose="02020603050405020304" charset="0"/>
+                <a:cs typeface="Times New Roman" panose="02020603050405020304" charset="0"/>
+              </a:rPr>
+              <a:t> Account-4</a:t>
+            </a:r>
+          </a:p>
+        </p:txBody>
+      </p:sp>
     </p:spTree>
   </p:cSld>
   <p:clrMapOvr>
@@ -18304,7 +19750,7 @@
             <a:spLocks noGrp="1"/>
           </p:cNvSpPr>
           <p:nvPr>
-            <p:ph type="body" idx="1"/>
+            <p:ph type="body" idx="4294967295"/>
           </p:nvPr>
         </p:nvSpPr>
         <p:spPr>
@@ -18458,13 +19904,17 @@
       </p:pic>
       <p:sp>
         <p:nvSpPr>
-          <p:cNvPr id="66" name="Google Shape;66;p15"/>
+          <p:cNvPr id="2" name="Google Shape;66;p15">
+            <a:extLst>
+              <a:ext uri="{FF2B5EF4-FFF2-40B4-BE49-F238E27FC236}">
+                <a16:creationId xmlns:a16="http://schemas.microsoft.com/office/drawing/2014/main" id="{5430D3CE-3759-F9E0-7FF4-ED24121A8FA6}"/>
+              </a:ext>
+            </a:extLst>
+          </p:cNvPr>
           <p:cNvSpPr txBox="1">
-            <a:spLocks noGrp="1"/>
+            <a:spLocks/>
           </p:cNvSpPr>
-          <p:nvPr>
-            <p:ph type="title"/>
-          </p:nvPr>
+          <p:nvPr/>
         </p:nvSpPr>
         <p:spPr>
           <a:xfrm>
@@ -18474,58 +19924,298 @@
           <a:prstGeom prst="rect">
             <a:avLst/>
           </a:prstGeom>
+          <a:noFill/>
+          <a:ln>
+            <a:noFill/>
+          </a:ln>
         </p:spPr>
         <p:txBody>
           <a:bodyPr spcFirstLastPara="1" wrap="square" lIns="91425" tIns="91425" rIns="91425" bIns="91425" anchor="t" anchorCtr="0">
-            <a:normAutofit fontScale="90000"/>
+            <a:normAutofit fontScale="82500" lnSpcReduction="20000"/>
           </a:bodyPr>
-          <a:lstStyle/>
+          <a:lstStyle>
+            <a:defPPr marR="0" lvl="0" algn="l" rtl="0">
+              <a:lnSpc>
+                <a:spcPct val="100000"/>
+              </a:lnSpc>
+              <a:spcBef>
+                <a:spcPts val="0"/>
+              </a:spcBef>
+              <a:spcAft>
+                <a:spcPts val="0"/>
+              </a:spcAft>
+            </a:defPPr>
+            <a:lvl1pPr marR="0" lvl="0" algn="l" rtl="0">
+              <a:lnSpc>
+                <a:spcPct val="100000"/>
+              </a:lnSpc>
+              <a:spcBef>
+                <a:spcPts val="0"/>
+              </a:spcBef>
+              <a:spcAft>
+                <a:spcPts val="0"/>
+              </a:spcAft>
+              <a:buClr>
+                <a:schemeClr val="dk1"/>
+              </a:buClr>
+              <a:buSzPts val="2800"/>
+              <a:buFont typeface="Arial" panose="020B0604020202020204"/>
+              <a:buNone/>
+              <a:defRPr sz="2800" b="0" i="0" u="none" strike="noStrike" cap="none">
+                <a:solidFill>
+                  <a:schemeClr val="dk1"/>
+                </a:solidFill>
+                <a:latin typeface="Arial" panose="020B0604020202020204"/>
+                <a:ea typeface="Arial" panose="020B0604020202020204"/>
+                <a:cs typeface="Arial" panose="020B0604020202020204"/>
+                <a:sym typeface="Arial" panose="020B0604020202020204"/>
+              </a:defRPr>
+            </a:lvl1pPr>
+            <a:lvl2pPr marR="0" lvl="1" algn="l" rtl="0">
+              <a:lnSpc>
+                <a:spcPct val="100000"/>
+              </a:lnSpc>
+              <a:spcBef>
+                <a:spcPts val="0"/>
+              </a:spcBef>
+              <a:spcAft>
+                <a:spcPts val="0"/>
+              </a:spcAft>
+              <a:buClr>
+                <a:schemeClr val="dk1"/>
+              </a:buClr>
+              <a:buSzPts val="2800"/>
+              <a:buFont typeface="Arial" panose="020B0604020202020204"/>
+              <a:buNone/>
+              <a:defRPr sz="2800" b="0" i="0" u="none" strike="noStrike" cap="none">
+                <a:solidFill>
+                  <a:schemeClr val="dk1"/>
+                </a:solidFill>
+                <a:latin typeface="Arial" panose="020B0604020202020204"/>
+                <a:ea typeface="Arial" panose="020B0604020202020204"/>
+                <a:cs typeface="Arial" panose="020B0604020202020204"/>
+                <a:sym typeface="Arial" panose="020B0604020202020204"/>
+              </a:defRPr>
+            </a:lvl2pPr>
+            <a:lvl3pPr marR="0" lvl="2" algn="l" rtl="0">
+              <a:lnSpc>
+                <a:spcPct val="100000"/>
+              </a:lnSpc>
+              <a:spcBef>
+                <a:spcPts val="0"/>
+              </a:spcBef>
+              <a:spcAft>
+                <a:spcPts val="0"/>
+              </a:spcAft>
+              <a:buClr>
+                <a:schemeClr val="dk1"/>
+              </a:buClr>
+              <a:buSzPts val="2800"/>
+              <a:buFont typeface="Arial" panose="020B0604020202020204"/>
+              <a:buNone/>
+              <a:defRPr sz="2800" b="0" i="0" u="none" strike="noStrike" cap="none">
+                <a:solidFill>
+                  <a:schemeClr val="dk1"/>
+                </a:solidFill>
+                <a:latin typeface="Arial" panose="020B0604020202020204"/>
+                <a:ea typeface="Arial" panose="020B0604020202020204"/>
+                <a:cs typeface="Arial" panose="020B0604020202020204"/>
+                <a:sym typeface="Arial" panose="020B0604020202020204"/>
+              </a:defRPr>
+            </a:lvl3pPr>
+            <a:lvl4pPr marR="0" lvl="3" algn="l" rtl="0">
+              <a:lnSpc>
+                <a:spcPct val="100000"/>
+              </a:lnSpc>
+              <a:spcBef>
+                <a:spcPts val="0"/>
+              </a:spcBef>
+              <a:spcAft>
+                <a:spcPts val="0"/>
+              </a:spcAft>
+              <a:buClr>
+                <a:schemeClr val="dk1"/>
+              </a:buClr>
+              <a:buSzPts val="2800"/>
+              <a:buFont typeface="Arial" panose="020B0604020202020204"/>
+              <a:buNone/>
+              <a:defRPr sz="2800" b="0" i="0" u="none" strike="noStrike" cap="none">
+                <a:solidFill>
+                  <a:schemeClr val="dk1"/>
+                </a:solidFill>
+                <a:latin typeface="Arial" panose="020B0604020202020204"/>
+                <a:ea typeface="Arial" panose="020B0604020202020204"/>
+                <a:cs typeface="Arial" panose="020B0604020202020204"/>
+                <a:sym typeface="Arial" panose="020B0604020202020204"/>
+              </a:defRPr>
+            </a:lvl4pPr>
+            <a:lvl5pPr marR="0" lvl="4" algn="l" rtl="0">
+              <a:lnSpc>
+                <a:spcPct val="100000"/>
+              </a:lnSpc>
+              <a:spcBef>
+                <a:spcPts val="0"/>
+              </a:spcBef>
+              <a:spcAft>
+                <a:spcPts val="0"/>
+              </a:spcAft>
+              <a:buClr>
+                <a:schemeClr val="dk1"/>
+              </a:buClr>
+              <a:buSzPts val="2800"/>
+              <a:buFont typeface="Arial" panose="020B0604020202020204"/>
+              <a:buNone/>
+              <a:defRPr sz="2800" b="0" i="0" u="none" strike="noStrike" cap="none">
+                <a:solidFill>
+                  <a:schemeClr val="dk1"/>
+                </a:solidFill>
+                <a:latin typeface="Arial" panose="020B0604020202020204"/>
+                <a:ea typeface="Arial" panose="020B0604020202020204"/>
+                <a:cs typeface="Arial" panose="020B0604020202020204"/>
+                <a:sym typeface="Arial" panose="020B0604020202020204"/>
+              </a:defRPr>
+            </a:lvl5pPr>
+            <a:lvl6pPr marR="0" lvl="5" algn="l" rtl="0">
+              <a:lnSpc>
+                <a:spcPct val="100000"/>
+              </a:lnSpc>
+              <a:spcBef>
+                <a:spcPts val="0"/>
+              </a:spcBef>
+              <a:spcAft>
+                <a:spcPts val="0"/>
+              </a:spcAft>
+              <a:buClr>
+                <a:schemeClr val="dk1"/>
+              </a:buClr>
+              <a:buSzPts val="2800"/>
+              <a:buFont typeface="Arial" panose="020B0604020202020204"/>
+              <a:buNone/>
+              <a:defRPr sz="2800" b="0" i="0" u="none" strike="noStrike" cap="none">
+                <a:solidFill>
+                  <a:schemeClr val="dk1"/>
+                </a:solidFill>
+                <a:latin typeface="Arial" panose="020B0604020202020204"/>
+                <a:ea typeface="Arial" panose="020B0604020202020204"/>
+                <a:cs typeface="Arial" panose="020B0604020202020204"/>
+                <a:sym typeface="Arial" panose="020B0604020202020204"/>
+              </a:defRPr>
+            </a:lvl6pPr>
+            <a:lvl7pPr marR="0" lvl="6" algn="l" rtl="0">
+              <a:lnSpc>
+                <a:spcPct val="100000"/>
+              </a:lnSpc>
+              <a:spcBef>
+                <a:spcPts val="0"/>
+              </a:spcBef>
+              <a:spcAft>
+                <a:spcPts val="0"/>
+              </a:spcAft>
+              <a:buClr>
+                <a:schemeClr val="dk1"/>
+              </a:buClr>
+              <a:buSzPts val="2800"/>
+              <a:buFont typeface="Arial" panose="020B0604020202020204"/>
+              <a:buNone/>
+              <a:defRPr sz="2800" b="0" i="0" u="none" strike="noStrike" cap="none">
+                <a:solidFill>
+                  <a:schemeClr val="dk1"/>
+                </a:solidFill>
+                <a:latin typeface="Arial" panose="020B0604020202020204"/>
+                <a:ea typeface="Arial" panose="020B0604020202020204"/>
+                <a:cs typeface="Arial" panose="020B0604020202020204"/>
+                <a:sym typeface="Arial" panose="020B0604020202020204"/>
+              </a:defRPr>
+            </a:lvl7pPr>
+            <a:lvl8pPr marR="0" lvl="7" algn="l" rtl="0">
+              <a:lnSpc>
+                <a:spcPct val="100000"/>
+              </a:lnSpc>
+              <a:spcBef>
+                <a:spcPts val="0"/>
+              </a:spcBef>
+              <a:spcAft>
+                <a:spcPts val="0"/>
+              </a:spcAft>
+              <a:buClr>
+                <a:schemeClr val="dk1"/>
+              </a:buClr>
+              <a:buSzPts val="2800"/>
+              <a:buFont typeface="Arial" panose="020B0604020202020204"/>
+              <a:buNone/>
+              <a:defRPr sz="2800" b="0" i="0" u="none" strike="noStrike" cap="none">
+                <a:solidFill>
+                  <a:schemeClr val="dk1"/>
+                </a:solidFill>
+                <a:latin typeface="Arial" panose="020B0604020202020204"/>
+                <a:ea typeface="Arial" panose="020B0604020202020204"/>
+                <a:cs typeface="Arial" panose="020B0604020202020204"/>
+                <a:sym typeface="Arial" panose="020B0604020202020204"/>
+              </a:defRPr>
+            </a:lvl8pPr>
+            <a:lvl9pPr marR="0" lvl="8" algn="l" rtl="0">
+              <a:lnSpc>
+                <a:spcPct val="100000"/>
+              </a:lnSpc>
+              <a:spcBef>
+                <a:spcPts val="0"/>
+              </a:spcBef>
+              <a:spcAft>
+                <a:spcPts val="0"/>
+              </a:spcAft>
+              <a:buClr>
+                <a:schemeClr val="dk1"/>
+              </a:buClr>
+              <a:buSzPts val="2800"/>
+              <a:buFont typeface="Arial" panose="020B0604020202020204"/>
+              <a:buNone/>
+              <a:defRPr sz="2800" b="0" i="0" u="none" strike="noStrike" cap="none">
+                <a:solidFill>
+                  <a:schemeClr val="dk1"/>
+                </a:solidFill>
+                <a:latin typeface="Arial" panose="020B0604020202020204"/>
+                <a:ea typeface="Arial" panose="020B0604020202020204"/>
+                <a:cs typeface="Arial" panose="020B0604020202020204"/>
+                <a:sym typeface="Arial" panose="020B0604020202020204"/>
+              </a:defRPr>
+            </a:lvl9pPr>
+          </a:lstStyle>
           <a:p>
-            <a:pPr marL="457200" lvl="0" indent="-381000" algn="l" rtl="0">
+            <a:pPr marL="76200">
               <a:lnSpc>
                 <a:spcPct val="115000"/>
               </a:lnSpc>
-              <a:spcBef>
-                <a:spcPts val="0"/>
-              </a:spcBef>
-              <a:spcAft>
-                <a:spcPts val="0"/>
-              </a:spcAft>
               <a:buClr>
                 <a:srgbClr val="980000"/>
               </a:buClr>
               <a:buSzPts val="2400"/>
-              <a:buAutoNum type="arabicPeriod"/>
             </a:pPr>
             <a:r>
-              <a:rPr lang="en-US" altLang="zh-CN" sz="3110" b="1" dirty="0">
-                <a:solidFill>
-                  <a:srgbClr val="980000"/>
-                </a:solidFill>
-                <a:latin typeface="Times New Roman" panose="02020603050405020304" charset="0"/>
-                <a:ea typeface="SimSun" panose="02010600030101010101" pitchFamily="2" charset="-122"/>
-                <a:cs typeface="Times New Roman" panose="02020603050405020304" charset="0"/>
-              </a:rPr>
-              <a:t>Create an </a:t>
-            </a:r>
-            <a:r>
-              <a:rPr lang="en-US" altLang="zh-CN" sz="3110" b="1" dirty="0" err="1">
-                <a:solidFill>
-                  <a:srgbClr val="980000"/>
-                </a:solidFill>
-                <a:latin typeface="Times New Roman" panose="02020603050405020304" charset="0"/>
-                <a:ea typeface="SimSun" panose="02010600030101010101" pitchFamily="2" charset="-122"/>
+              <a:rPr lang="en-US" altLang="zh-CN" sz="3200" b="1" dirty="0">
+                <a:solidFill>
+                  <a:srgbClr val="009242"/>
+                </a:solidFill>
+                <a:latin typeface="Times New Roman" panose="02020603050405020304" charset="0"/>
+                <a:cs typeface="Times New Roman" panose="02020603050405020304" charset="0"/>
+              </a:rPr>
+              <a:t>1. Create an </a:t>
+            </a:r>
+            <a:r>
+              <a:rPr lang="en-US" altLang="zh-CN" sz="3200" b="1" dirty="0" err="1">
+                <a:solidFill>
+                  <a:srgbClr val="009242"/>
+                </a:solidFill>
+                <a:latin typeface="Times New Roman" panose="02020603050405020304" charset="0"/>
                 <a:cs typeface="Times New Roman" panose="02020603050405020304" charset="0"/>
               </a:rPr>
               <a:t>EasyChair</a:t>
             </a:r>
             <a:r>
-              <a:rPr lang="en-US" altLang="zh-CN" sz="3110" b="1" dirty="0">
-                <a:solidFill>
-                  <a:srgbClr val="980000"/>
-                </a:solidFill>
-                <a:latin typeface="Times New Roman" panose="02020603050405020304" charset="0"/>
-                <a:ea typeface="SimSun" panose="02010600030101010101" pitchFamily="2" charset="-122"/>
+              <a:rPr lang="en-US" altLang="zh-CN" sz="3200" b="1" dirty="0">
+                <a:solidFill>
+                  <a:srgbClr val="009242"/>
+                </a:solidFill>
+                <a:latin typeface="Times New Roman" panose="02020603050405020304" charset="0"/>
                 <a:cs typeface="Times New Roman" panose="02020603050405020304" charset="0"/>
               </a:rPr>
               <a:t> Account-5</a:t>
@@ -18565,7 +20255,7 @@
             <a:spLocks noGrp="1"/>
           </p:cNvSpPr>
           <p:nvPr>
-            <p:ph type="body" idx="1"/>
+            <p:ph type="body" idx="4294967295"/>
           </p:nvPr>
         </p:nvSpPr>
         <p:spPr>
@@ -18746,13 +20436,17 @@
       </p:pic>
       <p:sp>
         <p:nvSpPr>
-          <p:cNvPr id="66" name="Google Shape;66;p15"/>
+          <p:cNvPr id="2" name="Google Shape;66;p15">
+            <a:extLst>
+              <a:ext uri="{FF2B5EF4-FFF2-40B4-BE49-F238E27FC236}">
+                <a16:creationId xmlns:a16="http://schemas.microsoft.com/office/drawing/2014/main" id="{B7F8EDEC-C3B5-BAE6-2575-1916CAD7C6DF}"/>
+              </a:ext>
+            </a:extLst>
+          </p:cNvPr>
           <p:cNvSpPr txBox="1">
-            <a:spLocks noGrp="1"/>
+            <a:spLocks/>
           </p:cNvSpPr>
-          <p:nvPr>
-            <p:ph type="title"/>
-          </p:nvPr>
+          <p:nvPr/>
         </p:nvSpPr>
         <p:spPr>
           <a:xfrm>
@@ -18762,43 +20456,286 @@
           <a:prstGeom prst="rect">
             <a:avLst/>
           </a:prstGeom>
+          <a:noFill/>
+          <a:ln>
+            <a:noFill/>
+          </a:ln>
         </p:spPr>
         <p:txBody>
           <a:bodyPr spcFirstLastPara="1" wrap="square" lIns="91425" tIns="91425" rIns="91425" bIns="91425" anchor="t" anchorCtr="0">
-            <a:normAutofit fontScale="90000"/>
+            <a:normAutofit fontScale="82500" lnSpcReduction="20000"/>
           </a:bodyPr>
-          <a:lstStyle/>
+          <a:lstStyle>
+            <a:defPPr marR="0" lvl="0" algn="l" rtl="0">
+              <a:lnSpc>
+                <a:spcPct val="100000"/>
+              </a:lnSpc>
+              <a:spcBef>
+                <a:spcPts val="0"/>
+              </a:spcBef>
+              <a:spcAft>
+                <a:spcPts val="0"/>
+              </a:spcAft>
+            </a:defPPr>
+            <a:lvl1pPr marR="0" lvl="0" algn="l" rtl="0">
+              <a:lnSpc>
+                <a:spcPct val="100000"/>
+              </a:lnSpc>
+              <a:spcBef>
+                <a:spcPts val="0"/>
+              </a:spcBef>
+              <a:spcAft>
+                <a:spcPts val="0"/>
+              </a:spcAft>
+              <a:buClr>
+                <a:schemeClr val="dk1"/>
+              </a:buClr>
+              <a:buSzPts val="2800"/>
+              <a:buFont typeface="Arial" panose="020B0604020202020204"/>
+              <a:buNone/>
+              <a:defRPr sz="2800" b="0" i="0" u="none" strike="noStrike" cap="none">
+                <a:solidFill>
+                  <a:schemeClr val="dk1"/>
+                </a:solidFill>
+                <a:latin typeface="Arial" panose="020B0604020202020204"/>
+                <a:ea typeface="Arial" panose="020B0604020202020204"/>
+                <a:cs typeface="Arial" panose="020B0604020202020204"/>
+                <a:sym typeface="Arial" panose="020B0604020202020204"/>
+              </a:defRPr>
+            </a:lvl1pPr>
+            <a:lvl2pPr marR="0" lvl="1" algn="l" rtl="0">
+              <a:lnSpc>
+                <a:spcPct val="100000"/>
+              </a:lnSpc>
+              <a:spcBef>
+                <a:spcPts val="0"/>
+              </a:spcBef>
+              <a:spcAft>
+                <a:spcPts val="0"/>
+              </a:spcAft>
+              <a:buClr>
+                <a:schemeClr val="dk1"/>
+              </a:buClr>
+              <a:buSzPts val="2800"/>
+              <a:buFont typeface="Arial" panose="020B0604020202020204"/>
+              <a:buNone/>
+              <a:defRPr sz="2800" b="0" i="0" u="none" strike="noStrike" cap="none">
+                <a:solidFill>
+                  <a:schemeClr val="dk1"/>
+                </a:solidFill>
+                <a:latin typeface="Arial" panose="020B0604020202020204"/>
+                <a:ea typeface="Arial" panose="020B0604020202020204"/>
+                <a:cs typeface="Arial" panose="020B0604020202020204"/>
+                <a:sym typeface="Arial" panose="020B0604020202020204"/>
+              </a:defRPr>
+            </a:lvl2pPr>
+            <a:lvl3pPr marR="0" lvl="2" algn="l" rtl="0">
+              <a:lnSpc>
+                <a:spcPct val="100000"/>
+              </a:lnSpc>
+              <a:spcBef>
+                <a:spcPts val="0"/>
+              </a:spcBef>
+              <a:spcAft>
+                <a:spcPts val="0"/>
+              </a:spcAft>
+              <a:buClr>
+                <a:schemeClr val="dk1"/>
+              </a:buClr>
+              <a:buSzPts val="2800"/>
+              <a:buFont typeface="Arial" panose="020B0604020202020204"/>
+              <a:buNone/>
+              <a:defRPr sz="2800" b="0" i="0" u="none" strike="noStrike" cap="none">
+                <a:solidFill>
+                  <a:schemeClr val="dk1"/>
+                </a:solidFill>
+                <a:latin typeface="Arial" panose="020B0604020202020204"/>
+                <a:ea typeface="Arial" panose="020B0604020202020204"/>
+                <a:cs typeface="Arial" panose="020B0604020202020204"/>
+                <a:sym typeface="Arial" panose="020B0604020202020204"/>
+              </a:defRPr>
+            </a:lvl3pPr>
+            <a:lvl4pPr marR="0" lvl="3" algn="l" rtl="0">
+              <a:lnSpc>
+                <a:spcPct val="100000"/>
+              </a:lnSpc>
+              <a:spcBef>
+                <a:spcPts val="0"/>
+              </a:spcBef>
+              <a:spcAft>
+                <a:spcPts val="0"/>
+              </a:spcAft>
+              <a:buClr>
+                <a:schemeClr val="dk1"/>
+              </a:buClr>
+              <a:buSzPts val="2800"/>
+              <a:buFont typeface="Arial" panose="020B0604020202020204"/>
+              <a:buNone/>
+              <a:defRPr sz="2800" b="0" i="0" u="none" strike="noStrike" cap="none">
+                <a:solidFill>
+                  <a:schemeClr val="dk1"/>
+                </a:solidFill>
+                <a:latin typeface="Arial" panose="020B0604020202020204"/>
+                <a:ea typeface="Arial" panose="020B0604020202020204"/>
+                <a:cs typeface="Arial" panose="020B0604020202020204"/>
+                <a:sym typeface="Arial" panose="020B0604020202020204"/>
+              </a:defRPr>
+            </a:lvl4pPr>
+            <a:lvl5pPr marR="0" lvl="4" algn="l" rtl="0">
+              <a:lnSpc>
+                <a:spcPct val="100000"/>
+              </a:lnSpc>
+              <a:spcBef>
+                <a:spcPts val="0"/>
+              </a:spcBef>
+              <a:spcAft>
+                <a:spcPts val="0"/>
+              </a:spcAft>
+              <a:buClr>
+                <a:schemeClr val="dk1"/>
+              </a:buClr>
+              <a:buSzPts val="2800"/>
+              <a:buFont typeface="Arial" panose="020B0604020202020204"/>
+              <a:buNone/>
+              <a:defRPr sz="2800" b="0" i="0" u="none" strike="noStrike" cap="none">
+                <a:solidFill>
+                  <a:schemeClr val="dk1"/>
+                </a:solidFill>
+                <a:latin typeface="Arial" panose="020B0604020202020204"/>
+                <a:ea typeface="Arial" panose="020B0604020202020204"/>
+                <a:cs typeface="Arial" panose="020B0604020202020204"/>
+                <a:sym typeface="Arial" panose="020B0604020202020204"/>
+              </a:defRPr>
+            </a:lvl5pPr>
+            <a:lvl6pPr marR="0" lvl="5" algn="l" rtl="0">
+              <a:lnSpc>
+                <a:spcPct val="100000"/>
+              </a:lnSpc>
+              <a:spcBef>
+                <a:spcPts val="0"/>
+              </a:spcBef>
+              <a:spcAft>
+                <a:spcPts val="0"/>
+              </a:spcAft>
+              <a:buClr>
+                <a:schemeClr val="dk1"/>
+              </a:buClr>
+              <a:buSzPts val="2800"/>
+              <a:buFont typeface="Arial" panose="020B0604020202020204"/>
+              <a:buNone/>
+              <a:defRPr sz="2800" b="0" i="0" u="none" strike="noStrike" cap="none">
+                <a:solidFill>
+                  <a:schemeClr val="dk1"/>
+                </a:solidFill>
+                <a:latin typeface="Arial" panose="020B0604020202020204"/>
+                <a:ea typeface="Arial" panose="020B0604020202020204"/>
+                <a:cs typeface="Arial" panose="020B0604020202020204"/>
+                <a:sym typeface="Arial" panose="020B0604020202020204"/>
+              </a:defRPr>
+            </a:lvl6pPr>
+            <a:lvl7pPr marR="0" lvl="6" algn="l" rtl="0">
+              <a:lnSpc>
+                <a:spcPct val="100000"/>
+              </a:lnSpc>
+              <a:spcBef>
+                <a:spcPts val="0"/>
+              </a:spcBef>
+              <a:spcAft>
+                <a:spcPts val="0"/>
+              </a:spcAft>
+              <a:buClr>
+                <a:schemeClr val="dk1"/>
+              </a:buClr>
+              <a:buSzPts val="2800"/>
+              <a:buFont typeface="Arial" panose="020B0604020202020204"/>
+              <a:buNone/>
+              <a:defRPr sz="2800" b="0" i="0" u="none" strike="noStrike" cap="none">
+                <a:solidFill>
+                  <a:schemeClr val="dk1"/>
+                </a:solidFill>
+                <a:latin typeface="Arial" panose="020B0604020202020204"/>
+                <a:ea typeface="Arial" panose="020B0604020202020204"/>
+                <a:cs typeface="Arial" panose="020B0604020202020204"/>
+                <a:sym typeface="Arial" panose="020B0604020202020204"/>
+              </a:defRPr>
+            </a:lvl7pPr>
+            <a:lvl8pPr marR="0" lvl="7" algn="l" rtl="0">
+              <a:lnSpc>
+                <a:spcPct val="100000"/>
+              </a:lnSpc>
+              <a:spcBef>
+                <a:spcPts val="0"/>
+              </a:spcBef>
+              <a:spcAft>
+                <a:spcPts val="0"/>
+              </a:spcAft>
+              <a:buClr>
+                <a:schemeClr val="dk1"/>
+              </a:buClr>
+              <a:buSzPts val="2800"/>
+              <a:buFont typeface="Arial" panose="020B0604020202020204"/>
+              <a:buNone/>
+              <a:defRPr sz="2800" b="0" i="0" u="none" strike="noStrike" cap="none">
+                <a:solidFill>
+                  <a:schemeClr val="dk1"/>
+                </a:solidFill>
+                <a:latin typeface="Arial" panose="020B0604020202020204"/>
+                <a:ea typeface="Arial" panose="020B0604020202020204"/>
+                <a:cs typeface="Arial" panose="020B0604020202020204"/>
+                <a:sym typeface="Arial" panose="020B0604020202020204"/>
+              </a:defRPr>
+            </a:lvl8pPr>
+            <a:lvl9pPr marR="0" lvl="8" algn="l" rtl="0">
+              <a:lnSpc>
+                <a:spcPct val="100000"/>
+              </a:lnSpc>
+              <a:spcBef>
+                <a:spcPts val="0"/>
+              </a:spcBef>
+              <a:spcAft>
+                <a:spcPts val="0"/>
+              </a:spcAft>
+              <a:buClr>
+                <a:schemeClr val="dk1"/>
+              </a:buClr>
+              <a:buSzPts val="2800"/>
+              <a:buFont typeface="Arial" panose="020B0604020202020204"/>
+              <a:buNone/>
+              <a:defRPr sz="2800" b="0" i="0" u="none" strike="noStrike" cap="none">
+                <a:solidFill>
+                  <a:schemeClr val="dk1"/>
+                </a:solidFill>
+                <a:latin typeface="Arial" panose="020B0604020202020204"/>
+                <a:ea typeface="Arial" panose="020B0604020202020204"/>
+                <a:cs typeface="Arial" panose="020B0604020202020204"/>
+                <a:sym typeface="Arial" panose="020B0604020202020204"/>
+              </a:defRPr>
+            </a:lvl9pPr>
+          </a:lstStyle>
           <a:p>
-            <a:pPr marL="457200" lvl="0" indent="-381000" algn="l" rtl="0">
+            <a:pPr marL="76200">
               <a:lnSpc>
                 <a:spcPct val="115000"/>
               </a:lnSpc>
-              <a:spcBef>
-                <a:spcPts val="0"/>
-              </a:spcBef>
-              <a:spcAft>
-                <a:spcPts val="0"/>
-              </a:spcAft>
               <a:buClr>
                 <a:srgbClr val="980000"/>
               </a:buClr>
               <a:buSzPts val="2400"/>
-              <a:buAutoNum type="arabicPeriod"/>
             </a:pPr>
             <a:r>
-              <a:rPr lang="en-US" altLang="zh-CN" sz="3110" b="1" dirty="0">
-                <a:solidFill>
-                  <a:srgbClr val="980000"/>
-                </a:solidFill>
-                <a:latin typeface="Times New Roman" panose="02020603050405020304" charset="0"/>
-                <a:cs typeface="Times New Roman" panose="02020603050405020304" charset="0"/>
-              </a:rPr>
-              <a:t>Create an </a:t>
-            </a:r>
-            <a:r>
-              <a:rPr lang="en-US" altLang="zh-CN" sz="3110" b="1" dirty="0" err="1">
-                <a:solidFill>
-                  <a:srgbClr val="980000"/>
+              <a:rPr lang="en-US" altLang="zh-CN" sz="3200" b="1" dirty="0">
+                <a:solidFill>
+                  <a:srgbClr val="009242"/>
+                </a:solidFill>
+                <a:latin typeface="Times New Roman" panose="02020603050405020304" charset="0"/>
+                <a:cs typeface="Times New Roman" panose="02020603050405020304" charset="0"/>
+              </a:rPr>
+              <a:t>1. Create an </a:t>
+            </a:r>
+            <a:r>
+              <a:rPr lang="en-US" altLang="zh-CN" sz="3200" b="1" dirty="0" err="1">
+                <a:solidFill>
+                  <a:srgbClr val="009242"/>
                 </a:solidFill>
                 <a:latin typeface="Times New Roman" panose="02020603050405020304" charset="0"/>
                 <a:cs typeface="Times New Roman" panose="02020603050405020304" charset="0"/>
@@ -18806,9 +20743,9 @@
               <a:t>EasyChair</a:t>
             </a:r>
             <a:r>
-              <a:rPr lang="en-US" altLang="zh-CN" sz="3110" b="1" dirty="0">
-                <a:solidFill>
-                  <a:srgbClr val="980000"/>
+              <a:rPr lang="en-US" altLang="zh-CN" sz="3200" b="1" dirty="0">
+                <a:solidFill>
+                  <a:srgbClr val="009242"/>
                 </a:solidFill>
                 <a:latin typeface="Times New Roman" panose="02020603050405020304" charset="0"/>
                 <a:cs typeface="Times New Roman" panose="02020603050405020304" charset="0"/>
@@ -18850,13 +20787,13 @@
             <a:spLocks noGrp="1"/>
           </p:cNvSpPr>
           <p:nvPr>
-            <p:ph type="body" idx="1"/>
+            <p:ph type="body" idx="4294967295"/>
           </p:nvPr>
         </p:nvSpPr>
         <p:spPr>
           <a:xfrm>
-            <a:off x="156124" y="555424"/>
-            <a:ext cx="8520600" cy="4048943"/>
+            <a:off x="156124" y="1108364"/>
+            <a:ext cx="8520600" cy="3496003"/>
           </a:xfrm>
           <a:prstGeom prst="rect">
             <a:avLst/>
@@ -18878,7 +20815,7 @@
             <a:r>
               <a:rPr lang="en-US" sz="1800" dirty="0">
                 <a:solidFill>
-                  <a:srgbClr val="00B050"/>
+                  <a:schemeClr val="tx1"/>
                 </a:solidFill>
               </a:rPr>
               <a:t>Please make sure that you are logged in to </a:t>
@@ -18886,7 +20823,7 @@
             <a:r>
               <a:rPr lang="en-US" sz="1800" dirty="0" err="1">
                 <a:solidFill>
-                  <a:srgbClr val="00B050"/>
+                  <a:schemeClr val="tx1"/>
                 </a:solidFill>
               </a:rPr>
               <a:t>EasyChair</a:t>
@@ -18894,7 +20831,7 @@
             <a:r>
               <a:rPr lang="en-US" sz="1800" dirty="0">
                 <a:solidFill>
-                  <a:srgbClr val="00B050"/>
+                  <a:schemeClr val="tx1"/>
                 </a:solidFill>
               </a:rPr>
               <a:t> before accessing the IEEE UV2026 conference page</a:t>
@@ -18902,7 +20839,7 @@
             <a:r>
               <a:rPr lang="en-US" sz="1800" i="1" dirty="0">
                 <a:solidFill>
-                  <a:srgbClr val="00B050"/>
+                  <a:schemeClr val="tx1"/>
                 </a:solidFill>
               </a:rPr>
               <a:t> </a:t>
@@ -18910,7 +20847,7 @@
             <a:r>
               <a:rPr lang="en-US" sz="1300" i="1" dirty="0">
                 <a:solidFill>
-                  <a:srgbClr val="00B050"/>
+                  <a:schemeClr val="tx1"/>
                 </a:solidFill>
               </a:rPr>
               <a:t>(</a:t>
@@ -18918,16 +20855,22 @@
             <a:r>
               <a:rPr lang="en-US" sz="1300" i="1" dirty="0">
                 <a:solidFill>
-                  <a:srgbClr val="00B050"/>
-                </a:solidFill>
-                <a:hlinkClick r:id="rId3"/>
+                  <a:schemeClr val="tx1"/>
+                </a:solidFill>
+                <a:hlinkClick r:id="rId3">
+                  <a:extLst>
+                    <a:ext uri="{A12FA001-AC4F-418D-AE19-62706E023703}">
+                      <ahyp:hlinkClr xmlns:ahyp="http://schemas.microsoft.com/office/drawing/2018/hyperlinkcolor" val="tx"/>
+                    </a:ext>
+                  </a:extLst>
+                </a:hlinkClick>
               </a:rPr>
               <a:t>https://easychair.org/conferences/?conf=ieeeUV2026</a:t>
             </a:r>
             <a:r>
               <a:rPr lang="en-US" sz="1300" i="1" dirty="0">
                 <a:solidFill>
-                  <a:srgbClr val="00B050"/>
+                  <a:schemeClr val="tx1"/>
                 </a:solidFill>
               </a:rPr>
               <a:t>)</a:t>
@@ -18935,7 +20878,7 @@
             <a:r>
               <a:rPr lang="en-US" sz="2100" dirty="0">
                 <a:solidFill>
-                  <a:srgbClr val="00B050"/>
+                  <a:schemeClr val="tx1"/>
                 </a:solidFill>
               </a:rPr>
               <a:t>.</a:t>
@@ -18943,7 +20886,7 @@
             <a:r>
               <a:rPr lang="en-US" sz="1800" i="1" dirty="0">
                 <a:solidFill>
-                  <a:srgbClr val="00B050"/>
+                  <a:schemeClr val="tx1"/>
                 </a:solidFill>
               </a:rPr>
               <a:t> </a:t>
@@ -18960,14 +20903,14 @@
             <a:r>
               <a:rPr lang="en-US" sz="1800" i="1" dirty="0">
                 <a:solidFill>
-                  <a:srgbClr val="00B050"/>
+                  <a:schemeClr val="tx1"/>
                 </a:solidFill>
               </a:rPr>
               <a:t>Otherwise, you may encounter the following error message.</a:t>
             </a:r>
             <a:endParaRPr lang="en-US" sz="2000" i="1" dirty="0">
               <a:solidFill>
-                <a:schemeClr val="dk1"/>
+                <a:schemeClr val="tx1"/>
               </a:solidFill>
             </a:endParaRPr>
           </a:p>
@@ -18987,7 +20930,67 @@
             </a:pPr>
             <a:endParaRPr lang="en-US" sz="2000" dirty="0">
               <a:solidFill>
+                <a:schemeClr val="tx1"/>
+              </a:solidFill>
+            </a:endParaRPr>
+          </a:p>
+          <a:p>
+            <a:pPr marL="558800" lvl="1" indent="0" algn="l" rtl="0">
+              <a:spcBef>
+                <a:spcPts val="0"/>
+              </a:spcBef>
+              <a:spcAft>
+                <a:spcPts val="0"/>
+              </a:spcAft>
+              <a:buClr>
                 <a:schemeClr val="dk1"/>
+              </a:buClr>
+              <a:buSzPts val="2000"/>
+              <a:buNone/>
+            </a:pPr>
+            <a:endParaRPr lang="en-US" sz="2000" dirty="0">
+              <a:solidFill>
+                <a:schemeClr val="tx1"/>
+              </a:solidFill>
+            </a:endParaRPr>
+          </a:p>
+          <a:p>
+            <a:pPr marL="558800" lvl="1" indent="0" algn="l" rtl="0">
+              <a:spcBef>
+                <a:spcPts val="0"/>
+              </a:spcBef>
+              <a:spcAft>
+                <a:spcPts val="0"/>
+              </a:spcAft>
+              <a:buClr>
+                <a:schemeClr val="dk1"/>
+              </a:buClr>
+              <a:buSzPts val="2000"/>
+              <a:buNone/>
+            </a:pPr>
+            <a:endParaRPr lang="en-US" sz="2000" dirty="0">
+              <a:solidFill>
+                <a:schemeClr val="tx1"/>
+              </a:solidFill>
+            </a:endParaRPr>
+          </a:p>
+          <a:p>
+            <a:pPr marL="558800" lvl="1" indent="0" algn="l" rtl="0">
+              <a:spcBef>
+                <a:spcPts val="0"/>
+              </a:spcBef>
+              <a:spcAft>
+                <a:spcPts val="0"/>
+              </a:spcAft>
+              <a:buClr>
+                <a:schemeClr val="dk1"/>
+              </a:buClr>
+              <a:buSzPts val="2000"/>
+              <a:buNone/>
+            </a:pPr>
+            <a:endParaRPr lang="en-US" sz="2000" dirty="0">
+              <a:solidFill>
+                <a:schemeClr val="tx1"/>
               </a:solidFill>
             </a:endParaRPr>
           </a:p>
@@ -19005,161 +21008,89 @@
               <a:buSzPts val="2000"/>
               <a:buAutoNum type="alphaLcParenR"/>
             </a:pPr>
-            <a:endParaRPr lang="en-US" sz="2000" dirty="0">
+            <a:r>
+              <a:rPr lang="en-US" sz="2000" dirty="0">
+                <a:solidFill>
+                  <a:schemeClr val="tx1"/>
+                </a:solidFill>
+              </a:rPr>
+              <a:t>Please click the </a:t>
+            </a:r>
+            <a:r>
+              <a:rPr lang="en-US" sz="2000" dirty="0">
+                <a:solidFill>
+                  <a:schemeClr val="tx1"/>
+                </a:solidFill>
+                <a:sym typeface="+mn-ea"/>
+              </a:rPr>
+              <a:t>“</a:t>
+            </a:r>
+            <a:r>
+              <a:rPr lang="en-US" sz="2000" b="1" dirty="0">
+                <a:solidFill>
+                  <a:schemeClr val="tx1"/>
+                </a:solidFill>
+                <a:sym typeface="+mn-ea"/>
+              </a:rPr>
+              <a:t>Log in</a:t>
+            </a:r>
+            <a:r>
+              <a:rPr lang="en-US" sz="2000" dirty="0">
+                <a:solidFill>
+                  <a:schemeClr val="tx1"/>
+                </a:solidFill>
+                <a:sym typeface="+mn-ea"/>
+              </a:rPr>
+              <a:t>”</a:t>
+            </a:r>
+            <a:r>
+              <a:rPr lang="en-US" altLang="en-GB" sz="2000" dirty="0">
+                <a:solidFill>
+                  <a:schemeClr val="tx1"/>
+                </a:solidFill>
+                <a:sym typeface="+mn-ea"/>
+              </a:rPr>
+              <a:t> on the top right corner AND enter your </a:t>
+            </a:r>
+            <a:r>
+              <a:rPr lang="en-US" sz="2000" dirty="0">
+                <a:solidFill>
+                  <a:schemeClr val="tx1"/>
+                </a:solidFill>
+                <a:sym typeface="+mn-ea"/>
+              </a:rPr>
+              <a:t>account and password</a:t>
+            </a:r>
+            <a:r>
+              <a:rPr lang="en-US" altLang="en-GB" sz="2000" dirty="0">
+                <a:solidFill>
+                  <a:schemeClr val="tx1"/>
+                </a:solidFill>
+                <a:sym typeface="+mn-ea"/>
+              </a:rPr>
+              <a:t> to log in. </a:t>
+            </a:r>
+            <a:endParaRPr sz="2000" dirty="0">
               <a:solidFill>
-                <a:schemeClr val="dk1"/>
+                <a:schemeClr val="tx1"/>
               </a:solidFill>
             </a:endParaRPr>
           </a:p>
           <a:p>
-            <a:pPr marL="914400" lvl="1" indent="-355600" algn="l" rtl="0">
-              <a:spcBef>
-                <a:spcPts val="0"/>
-              </a:spcBef>
-              <a:spcAft>
-                <a:spcPts val="0"/>
-              </a:spcAft>
-              <a:buClr>
-                <a:schemeClr val="dk1"/>
-              </a:buClr>
-              <a:buSzPts val="2000"/>
-              <a:buAutoNum type="alphaLcParenR"/>
+            <a:pPr marL="0" lvl="0" indent="0" algn="l" rtl="0">
+              <a:spcBef>
+                <a:spcPts val="1200"/>
+              </a:spcBef>
+              <a:spcAft>
+                <a:spcPts val="1200"/>
+              </a:spcAft>
+              <a:buNone/>
             </a:pPr>
-            <a:endParaRPr lang="en-US" sz="2000" dirty="0">
+            <a:endParaRPr sz="2000" dirty="0">
               <a:solidFill>
-                <a:schemeClr val="dk1"/>
+                <a:schemeClr val="tx1"/>
               </a:solidFill>
             </a:endParaRPr>
-          </a:p>
-          <a:p>
-            <a:pPr marL="558800" lvl="1" indent="0" algn="l" rtl="0">
-              <a:spcBef>
-                <a:spcPts val="0"/>
-              </a:spcBef>
-              <a:spcAft>
-                <a:spcPts val="0"/>
-              </a:spcAft>
-              <a:buClr>
-                <a:schemeClr val="dk1"/>
-              </a:buClr>
-              <a:buSzPts val="2000"/>
-              <a:buNone/>
-            </a:pPr>
-            <a:endParaRPr lang="en-US" sz="2000" dirty="0">
-              <a:solidFill>
-                <a:schemeClr val="dk1"/>
-              </a:solidFill>
-            </a:endParaRPr>
-          </a:p>
-          <a:p>
-            <a:pPr marL="914400" lvl="1" indent="-355600" algn="l" rtl="0">
-              <a:spcBef>
-                <a:spcPts val="0"/>
-              </a:spcBef>
-              <a:spcAft>
-                <a:spcPts val="0"/>
-              </a:spcAft>
-              <a:buClr>
-                <a:schemeClr val="dk1"/>
-              </a:buClr>
-              <a:buSzPts val="2000"/>
-              <a:buAutoNum type="alphaLcParenR"/>
-            </a:pPr>
-            <a:endParaRPr lang="en-US" sz="2000" dirty="0">
-              <a:solidFill>
-                <a:schemeClr val="dk1"/>
-              </a:solidFill>
-            </a:endParaRPr>
-          </a:p>
-          <a:p>
-            <a:pPr marL="914400" lvl="1" indent="-355600" algn="l" rtl="0">
-              <a:spcBef>
-                <a:spcPts val="0"/>
-              </a:spcBef>
-              <a:spcAft>
-                <a:spcPts val="0"/>
-              </a:spcAft>
-              <a:buClr>
-                <a:schemeClr val="dk1"/>
-              </a:buClr>
-              <a:buSzPts val="2000"/>
-              <a:buAutoNum type="alphaLcParenR"/>
-            </a:pPr>
-            <a:r>
-              <a:rPr lang="en-US" sz="2000" dirty="0">
-                <a:solidFill>
-                  <a:schemeClr val="dk1"/>
-                </a:solidFill>
-              </a:rPr>
-              <a:t>Please click the </a:t>
-            </a:r>
-            <a:r>
-              <a:rPr lang="en-US" sz="2000" dirty="0">
-                <a:solidFill>
-                  <a:schemeClr val="dk1"/>
-                </a:solidFill>
-                <a:sym typeface="+mn-ea"/>
-              </a:rPr>
-              <a:t>“</a:t>
-            </a:r>
-            <a:r>
-              <a:rPr lang="en-US" sz="2000" b="1" dirty="0">
-                <a:solidFill>
-                  <a:srgbClr val="1155CC"/>
-                </a:solidFill>
-                <a:sym typeface="+mn-ea"/>
-              </a:rPr>
-              <a:t>Log in</a:t>
-            </a:r>
-            <a:r>
-              <a:rPr lang="en-US" sz="2000" dirty="0">
-                <a:solidFill>
-                  <a:schemeClr val="dk1"/>
-                </a:solidFill>
-                <a:sym typeface="+mn-ea"/>
-              </a:rPr>
-              <a:t>”</a:t>
-            </a:r>
-            <a:r>
-              <a:rPr lang="en-US" altLang="en-GB" sz="2000" dirty="0">
-                <a:solidFill>
-                  <a:schemeClr val="dk1"/>
-                </a:solidFill>
-                <a:sym typeface="+mn-ea"/>
-              </a:rPr>
-              <a:t> on the top right corner AND enter your </a:t>
-            </a:r>
-            <a:r>
-              <a:rPr lang="en-US" sz="2000" dirty="0">
-                <a:solidFill>
-                  <a:schemeClr val="dk1"/>
-                </a:solidFill>
-                <a:sym typeface="+mn-ea"/>
-              </a:rPr>
-              <a:t>account and password</a:t>
-            </a:r>
-            <a:r>
-              <a:rPr lang="en-US" altLang="en-GB" sz="2000" dirty="0">
-                <a:solidFill>
-                  <a:schemeClr val="dk1"/>
-                </a:solidFill>
-                <a:sym typeface="+mn-ea"/>
-              </a:rPr>
-              <a:t> to log in. </a:t>
-            </a:r>
-            <a:endParaRPr sz="2000" dirty="0"/>
-          </a:p>
-          <a:p>
-            <a:pPr marL="0" lvl="0" indent="0" algn="l" rtl="0">
-              <a:spcBef>
-                <a:spcPts val="1200"/>
-              </a:spcBef>
-              <a:spcAft>
-                <a:spcPts val="1200"/>
-              </a:spcAft>
-              <a:buNone/>
-            </a:pPr>
-            <a:endParaRPr sz="2000" dirty="0"/>
           </a:p>
         </p:txBody>
       </p:sp>
@@ -19171,7 +21102,7 @@
         </p:nvGrpSpPr>
         <p:grpSpPr>
           <a:xfrm>
-            <a:off x="156124" y="1412933"/>
+            <a:off x="166200" y="1842424"/>
             <a:ext cx="8977800" cy="1633855"/>
             <a:chOff x="156124" y="1526222"/>
             <a:chExt cx="8977800" cy="1633855"/>
@@ -19261,10 +21192,10 @@
             <p:nvPr/>
           </p:nvPicPr>
           <p:blipFill>
-            <a:blip r:embed="rId5">
+            <a:blip>
               <a:extLst>
                 <a:ext uri="{96DAC541-7B7A-43D3-8B79-37D633B846F1}">
-                  <asvg:svgBlip xmlns:asvg="http://schemas.microsoft.com/office/drawing/2016/SVG/main" r:embed="rId6"/>
+                  <asvg:svgBlip xmlns:asvg="http://schemas.microsoft.com/office/drawing/2016/SVG/main" r:embed="rId5"/>
                 </a:ext>
               </a:extLst>
             </a:blip>
@@ -19285,15 +21216,21 @@
       </p:grpSp>
       <p:sp>
         <p:nvSpPr>
-          <p:cNvPr id="66" name="Google Shape;66;p15"/>
+          <p:cNvPr id="3" name="Google Shape;66;p15">
+            <a:extLst>
+              <a:ext uri="{FF2B5EF4-FFF2-40B4-BE49-F238E27FC236}">
+                <a16:creationId xmlns:a16="http://schemas.microsoft.com/office/drawing/2014/main" id="{73D7D3C2-4663-884C-5C2A-BA4A31FC2DE7}"/>
+              </a:ext>
+            </a:extLst>
+          </p:cNvPr>
           <p:cNvSpPr txBox="1">
-            <a:spLocks noGrp="1"/>
+            <a:spLocks/>
           </p:cNvSpPr>
           <p:nvPr/>
         </p:nvSpPr>
         <p:spPr>
           <a:xfrm>
-            <a:off x="250740" y="62120"/>
+            <a:off x="311700" y="445025"/>
             <a:ext cx="8520600" cy="572700"/>
           </a:xfrm>
           <a:prstGeom prst="rect">
@@ -19305,8 +21242,8 @@
           </a:ln>
         </p:spPr>
         <p:txBody>
-          <a:bodyPr wrap="square" lIns="91425" tIns="91425" rIns="91425" bIns="91425" anchor="t" anchorCtr="0">
-            <a:normAutofit fontScale="85000" lnSpcReduction="10000"/>
+          <a:bodyPr spcFirstLastPara="1" wrap="square" lIns="91425" tIns="91425" rIns="91425" bIns="91425" anchor="t" anchorCtr="0">
+            <a:normAutofit fontScale="82500" lnSpcReduction="20000"/>
           </a:bodyPr>
           <a:lstStyle>
             <a:defPPr marR="0" lvl="0" algn="l" rtl="0">
@@ -19556,49 +21493,42 @@
             </a:lvl9pPr>
           </a:lstStyle>
           <a:p>
-            <a:pPr marL="457200" lvl="0" indent="-381000" algn="l" rtl="0">
+            <a:pPr marL="76200">
               <a:lnSpc>
                 <a:spcPct val="115000"/>
               </a:lnSpc>
-              <a:spcBef>
-                <a:spcPts val="0"/>
-              </a:spcBef>
-              <a:spcAft>
-                <a:spcPts val="0"/>
-              </a:spcAft>
               <a:buClr>
                 <a:srgbClr val="980000"/>
               </a:buClr>
               <a:buSzPts val="2400"/>
-              <a:buAutoNum type="arabicPeriod"/>
             </a:pPr>
             <a:r>
-              <a:rPr lang="en-US" altLang="zh-CN" sz="3110" b="1" dirty="0">
-                <a:solidFill>
-                  <a:srgbClr val="980000"/>
-                </a:solidFill>
-                <a:latin typeface="Times New Roman" panose="02020603050405020304" pitchFamily="18" charset="0"/>
-                <a:cs typeface="Times New Roman" panose="02020603050405020304" pitchFamily="18" charset="0"/>
-              </a:rPr>
-              <a:t>Create an </a:t>
-            </a:r>
-            <a:r>
-              <a:rPr lang="en-US" altLang="zh-CN" sz="3110" b="1" dirty="0" err="1">
-                <a:solidFill>
-                  <a:srgbClr val="980000"/>
-                </a:solidFill>
-                <a:latin typeface="Times New Roman" panose="02020603050405020304" pitchFamily="18" charset="0"/>
-                <a:cs typeface="Times New Roman" panose="02020603050405020304" pitchFamily="18" charset="0"/>
+              <a:rPr lang="en-US" altLang="zh-CN" sz="3200" b="1" dirty="0">
+                <a:solidFill>
+                  <a:srgbClr val="009242"/>
+                </a:solidFill>
+                <a:latin typeface="Times New Roman" panose="02020603050405020304" charset="0"/>
+                <a:cs typeface="Times New Roman" panose="02020603050405020304" charset="0"/>
+              </a:rPr>
+              <a:t>1. Create an </a:t>
+            </a:r>
+            <a:r>
+              <a:rPr lang="en-US" altLang="zh-CN" sz="3200" b="1" dirty="0" err="1">
+                <a:solidFill>
+                  <a:srgbClr val="009242"/>
+                </a:solidFill>
+                <a:latin typeface="Times New Roman" panose="02020603050405020304" charset="0"/>
+                <a:cs typeface="Times New Roman" panose="02020603050405020304" charset="0"/>
               </a:rPr>
               <a:t>EasyChair</a:t>
             </a:r>
             <a:r>
-              <a:rPr lang="en-US" altLang="zh-CN" sz="3110" b="1" dirty="0">
-                <a:solidFill>
-                  <a:srgbClr val="980000"/>
-                </a:solidFill>
-                <a:latin typeface="Times New Roman" panose="02020603050405020304" pitchFamily="18" charset="0"/>
-                <a:cs typeface="Times New Roman" panose="02020603050405020304" pitchFamily="18" charset="0"/>
+              <a:rPr lang="en-US" altLang="zh-CN" sz="3200" b="1" dirty="0">
+                <a:solidFill>
+                  <a:srgbClr val="009242"/>
+                </a:solidFill>
+                <a:latin typeface="Times New Roman" panose="02020603050405020304" charset="0"/>
+                <a:cs typeface="Times New Roman" panose="02020603050405020304" charset="0"/>
               </a:rPr>
               <a:t> Account-7</a:t>
             </a:r>
